--- a/docs/deck/Because-deck.pptx
+++ b/docs/deck/Because-deck.pptx
@@ -18,26 +18,21 @@
     <p:sldId id="263" r:id="rId15"/>
     <p:sldId id="264" r:id="rId16"/>
     <p:sldId id="265" r:id="rId17"/>
-    <p:sldId id="266" r:id="rId18"/>
-    <p:sldId id="267" r:id="rId19"/>
-    <p:sldId id="268" r:id="rId20"/>
-    <p:sldId id="269" r:id="rId21"/>
-    <p:sldId id="270" r:id="rId22"/>
   </p:sldIdLst>
   <p:sldSz cx="12192000" cy="6858000" type="screen16x9"/>
   <p:notesSz cx="6858000" cy="9144000"/>
   <p:embeddedFontLst>
     <p:embeddedFont>
       <p:font typeface="Montserrat Bold" charset="1"/>
-      <p:regular r:id="rId23"/>
+      <p:regular r:id="rId18"/>
     </p:embeddedFont>
     <p:embeddedFont>
       <p:font typeface="Space Grotesk Bold" charset="1"/>
-      <p:regular r:id="rId24"/>
+      <p:regular r:id="rId19"/>
     </p:embeddedFont>
     <p:embeddedFont>
       <p:font typeface="Space Grotesk" charset="1"/>
-      <p:regular r:id="rId25"/>
+      <p:regular r:id="rId20"/>
     </p:embeddedFont>
   </p:embeddedFontLst>
   <p:defaultTextStyle>
@@ -533,7 +528,7 @@
           <a:lstStyle/>
           <a:p>
             <a:r>
-              <a:t>GenAI Works Open Agent Hackathon 2026. Live demo: https://because-agent.vercel.app. Code: https://github.com/OlsOls4/because</a:t>
+              <a:t>GenAI Works Open Agent Hackathon 2026. Live demo https://because-agent.vercel.app. Code https://github.com/OlsOls4/because</a:t>
             </a:r>
           </a:p>
         </p:txBody>
@@ -603,217 +598,7 @@
           <a:lstStyle/>
           <a:p>
             <a:r>
-              <a:t>Sources: conformance/meterless/hmem-scorecard.txt, conformance/meterless/scout-eval-report.md, pytest -q (58 passed), examples/outputs/. The v1 Scout corpus is a smoke set, treat as conformance not a benchmark.</a:t>
-            </a:r>
-          </a:p>
-        </p:txBody>
-      </p:sp>
-      <p:sp>
-        <p:nvSpPr>
-          <p:cNvPr id="4" name="Slide Number Placeholder 3"/>
-          <p:cNvSpPr>
-            <a:spLocks noGrp="1"/>
-          </p:cNvSpPr>
-          <p:nvPr>
-            <p:ph type="sldNum" idx="5" sz="quarter"/>
-          </p:nvPr>
-        </p:nvSpPr>
-        <p:spPr/>
-      </p:sp>
-    </p:spTree>
-  </p:cSld>
-  <p:clrMapOvr>
-    <a:masterClrMapping/>
-  </p:clrMapOvr>
-</p:notes>
-</file>
-
-<file path=ppt/notesSlides/notesSlide11.xml><?xml version="1.0" encoding="utf-8"?>
-<p:notes xmlns:a="http://schemas.openxmlformats.org/drawingml/2006/main" xmlns:p="http://schemas.openxmlformats.org/presentationml/2006/main" xmlns:r="http://schemas.openxmlformats.org/officeDocument/2006/relationships">
-  <p:cSld>
-    <p:spTree>
-      <p:nvGrpSpPr>
-        <p:cNvPr id="1" name=""/>
-        <p:cNvGrpSpPr/>
-        <p:nvPr/>
-      </p:nvGrpSpPr>
-      <p:grpSpPr>
-        <a:xfrm>
-          <a:off x="0" y="0"/>
-          <a:ext cx="0" cy="0"/>
-          <a:chOff x="0" y="0"/>
-          <a:chExt cx="0" cy="0"/>
-        </a:xfrm>
-      </p:grpSpPr>
-      <p:sp>
-        <p:nvSpPr>
-          <p:cNvPr id="2" name="Slide Image Placeholder 1"/>
-          <p:cNvSpPr>
-            <a:spLocks noGrp="1"/>
-          </p:cNvSpPr>
-          <p:nvPr>
-            <p:ph type="sldImg" idx="2"/>
-          </p:nvPr>
-        </p:nvSpPr>
-        <p:spPr/>
-      </p:sp>
-      <p:sp>
-        <p:nvSpPr>
-          <p:cNvPr id="3" name="Notes Placeholder 2"/>
-          <p:cNvSpPr>
-            <a:spLocks noGrp="1"/>
-          </p:cNvSpPr>
-          <p:nvPr>
-            <p:ph type="body" idx="3" sz="quarter"/>
-          </p:nvPr>
-        </p:nvSpPr>
-        <p:spPr/>
-        <p:txBody>
-          <a:bodyPr/>
-          <a:lstStyle/>
-          <a:p>
-            <a:r>
-              <a:t>Dependencies: duckdb, httpx, fastapi, uvicorn, python-dotenv; optional JayDeBeApi + JPype1 for Zetaris JDBC.</a:t>
-            </a:r>
-          </a:p>
-        </p:txBody>
-      </p:sp>
-      <p:sp>
-        <p:nvSpPr>
-          <p:cNvPr id="4" name="Slide Number Placeholder 3"/>
-          <p:cNvSpPr>
-            <a:spLocks noGrp="1"/>
-          </p:cNvSpPr>
-          <p:nvPr>
-            <p:ph type="sldNum" idx="5" sz="quarter"/>
-          </p:nvPr>
-        </p:nvSpPr>
-        <p:spPr/>
-      </p:sp>
-    </p:spTree>
-  </p:cSld>
-  <p:clrMapOvr>
-    <a:masterClrMapping/>
-  </p:clrMapOvr>
-</p:notes>
-</file>
-
-<file path=ppt/notesSlides/notesSlide12.xml><?xml version="1.0" encoding="utf-8"?>
-<p:notes xmlns:a="http://schemas.openxmlformats.org/drawingml/2006/main" xmlns:p="http://schemas.openxmlformats.org/presentationml/2006/main" xmlns:r="http://schemas.openxmlformats.org/officeDocument/2006/relationships">
-  <p:cSld>
-    <p:spTree>
-      <p:nvGrpSpPr>
-        <p:cNvPr id="1" name=""/>
-        <p:cNvGrpSpPr/>
-        <p:nvPr/>
-      </p:nvGrpSpPr>
-      <p:grpSpPr>
-        <a:xfrm>
-          <a:off x="0" y="0"/>
-          <a:ext cx="0" cy="0"/>
-          <a:chOff x="0" y="0"/>
-          <a:chExt cx="0" cy="0"/>
-        </a:xfrm>
-      </p:grpSpPr>
-      <p:sp>
-        <p:nvSpPr>
-          <p:cNvPr id="2" name="Slide Image Placeholder 1"/>
-          <p:cNvSpPr>
-            <a:spLocks noGrp="1"/>
-          </p:cNvSpPr>
-          <p:nvPr>
-            <p:ph type="sldImg" idx="2"/>
-          </p:nvPr>
-        </p:nvSpPr>
-        <p:spPr/>
-      </p:sp>
-      <p:sp>
-        <p:nvSpPr>
-          <p:cNvPr id="3" name="Notes Placeholder 2"/>
-          <p:cNvSpPr>
-            <a:spLocks noGrp="1"/>
-          </p:cNvSpPr>
-          <p:nvPr>
-            <p:ph type="body" idx="3" sz="quarter"/>
-          </p:nvPr>
-        </p:nvSpPr>
-        <p:spPr/>
-        <p:txBody>
-          <a:bodyPr/>
-          <a:lstStyle/>
-          <a:p>
-            <a:r>
-              <a:t>From README Next steps.</a:t>
-            </a:r>
-          </a:p>
-        </p:txBody>
-      </p:sp>
-      <p:sp>
-        <p:nvSpPr>
-          <p:cNvPr id="4" name="Slide Number Placeholder 3"/>
-          <p:cNvSpPr>
-            <a:spLocks noGrp="1"/>
-          </p:cNvSpPr>
-          <p:nvPr>
-            <p:ph type="sldNum" idx="5" sz="quarter"/>
-          </p:nvPr>
-        </p:nvSpPr>
-        <p:spPr/>
-      </p:sp>
-    </p:spTree>
-  </p:cSld>
-  <p:clrMapOvr>
-    <a:masterClrMapping/>
-  </p:clrMapOvr>
-</p:notes>
-</file>
-
-<file path=ppt/notesSlides/notesSlide13.xml><?xml version="1.0" encoding="utf-8"?>
-<p:notes xmlns:a="http://schemas.openxmlformats.org/drawingml/2006/main" xmlns:p="http://schemas.openxmlformats.org/presentationml/2006/main" xmlns:r="http://schemas.openxmlformats.org/officeDocument/2006/relationships">
-  <p:cSld>
-    <p:spTree>
-      <p:nvGrpSpPr>
-        <p:cNvPr id="1" name=""/>
-        <p:cNvGrpSpPr/>
-        <p:nvPr/>
-      </p:nvGrpSpPr>
-      <p:grpSpPr>
-        <a:xfrm>
-          <a:off x="0" y="0"/>
-          <a:ext cx="0" cy="0"/>
-          <a:chOff x="0" y="0"/>
-          <a:chExt cx="0" cy="0"/>
-        </a:xfrm>
-      </p:grpSpPr>
-      <p:sp>
-        <p:nvSpPr>
-          <p:cNvPr id="2" name="Slide Image Placeholder 1"/>
-          <p:cNvSpPr>
-            <a:spLocks noGrp="1"/>
-          </p:cNvSpPr>
-          <p:nvPr>
-            <p:ph type="sldImg" idx="2"/>
-          </p:nvPr>
-        </p:nvSpPr>
-        <p:spPr/>
-      </p:sp>
-      <p:sp>
-        <p:nvSpPr>
-          <p:cNvPr id="3" name="Notes Placeholder 2"/>
-          <p:cNvSpPr>
-            <a:spLocks noGrp="1"/>
-          </p:cNvSpPr>
-          <p:nvPr>
-            <p:ph type="body" idx="3" sz="quarter"/>
-          </p:nvPr>
-        </p:nvSpPr>
-        <p:spPr/>
-        <p:txBody>
-          <a:bodyPr/>
-          <a:lstStyle/>
-          <a:p>
-            <a:r>
-              <a:t>MIT licence. Built during the build window from 22 Oct 2026; pre-existing components declared in README and docs/SPONSORS.md.</a:t>
+              <a:t>MIT licence. Video: https://youtu.be/7SHfgPPmVMQ. Pre-existing components declared in README and docs/SPONSORS.md.</a:t>
             </a:r>
           </a:p>
         </p:txBody>
@@ -883,7 +668,7 @@
           <a:lstStyle/>
           <a:p>
             <a:r>
-              <a:t>The problem: answering 'why did X change?' properly means pulling several sources, aligning periods, testing competing explanations and writing down what does not fit.</a:t>
+              <a:t>Answering 'why did X change?' properly means pulling several sources, aligning periods, testing competing explanations and writing down what does not fit.</a:t>
             </a:r>
           </a:p>
         </p:txBody>
@@ -953,7 +738,7 @@
           <a:lstStyle/>
           <a:p>
             <a:r>
-              <a:t>Target users: anyone who has to defend a 'because' to a sceptical reader.</a:t>
+              <a:t>Real output: examples/outputs/why-did-intel-s-gross-margin-fall-in-2024.md. Medium 0.65, capped because the largest driver ($6.97B restructuring and impairment, over 2.5x the prior-years average) is likely one-off. Screenshot of https://because-agent.vercel.app on 23 Oct 2026.</a:t>
             </a:r>
           </a:p>
         </p:txBody>
@@ -1023,7 +808,7 @@
           <a:lstStyle/>
           <a:p>
             <a:r>
-              <a:t>Screenshot of https://because-agent.vercel.app, Intel 2024 gross margin: 40.0% -&gt; 32.7%, drivers restructuring/impairment, depreciation, lower revenue. Confidence High 0.74.</a:t>
+              <a:t>Scout -&gt; Analyst -&gt; DataHarness (Zetaris over JDBC; DuckDB fallback) -&gt; SEC EDGAR XBRL, ONS, FRED. Premise check, hypotheses with explicit rules, calibrated confidence. Optional NVIDIA NIM narrative is rejected unless every sentence cites a finding and every number appears in the evidence.</a:t>
             </a:r>
           </a:p>
         </p:txBody>
@@ -1093,7 +878,7 @@
           <a:lstStyle/>
           <a:p>
             <a:r>
-              <a:t>The LLM is optional. Answers are computed from data first; an LLM may only rewrite findings and is rejected unless every sentence cites a finding and every number appears in the evidence.</a:t>
+              <a:t>https://github.com/OlsOls4/because/actions/runs/39949595787. Traces in examples/zetaris_runs/. USL: docs/zetaris_usl.sql and usl.log. US unemployment has no second source, so no federated JOIN there.</a:t>
             </a:r>
           </a:p>
         </p:txBody>
@@ -1163,7 +948,7 @@
           <a:lstStyle/>
           <a:p>
             <a:r>
-              <a:t>Scout -&gt; Analyst -&gt; DataHarness (ZetarisBackend over JDBC / UI proxy, DuckDB in SAMPLE_MODE) -&gt; SEC EDGAR XBRL, ONS, FRED. H-MEM recall and write. Optional NVIDIA NIM narrative, validated.</a:t>
+              <a:t>Query Q-49752693a1 on zetaris-jdbc in run 39949595787: ONS D7G7 JOIN FRED PNGASEUUSDM on month, 12-month change in gas price, lag via LAG window. Co-movement, not proof of cause. Companies get EDGAR revenue x FRED semiconductor PPI instead: Intel FY2024 price-adjusted revenue -3.6%.</a:t>
             </a:r>
           </a:p>
         </p:txBody>
@@ -1233,7 +1018,7 @@
           <a:lstStyle/>
           <a:p>
             <a:r>
-              <a:t>Unique: FRED without an API key federated as FILESTORE CSV; REST tables CACHE TABLE'd after registration; companies registered lazily on first question; views reused never dropped. Workflow: .github/workflows/zetaris-e2e.yml.</a:t>
+              <a:t>scripts/eval.py, docs/EVAL.md, examples/eval/results.md. DuckDB backend, live public endpoints, no LLM. Brier 0.124. 19 questions is a sanity check, not a benchmark.</a:t>
             </a:r>
           </a:p>
         </p:txBody>
@@ -1303,7 +1088,7 @@
           <a:lstStyle/>
           <a:p>
             <a:r>
-              <a:t>Unique: memory provenance makes 'why do you believe this?' answerable across sessions. Prompt injection is refused by Scout before any tool runs (examples/outputs/guard-blocked.json).</a:t>
+              <a:t>All three misses are company revenue or price questions where SEC companyfacts has no segment, unit or price data. Committed as-is in examples/eval. Fix: XBRL segment frames and an FX series.</a:t>
             </a:r>
           </a:p>
         </p:txBody>
@@ -1373,7 +1158,7 @@
           <a:lstStyle/>
           <a:p>
             <a:r>
-              <a:t>Sessions: Zetaris backend hardening; FRED as FILESTORE + 'because zetaris sql'; web UI polish. docs/cursor-sessions/. NVIDIA NIM is the first-choice LLM provider for the validated narrative (meta/llama-3.3-70b-instruct).</a:t>
+              <a:t>NIM: nvidia/nemotron-3.5-lightning-30b-a3b narrations in examples/outputs/*-narrated.*; a nemotron-3-ultra narration was rejected for quoting 7.03 and 6.1, numbers in no finding. Meterless Runtime provider untested against a live runtime; Markovian is a library with ported conformance tests, not wired into narration. Cursor: v0.1 written with AI agents in the build window and committed once; three Cursor Agent CLI sessions in docs/cursor-sessions.</a:t>
             </a:r>
           </a:p>
         </p:txBody>
@@ -4505,7 +4290,7 @@
                 <a:cs typeface="Space Grotesk"/>
                 <a:sym typeface="Space Grotesk"/>
               </a:rPr>
-              <a:t>The analyst agent that shows its work. Ask why something happened and audit every claim.</a:t>
+              <a:t>The analyst agent that shows its work. Ask why a number moved and audit every claim.</a:t>
             </a:r>
           </a:p>
         </p:txBody>
@@ -4792,912 +4577,8 @@
         </p:nvSpPr>
         <p:spPr>
           <a:xfrm>
-            <a:off x="4145280" y="3803904"/>
-            <a:ext cx="7168896" cy="9144"/>
-          </a:xfrm>
-          <a:prstGeom prst="rect">
-            <a:avLst/>
-          </a:prstGeom>
-          <a:solidFill>
-            <a:srgbClr val="4A6079"/>
-          </a:solidFill>
-          <a:ln>
-            <a:noFill/>
-          </a:ln>
-          <a:effectLst/>
-        </p:spPr>
-        <p:style>
-          <a:lnRef idx="1">
-            <a:schemeClr val="accent1"/>
-          </a:lnRef>
-          <a:fillRef idx="3">
-            <a:schemeClr val="accent1"/>
-          </a:fillRef>
-          <a:effectRef idx="2">
-            <a:schemeClr val="accent1"/>
-          </a:effectRef>
-          <a:fontRef idx="minor">
-            <a:schemeClr val="lt1"/>
-          </a:fontRef>
-        </p:style>
-        <p:txBody>
-          <a:bodyPr rtlCol="0" anchor="ctr"/>
-          <a:lstStyle/>
-          <a:p/>
-        </p:txBody>
-      </p:sp>
-      <p:sp>
-        <p:nvSpPr>
-          <p:cNvPr id="5" name="Rectangle 4"/>
-          <p:cNvSpPr/>
-          <p:nvPr/>
-        </p:nvSpPr>
-        <p:spPr>
-          <a:xfrm>
-            <a:off x="4145280" y="4602480"/>
-            <a:ext cx="7168896" cy="9144"/>
-          </a:xfrm>
-          <a:prstGeom prst="rect">
-            <a:avLst/>
-          </a:prstGeom>
-          <a:solidFill>
-            <a:srgbClr val="4A6079"/>
-          </a:solidFill>
-          <a:ln>
-            <a:noFill/>
-          </a:ln>
-          <a:effectLst/>
-        </p:spPr>
-        <p:style>
-          <a:lnRef idx="1">
-            <a:schemeClr val="accent1"/>
-          </a:lnRef>
-          <a:fillRef idx="3">
-            <a:schemeClr val="accent1"/>
-          </a:fillRef>
-          <a:effectRef idx="2">
-            <a:schemeClr val="accent1"/>
-          </a:effectRef>
-          <a:fontRef idx="minor">
-            <a:schemeClr val="lt1"/>
-          </a:fontRef>
-        </p:style>
-        <p:txBody>
-          <a:bodyPr rtlCol="0" anchor="ctr"/>
-          <a:lstStyle/>
-          <a:p/>
-        </p:txBody>
-      </p:sp>
-      <p:sp>
-        <p:nvSpPr>
-          <p:cNvPr id="6" name="Rectangle 5"/>
-          <p:cNvSpPr/>
-          <p:nvPr/>
-        </p:nvSpPr>
-        <p:spPr>
-          <a:xfrm>
-            <a:off x="4145280" y="5401056"/>
-            <a:ext cx="7168896" cy="9144"/>
-          </a:xfrm>
-          <a:prstGeom prst="rect">
-            <a:avLst/>
-          </a:prstGeom>
-          <a:solidFill>
-            <a:srgbClr val="4A6079"/>
-          </a:solidFill>
-          <a:ln>
-            <a:noFill/>
-          </a:ln>
-          <a:effectLst/>
-        </p:spPr>
-        <p:style>
-          <a:lnRef idx="1">
-            <a:schemeClr val="accent1"/>
-          </a:lnRef>
-          <a:fillRef idx="3">
-            <a:schemeClr val="accent1"/>
-          </a:fillRef>
-          <a:effectRef idx="2">
-            <a:schemeClr val="accent1"/>
-          </a:effectRef>
-          <a:fontRef idx="minor">
-            <a:schemeClr val="lt1"/>
-          </a:fontRef>
-        </p:style>
-        <p:txBody>
-          <a:bodyPr rtlCol="0" anchor="ctr"/>
-          <a:lstStyle/>
-          <a:p/>
-        </p:txBody>
-      </p:sp>
-      <p:pic>
-        <p:nvPicPr>
-          <p:cNvPr id="7" name="Picture 6" descr="deckimg-i9_vp8ho.jpg"/>
-          <p:cNvPicPr>
-            <a:picLocks noChangeAspect="1"/>
-          </p:cNvPicPr>
-          <p:nvPr/>
-        </p:nvPicPr>
-        <p:blipFill>
-          <a:blip r:embed="rId2"/>
-          <a:srcRect t="36" b="36"/>
-          <a:stretch>
-            <a:fillRect/>
-          </a:stretch>
-        </p:blipFill>
-        <p:spPr>
-          <a:xfrm>
-            <a:off x="0" y="0"/>
-            <a:ext cx="12192000" cy="3566160"/>
-          </a:xfrm>
-          <a:prstGeom prst="rect">
-            <a:avLst/>
-          </a:prstGeom>
-        </p:spPr>
-      </p:pic>
-      <p:sp>
-        <p:nvSpPr>
-          <p:cNvPr id="8" name="TextBox 7"/>
-          <p:cNvSpPr txBox="1"/>
-          <p:nvPr/>
-        </p:nvSpPr>
-        <p:spPr>
-          <a:xfrm>
-            <a:off x="10390632" y="184343"/>
-            <a:ext cx="1143000" cy="162154"/>
-          </a:xfrm>
-          <a:prstGeom prst="rect">
-            <a:avLst/>
-          </a:prstGeom>
-          <a:noFill/>
-        </p:spPr>
-        <p:txBody>
-          <a:bodyPr wrap="square" anchor="t" lIns="0" rIns="0" tIns="0" bIns="0">
-            <a:normAutofit/>
-          </a:bodyPr>
-          <a:lstStyle/>
-          <a:p>
-            <a:pPr algn="r">
-              <a:lnSpc>
-                <a:spcPct val="91750"/>
-              </a:lnSpc>
-            </a:pPr>
-            <a:r>
-              <a:rPr sz="1000" b="0" spc="80">
-                <a:solidFill>
-                  <a:srgbClr val="FFFFFF"/>
-                </a:solidFill>
-                <a:latin typeface="Montserrat Bold"/>
-                <a:cs typeface="Montserrat Bold"/>
-                <a:sym typeface="Montserrat Bold"/>
-              </a:rPr>
-              <a:t>10/15</a:t>
-            </a:r>
-          </a:p>
-        </p:txBody>
-      </p:sp>
-      <p:sp>
-        <p:nvSpPr>
-          <p:cNvPr id="9" name="TextBox 8"/>
-          <p:cNvSpPr txBox="1"/>
-          <p:nvPr/>
-        </p:nvSpPr>
-        <p:spPr>
-          <a:xfrm>
-            <a:off x="658368" y="3803904"/>
-            <a:ext cx="3413760" cy="866364"/>
-          </a:xfrm>
-          <a:prstGeom prst="rect">
-            <a:avLst/>
-          </a:prstGeom>
-          <a:noFill/>
-        </p:spPr>
-        <p:txBody>
-          <a:bodyPr wrap="square" anchor="t" lIns="0" rIns="0" tIns="0" bIns="0">
-            <a:normAutofit/>
-          </a:bodyPr>
-          <a:lstStyle/>
-          <a:p>
-            <a:pPr algn="l">
-              <a:lnSpc>
-                <a:spcPct val="106471"/>
-              </a:lnSpc>
-            </a:pPr>
-            <a:r>
-              <a:rPr sz="1394" b="0">
-                <a:solidFill>
-                  <a:srgbClr val="4A6079"/>
-                </a:solidFill>
-                <a:latin typeface="Space Grotesk"/>
-                <a:cs typeface="Space Grotesk"/>
-                <a:sym typeface="Space Grotesk"/>
-              </a:rPr>
-              <a:t>Three headless Cursor Agent CLI sessions did real work, logged in the repo.</a:t>
-            </a:r>
-          </a:p>
-        </p:txBody>
-      </p:sp>
-      <p:sp>
-        <p:nvSpPr>
-          <p:cNvPr id="10" name="TextBox 9"/>
-          <p:cNvSpPr txBox="1"/>
-          <p:nvPr/>
-        </p:nvSpPr>
-        <p:spPr>
-          <a:xfrm>
-            <a:off x="658368" y="4765040"/>
-            <a:ext cx="3413760" cy="1571119"/>
-          </a:xfrm>
-          <a:prstGeom prst="rect">
-            <a:avLst/>
-          </a:prstGeom>
-          <a:noFill/>
-        </p:spPr>
-        <p:txBody>
-          <a:bodyPr wrap="square" anchor="t" lIns="0" rIns="0" tIns="0" bIns="0">
-            <a:normAutofit/>
-          </a:bodyPr>
-          <a:lstStyle/>
-          <a:p>
-            <a:pPr algn="l">
-              <a:lnSpc>
-                <a:spcPct val="88496"/>
-              </a:lnSpc>
-            </a:pPr>
-            <a:r>
-              <a:rPr sz="4755" b="0">
-                <a:solidFill>
-                  <a:srgbClr val="10304F"/>
-                </a:solidFill>
-                <a:latin typeface="Space Grotesk Bold"/>
-                <a:cs typeface="Space Grotesk Bold"/>
-                <a:sym typeface="Space Grotesk Bold"/>
-              </a:rPr>
-              <a:t>Built in Cursor</a:t>
-            </a:r>
-          </a:p>
-        </p:txBody>
-      </p:sp>
-      <p:sp>
-        <p:nvSpPr>
-          <p:cNvPr id="11" name="TextBox 10"/>
-          <p:cNvSpPr txBox="1"/>
-          <p:nvPr/>
-        </p:nvSpPr>
-        <p:spPr>
-          <a:xfrm>
-            <a:off x="4145280" y="3931920"/>
-            <a:ext cx="7168896" cy="329434"/>
-          </a:xfrm>
-          <a:prstGeom prst="rect">
-            <a:avLst/>
-          </a:prstGeom>
-          <a:noFill/>
-        </p:spPr>
-        <p:txBody>
-          <a:bodyPr wrap="square" anchor="t" lIns="0" rIns="0" tIns="0" bIns="0">
-            <a:normAutofit/>
-          </a:bodyPr>
-          <a:lstStyle/>
-          <a:p>
-            <a:pPr algn="l">
-              <a:lnSpc>
-                <a:spcPct val="91750"/>
-              </a:lnSpc>
-            </a:pPr>
-            <a:r>
-              <a:rPr sz="2000" b="0">
-                <a:solidFill>
-                  <a:srgbClr val="10304F"/>
-                </a:solidFill>
-                <a:latin typeface="Montserrat Bold"/>
-                <a:cs typeface="Montserrat Bold"/>
-                <a:sym typeface="Montserrat Bold"/>
-              </a:rPr>
-              <a:t>Rules</a:t>
-            </a:r>
-          </a:p>
-        </p:txBody>
-      </p:sp>
-      <p:sp>
-        <p:nvSpPr>
-          <p:cNvPr id="12" name="TextBox 11"/>
-          <p:cNvSpPr txBox="1"/>
-          <p:nvPr/>
-        </p:nvSpPr>
-        <p:spPr>
-          <a:xfrm>
-            <a:off x="4145280" y="4275761"/>
-            <a:ext cx="7168896" cy="288788"/>
-          </a:xfrm>
-          <a:prstGeom prst="rect">
-            <a:avLst/>
-          </a:prstGeom>
-          <a:noFill/>
-        </p:spPr>
-        <p:txBody>
-          <a:bodyPr wrap="square" anchor="t" lIns="0" rIns="0" tIns="0" bIns="0">
-            <a:normAutofit/>
-          </a:bodyPr>
-          <a:lstStyle/>
-          <a:p>
-            <a:pPr algn="l">
-              <a:lnSpc>
-                <a:spcPct val="106471"/>
-              </a:lnSpc>
-            </a:pPr>
-            <a:r>
-              <a:rPr sz="1394" b="0">
-                <a:solidFill>
-                  <a:srgbClr val="4A6079"/>
-                </a:solidFill>
-                <a:latin typeface="Space Grotesk"/>
-                <a:cs typeface="Space Grotesk"/>
-                <a:sym typeface="Space Grotesk"/>
-              </a:rPr>
-              <a:t>AGENTS.md and .cursor/rules</a:t>
-            </a:r>
-          </a:p>
-        </p:txBody>
-      </p:sp>
-      <p:sp>
-        <p:nvSpPr>
-          <p:cNvPr id="13" name="TextBox 12"/>
-          <p:cNvSpPr txBox="1"/>
-          <p:nvPr/>
-        </p:nvSpPr>
-        <p:spPr>
-          <a:xfrm>
-            <a:off x="4145280" y="4730496"/>
-            <a:ext cx="7168896" cy="329434"/>
-          </a:xfrm>
-          <a:prstGeom prst="rect">
-            <a:avLst/>
-          </a:prstGeom>
-          <a:noFill/>
-        </p:spPr>
-        <p:txBody>
-          <a:bodyPr wrap="square" anchor="t" lIns="0" rIns="0" tIns="0" bIns="0">
-            <a:normAutofit/>
-          </a:bodyPr>
-          <a:lstStyle/>
-          <a:p>
-            <a:pPr algn="l">
-              <a:lnSpc>
-                <a:spcPct val="91750"/>
-              </a:lnSpc>
-            </a:pPr>
-            <a:r>
-              <a:rPr sz="2000" b="0">
-                <a:solidFill>
-                  <a:srgbClr val="10304F"/>
-                </a:solidFill>
-                <a:latin typeface="Montserrat Bold"/>
-                <a:cs typeface="Montserrat Bold"/>
-                <a:sym typeface="Montserrat Bold"/>
-              </a:rPr>
-              <a:t>Sessions</a:t>
-            </a:r>
-          </a:p>
-        </p:txBody>
-      </p:sp>
-      <p:sp>
-        <p:nvSpPr>
-          <p:cNvPr id="14" name="TextBox 13"/>
-          <p:cNvSpPr txBox="1"/>
-          <p:nvPr/>
-        </p:nvSpPr>
-        <p:spPr>
-          <a:xfrm>
-            <a:off x="4145280" y="5074337"/>
-            <a:ext cx="7168896" cy="288788"/>
-          </a:xfrm>
-          <a:prstGeom prst="rect">
-            <a:avLst/>
-          </a:prstGeom>
-          <a:noFill/>
-        </p:spPr>
-        <p:txBody>
-          <a:bodyPr wrap="square" anchor="t" lIns="0" rIns="0" tIns="0" bIns="0">
-            <a:normAutofit/>
-          </a:bodyPr>
-          <a:lstStyle/>
-          <a:p>
-            <a:pPr algn="l">
-              <a:lnSpc>
-                <a:spcPct val="106471"/>
-              </a:lnSpc>
-            </a:pPr>
-            <a:r>
-              <a:rPr sz="1394" b="0">
-                <a:solidFill>
-                  <a:srgbClr val="4A6079"/>
-                </a:solidFill>
-                <a:latin typeface="Space Grotesk"/>
-                <a:cs typeface="Space Grotesk"/>
-                <a:sym typeface="Space Grotesk"/>
-              </a:rPr>
-              <a:t>Zetaris hardening, FRED FILESTORE, UI polish</a:t>
-            </a:r>
-          </a:p>
-        </p:txBody>
-      </p:sp>
-      <p:sp>
-        <p:nvSpPr>
-          <p:cNvPr id="15" name="TextBox 14"/>
-          <p:cNvSpPr txBox="1"/>
-          <p:nvPr/>
-        </p:nvSpPr>
-        <p:spPr>
-          <a:xfrm>
-            <a:off x="4145280" y="5529072"/>
-            <a:ext cx="7168896" cy="329434"/>
-          </a:xfrm>
-          <a:prstGeom prst="rect">
-            <a:avLst/>
-          </a:prstGeom>
-          <a:noFill/>
-        </p:spPr>
-        <p:txBody>
-          <a:bodyPr wrap="square" anchor="t" lIns="0" rIns="0" tIns="0" bIns="0">
-            <a:normAutofit/>
-          </a:bodyPr>
-          <a:lstStyle/>
-          <a:p>
-            <a:pPr algn="l">
-              <a:lnSpc>
-                <a:spcPct val="91750"/>
-              </a:lnSpc>
-            </a:pPr>
-            <a:r>
-              <a:rPr sz="2000" b="0">
-                <a:solidFill>
-                  <a:srgbClr val="10304F"/>
-                </a:solidFill>
-                <a:latin typeface="Montserrat Bold"/>
-                <a:cs typeface="Montserrat Bold"/>
-                <a:sym typeface="Montserrat Bold"/>
-              </a:rPr>
-              <a:t>NVIDIA</a:t>
-            </a:r>
-          </a:p>
-        </p:txBody>
-      </p:sp>
-      <p:sp>
-        <p:nvSpPr>
-          <p:cNvPr id="16" name="TextBox 15"/>
-          <p:cNvSpPr txBox="1"/>
-          <p:nvPr/>
-        </p:nvSpPr>
-        <p:spPr>
-          <a:xfrm>
-            <a:off x="4145280" y="5872913"/>
-            <a:ext cx="7168896" cy="288788"/>
-          </a:xfrm>
-          <a:prstGeom prst="rect">
-            <a:avLst/>
-          </a:prstGeom>
-          <a:noFill/>
-        </p:spPr>
-        <p:txBody>
-          <a:bodyPr wrap="square" anchor="t" lIns="0" rIns="0" tIns="0" bIns="0">
-            <a:normAutofit/>
-          </a:bodyPr>
-          <a:lstStyle/>
-          <a:p>
-            <a:pPr algn="l">
-              <a:lnSpc>
-                <a:spcPct val="106471"/>
-              </a:lnSpc>
-            </a:pPr>
-            <a:r>
-              <a:rPr sz="1394" b="0">
-                <a:solidFill>
-                  <a:srgbClr val="4A6079"/>
-                </a:solidFill>
-                <a:latin typeface="Space Grotesk"/>
-                <a:cs typeface="Space Grotesk"/>
-                <a:sym typeface="Space Grotesk"/>
-              </a:rPr>
-              <a:t>NIM is the first-choice narrative LLM</a:t>
-            </a:r>
-          </a:p>
-        </p:txBody>
-      </p:sp>
-    </p:spTree>
-  </p:cSld>
-  <p:clrMapOvr>
-    <a:masterClrMapping/>
-  </p:clrMapOvr>
-</p:sld>
-</file>
-
-<file path=ppt/slides/slide11.xml><?xml version="1.0" encoding="utf-8"?>
-<p:sld xmlns:a="http://schemas.openxmlformats.org/drawingml/2006/main" xmlns:p="http://schemas.openxmlformats.org/presentationml/2006/main" xmlns:r="http://schemas.openxmlformats.org/officeDocument/2006/relationships">
-  <p:cSld>
-    <p:bg>
-      <p:bgPr>
-        <a:solidFill>
-          <a:srgbClr val="E6EDF3"/>
-        </a:solidFill>
-        <a:effectLst/>
-      </p:bgPr>
-    </p:bg>
-    <p:spTree>
-      <p:nvGrpSpPr>
-        <p:cNvPr id="1" name=""/>
-        <p:cNvGrpSpPr/>
-        <p:nvPr/>
-      </p:nvGrpSpPr>
-      <p:grpSpPr/>
-      <p:sp>
-        <p:nvSpPr>
-          <p:cNvPr id="2" name="Rectangle 1"/>
-          <p:cNvSpPr/>
-          <p:nvPr/>
-        </p:nvSpPr>
-        <p:spPr>
-          <a:xfrm>
-            <a:off x="4632960" y="201168"/>
-            <a:ext cx="7071360" cy="16459"/>
-          </a:xfrm>
-          <a:prstGeom prst="rect">
-            <a:avLst/>
-          </a:prstGeom>
-          <a:solidFill>
-            <a:srgbClr val="10304F"/>
-          </a:solidFill>
-          <a:ln>
-            <a:noFill/>
-          </a:ln>
-          <a:effectLst/>
-        </p:spPr>
-        <p:style>
-          <a:lnRef idx="1">
-            <a:schemeClr val="accent1"/>
-          </a:lnRef>
-          <a:fillRef idx="3">
-            <a:schemeClr val="accent1"/>
-          </a:fillRef>
-          <a:effectRef idx="2">
-            <a:schemeClr val="accent1"/>
-          </a:effectRef>
-          <a:fontRef idx="minor">
-            <a:schemeClr val="lt1"/>
-          </a:fontRef>
-        </p:style>
-        <p:txBody>
-          <a:bodyPr rtlCol="0" anchor="ctr"/>
-          <a:lstStyle/>
-          <a:p/>
-        </p:txBody>
-      </p:sp>
-      <p:sp>
-        <p:nvSpPr>
-          <p:cNvPr id="3" name="Rectangle 2"/>
-          <p:cNvSpPr/>
-          <p:nvPr/>
-        </p:nvSpPr>
-        <p:spPr>
-          <a:xfrm>
-            <a:off x="11972544" y="201168"/>
-            <a:ext cx="16459" cy="3840480"/>
-          </a:xfrm>
-          <a:prstGeom prst="rect">
-            <a:avLst/>
-          </a:prstGeom>
-          <a:solidFill>
-            <a:srgbClr val="10304F"/>
-          </a:solidFill>
-          <a:ln>
-            <a:noFill/>
-          </a:ln>
-          <a:effectLst/>
-        </p:spPr>
-        <p:style>
-          <a:lnRef idx="1">
-            <a:schemeClr val="accent1"/>
-          </a:lnRef>
-          <a:fillRef idx="3">
-            <a:schemeClr val="accent1"/>
-          </a:fillRef>
-          <a:effectRef idx="2">
-            <a:schemeClr val="accent1"/>
-          </a:effectRef>
-          <a:fontRef idx="minor">
-            <a:schemeClr val="lt1"/>
-          </a:fontRef>
-        </p:style>
-        <p:txBody>
-          <a:bodyPr rtlCol="0" anchor="ctr"/>
-          <a:lstStyle/>
-          <a:p/>
-        </p:txBody>
-      </p:sp>
-      <p:sp>
-        <p:nvSpPr>
-          <p:cNvPr id="4" name="TextBox 3"/>
-          <p:cNvSpPr txBox="1"/>
-          <p:nvPr/>
-        </p:nvSpPr>
-        <p:spPr>
-          <a:xfrm>
-            <a:off x="10390632" y="184343"/>
-            <a:ext cx="1143000" cy="162154"/>
-          </a:xfrm>
-          <a:prstGeom prst="rect">
-            <a:avLst/>
-          </a:prstGeom>
-          <a:noFill/>
-        </p:spPr>
-        <p:txBody>
-          <a:bodyPr wrap="square" anchor="t" lIns="0" rIns="0" tIns="0" bIns="0">
-            <a:normAutofit/>
-          </a:bodyPr>
-          <a:lstStyle/>
-          <a:p>
-            <a:pPr algn="r">
-              <a:lnSpc>
-                <a:spcPct val="91750"/>
-              </a:lnSpc>
-            </a:pPr>
-            <a:r>
-              <a:rPr sz="1000" b="0" spc="80">
-                <a:solidFill>
-                  <a:srgbClr val="000000"/>
-                </a:solidFill>
-                <a:latin typeface="Montserrat Bold"/>
-                <a:cs typeface="Montserrat Bold"/>
-                <a:sym typeface="Montserrat Bold"/>
-              </a:rPr>
-              <a:t>11/15</a:t>
-            </a:r>
-          </a:p>
-        </p:txBody>
-      </p:sp>
-      <p:sp>
-        <p:nvSpPr>
-          <p:cNvPr id="5" name="TextBox 4"/>
-          <p:cNvSpPr txBox="1"/>
-          <p:nvPr/>
-        </p:nvSpPr>
-        <p:spPr>
-          <a:xfrm>
-            <a:off x="658368" y="2147208"/>
-            <a:ext cx="8700211" cy="1243803"/>
-          </a:xfrm>
-          <a:prstGeom prst="rect">
-            <a:avLst/>
-          </a:prstGeom>
-          <a:noFill/>
-        </p:spPr>
-        <p:txBody>
-          <a:bodyPr wrap="square" anchor="t" lIns="0" rIns="0" tIns="0" bIns="0">
-            <a:normAutofit/>
-          </a:bodyPr>
-          <a:lstStyle/>
-          <a:p>
-            <a:pPr algn="l">
-              <a:lnSpc>
-                <a:spcPct val="88496"/>
-              </a:lnSpc>
-            </a:pPr>
-            <a:r>
-              <a:rPr sz="7600" b="0">
-                <a:solidFill>
-                  <a:srgbClr val="6B2A55"/>
-                </a:solidFill>
-                <a:latin typeface="Space Grotesk Bold"/>
-                <a:cs typeface="Space Grotesk Bold"/>
-                <a:sym typeface="Space Grotesk Bold"/>
-              </a:rPr>
-              <a:t>02</a:t>
-            </a:r>
-          </a:p>
-        </p:txBody>
-      </p:sp>
-      <p:sp>
-        <p:nvSpPr>
-          <p:cNvPr id="6" name="TextBox 5"/>
-          <p:cNvSpPr txBox="1"/>
-          <p:nvPr/>
-        </p:nvSpPr>
-        <p:spPr>
-          <a:xfrm>
-            <a:off x="658368" y="3347991"/>
-            <a:ext cx="8700211" cy="1112876"/>
-          </a:xfrm>
-          <a:prstGeom prst="rect">
-            <a:avLst/>
-          </a:prstGeom>
-          <a:noFill/>
-        </p:spPr>
-        <p:txBody>
-          <a:bodyPr wrap="square" anchor="t" lIns="0" rIns="0" tIns="0" bIns="0">
-            <a:normAutofit/>
-          </a:bodyPr>
-          <a:lstStyle/>
-          <a:p>
-            <a:pPr algn="l">
-              <a:lnSpc>
-                <a:spcPct val="88496"/>
-              </a:lnSpc>
-            </a:pPr>
-            <a:r>
-              <a:rPr sz="6800" b="0">
-                <a:solidFill>
-                  <a:srgbClr val="10304F"/>
-                </a:solidFill>
-                <a:latin typeface="Space Grotesk Bold"/>
-                <a:cs typeface="Space Grotesk Bold"/>
-                <a:sym typeface="Space Grotesk Bold"/>
-              </a:rPr>
-              <a:t>Proof and next</a:t>
-            </a:r>
-          </a:p>
-        </p:txBody>
-      </p:sp>
-      <p:sp>
-        <p:nvSpPr>
-          <p:cNvPr id="7" name="TextBox 6"/>
-          <p:cNvSpPr txBox="1"/>
-          <p:nvPr/>
-        </p:nvSpPr>
-        <p:spPr>
-          <a:xfrm>
-            <a:off x="658368" y="4580230"/>
-            <a:ext cx="5981395" cy="401523"/>
-          </a:xfrm>
-          <a:prstGeom prst="rect">
-            <a:avLst/>
-          </a:prstGeom>
-          <a:noFill/>
-        </p:spPr>
-        <p:txBody>
-          <a:bodyPr wrap="square" anchor="t" lIns="0" rIns="0" tIns="0" bIns="0">
-            <a:normAutofit/>
-          </a:bodyPr>
-          <a:lstStyle/>
-          <a:p>
-            <a:pPr algn="l">
-              <a:lnSpc>
-                <a:spcPct val="101774"/>
-              </a:lnSpc>
-            </a:pPr>
-            <a:r>
-              <a:rPr sz="2100" b="0">
-                <a:solidFill>
-                  <a:srgbClr val="10304F"/>
-                </a:solidFill>
-                <a:latin typeface="Space Grotesk"/>
-                <a:cs typeface="Space Grotesk"/>
-                <a:sym typeface="Space Grotesk"/>
-              </a:rPr>
-              <a:t>Conformance, tests and the road ahead.</a:t>
-            </a:r>
-          </a:p>
-        </p:txBody>
-      </p:sp>
-    </p:spTree>
-  </p:cSld>
-  <p:clrMapOvr>
-    <a:masterClrMapping/>
-  </p:clrMapOvr>
-</p:sld>
-</file>
-
-<file path=ppt/slides/slide12.xml><?xml version="1.0" encoding="utf-8"?>
-<p:sld xmlns:a="http://schemas.openxmlformats.org/drawingml/2006/main" xmlns:p="http://schemas.openxmlformats.org/presentationml/2006/main" xmlns:r="http://schemas.openxmlformats.org/officeDocument/2006/relationships">
-  <p:cSld>
-    <p:bg>
-      <p:bgPr>
-        <a:solidFill>
-          <a:srgbClr val="E6EDF3"/>
-        </a:solidFill>
-        <a:effectLst/>
-      </p:bgPr>
-    </p:bg>
-    <p:spTree>
-      <p:nvGrpSpPr>
-        <p:cNvPr id="1" name=""/>
-        <p:cNvGrpSpPr/>
-        <p:nvPr/>
-      </p:nvGrpSpPr>
-      <p:grpSpPr/>
-      <p:sp>
-        <p:nvSpPr>
-          <p:cNvPr id="2" name="Rectangle 1"/>
-          <p:cNvSpPr/>
-          <p:nvPr/>
-        </p:nvSpPr>
-        <p:spPr>
-          <a:xfrm>
-            <a:off x="4632960" y="201168"/>
-            <a:ext cx="7071360" cy="16459"/>
-          </a:xfrm>
-          <a:prstGeom prst="rect">
-            <a:avLst/>
-          </a:prstGeom>
-          <a:solidFill>
-            <a:srgbClr val="10304F"/>
-          </a:solidFill>
-          <a:ln>
-            <a:noFill/>
-          </a:ln>
-          <a:effectLst/>
-        </p:spPr>
-        <p:style>
-          <a:lnRef idx="1">
-            <a:schemeClr val="accent1"/>
-          </a:lnRef>
-          <a:fillRef idx="3">
-            <a:schemeClr val="accent1"/>
-          </a:fillRef>
-          <a:effectRef idx="2">
-            <a:schemeClr val="accent1"/>
-          </a:effectRef>
-          <a:fontRef idx="minor">
-            <a:schemeClr val="lt1"/>
-          </a:fontRef>
-        </p:style>
-        <p:txBody>
-          <a:bodyPr rtlCol="0" anchor="ctr"/>
-          <a:lstStyle/>
-          <a:p/>
-        </p:txBody>
-      </p:sp>
-      <p:sp>
-        <p:nvSpPr>
-          <p:cNvPr id="3" name="Rectangle 2"/>
-          <p:cNvSpPr/>
-          <p:nvPr/>
-        </p:nvSpPr>
-        <p:spPr>
-          <a:xfrm>
-            <a:off x="11972544" y="201168"/>
-            <a:ext cx="16459" cy="3840480"/>
-          </a:xfrm>
-          <a:prstGeom prst="rect">
-            <a:avLst/>
-          </a:prstGeom>
-          <a:solidFill>
-            <a:srgbClr val="10304F"/>
-          </a:solidFill>
-          <a:ln>
-            <a:noFill/>
-          </a:ln>
-          <a:effectLst/>
-        </p:spPr>
-        <p:style>
-          <a:lnRef idx="1">
-            <a:schemeClr val="accent1"/>
-          </a:lnRef>
-          <a:fillRef idx="3">
-            <a:schemeClr val="accent1"/>
-          </a:fillRef>
-          <a:effectRef idx="2">
-            <a:schemeClr val="accent1"/>
-          </a:effectRef>
-          <a:fontRef idx="minor">
-            <a:schemeClr val="lt1"/>
-          </a:fontRef>
-        </p:style>
-        <p:txBody>
-          <a:bodyPr rtlCol="0" anchor="ctr"/>
-          <a:lstStyle/>
-          <a:p/>
-        </p:txBody>
-      </p:sp>
-      <p:sp>
-        <p:nvSpPr>
-          <p:cNvPr id="4" name="Rectangle 3"/>
-          <p:cNvSpPr/>
-          <p:nvPr/>
-        </p:nvSpPr>
-        <p:spPr>
-          <a:xfrm>
-            <a:off x="658368" y="2091329"/>
-            <a:ext cx="782239" cy="25603"/>
+            <a:off x="658368" y="1455725"/>
+            <a:ext cx="1005840" cy="25603"/>
           </a:xfrm>
           <a:prstGeom prst="rect">
             <a:avLst/>
@@ -5732,133 +4613,7 @@
       </p:sp>
       <p:sp>
         <p:nvSpPr>
-          <p:cNvPr id="5" name="Rectangle 4"/>
-          <p:cNvSpPr/>
-          <p:nvPr/>
-        </p:nvSpPr>
-        <p:spPr>
-          <a:xfrm>
-            <a:off x="3468624" y="2091329"/>
-            <a:ext cx="782239" cy="25603"/>
-          </a:xfrm>
-          <a:prstGeom prst="rect">
-            <a:avLst/>
-          </a:prstGeom>
-          <a:solidFill>
-            <a:srgbClr val="6B2A55"/>
-          </a:solidFill>
-          <a:ln>
-            <a:noFill/>
-          </a:ln>
-          <a:effectLst/>
-        </p:spPr>
-        <p:style>
-          <a:lnRef idx="1">
-            <a:schemeClr val="accent1"/>
-          </a:lnRef>
-          <a:fillRef idx="3">
-            <a:schemeClr val="accent1"/>
-          </a:fillRef>
-          <a:effectRef idx="2">
-            <a:schemeClr val="accent1"/>
-          </a:effectRef>
-          <a:fontRef idx="minor">
-            <a:schemeClr val="lt1"/>
-          </a:fontRef>
-        </p:style>
-        <p:txBody>
-          <a:bodyPr rtlCol="0" anchor="ctr"/>
-          <a:lstStyle/>
-          <a:p/>
-        </p:txBody>
-      </p:sp>
-      <p:sp>
-        <p:nvSpPr>
-          <p:cNvPr id="6" name="Rectangle 5"/>
-          <p:cNvSpPr/>
-          <p:nvPr/>
-        </p:nvSpPr>
-        <p:spPr>
-          <a:xfrm>
-            <a:off x="6278880" y="2091329"/>
-            <a:ext cx="782239" cy="25603"/>
-          </a:xfrm>
-          <a:prstGeom prst="rect">
-            <a:avLst/>
-          </a:prstGeom>
-          <a:solidFill>
-            <a:srgbClr val="6B2A55"/>
-          </a:solidFill>
-          <a:ln>
-            <a:noFill/>
-          </a:ln>
-          <a:effectLst/>
-        </p:spPr>
-        <p:style>
-          <a:lnRef idx="1">
-            <a:schemeClr val="accent1"/>
-          </a:lnRef>
-          <a:fillRef idx="3">
-            <a:schemeClr val="accent1"/>
-          </a:fillRef>
-          <a:effectRef idx="2">
-            <a:schemeClr val="accent1"/>
-          </a:effectRef>
-          <a:fontRef idx="minor">
-            <a:schemeClr val="lt1"/>
-          </a:fontRef>
-        </p:style>
-        <p:txBody>
-          <a:bodyPr rtlCol="0" anchor="ctr"/>
-          <a:lstStyle/>
-          <a:p/>
-        </p:txBody>
-      </p:sp>
-      <p:sp>
-        <p:nvSpPr>
-          <p:cNvPr id="7" name="Rectangle 6"/>
-          <p:cNvSpPr/>
-          <p:nvPr/>
-        </p:nvSpPr>
-        <p:spPr>
-          <a:xfrm>
-            <a:off x="9089136" y="2091329"/>
-            <a:ext cx="782239" cy="25603"/>
-          </a:xfrm>
-          <a:prstGeom prst="rect">
-            <a:avLst/>
-          </a:prstGeom>
-          <a:solidFill>
-            <a:srgbClr val="6B2A55"/>
-          </a:solidFill>
-          <a:ln>
-            <a:noFill/>
-          </a:ln>
-          <a:effectLst/>
-        </p:spPr>
-        <p:style>
-          <a:lnRef idx="1">
-            <a:schemeClr val="accent1"/>
-          </a:lnRef>
-          <a:fillRef idx="3">
-            <a:schemeClr val="accent1"/>
-          </a:fillRef>
-          <a:effectRef idx="2">
-            <a:schemeClr val="accent1"/>
-          </a:effectRef>
-          <a:fontRef idx="minor">
-            <a:schemeClr val="lt1"/>
-          </a:fontRef>
-        </p:style>
-        <p:txBody>
-          <a:bodyPr rtlCol="0" anchor="ctr"/>
-          <a:lstStyle/>
-          <a:p/>
-        </p:txBody>
-      </p:sp>
-      <p:sp>
-        <p:nvSpPr>
-          <p:cNvPr id="8" name="TextBox 7"/>
+          <p:cNvPr id="5" name="TextBox 4"/>
           <p:cNvSpPr txBox="1"/>
           <p:nvPr/>
         </p:nvSpPr>
@@ -5892,21 +4647,21 @@
                 <a:cs typeface="Montserrat Bold"/>
                 <a:sym typeface="Montserrat Bold"/>
               </a:rPr>
-              <a:t>12/15</a:t>
-            </a:r>
-          </a:p>
-        </p:txBody>
-      </p:sp>
-      <p:sp>
-        <p:nvSpPr>
-          <p:cNvPr id="9" name="TextBox 8"/>
+              <a:t>10/10</a:t>
+            </a:r>
+          </a:p>
+        </p:txBody>
+      </p:sp>
+      <p:sp>
+        <p:nvSpPr>
+          <p:cNvPr id="6" name="TextBox 5"/>
           <p:cNvSpPr txBox="1"/>
           <p:nvPr/>
         </p:nvSpPr>
         <p:spPr>
           <a:xfrm>
-            <a:off x="658368" y="883351"/>
-            <a:ext cx="7830190" cy="960128"/>
+            <a:off x="658368" y="1766621"/>
+            <a:ext cx="8047695" cy="1112876"/>
           </a:xfrm>
           <a:prstGeom prst="rect">
             <a:avLst/>
@@ -5925,2106 +4680,6 @@
               </a:lnSpc>
             </a:pPr>
             <a:r>
-              <a:rPr sz="5800" b="0">
-                <a:solidFill>
-                  <a:srgbClr val="10304F"/>
-                </a:solidFill>
-                <a:latin typeface="Space Grotesk Bold"/>
-                <a:cs typeface="Space Grotesk Bold"/>
-                <a:sym typeface="Space Grotesk Bold"/>
-              </a:rPr>
-              <a:t>Results</a:t>
-            </a:r>
-          </a:p>
-        </p:txBody>
-      </p:sp>
-      <p:sp>
-        <p:nvSpPr>
-          <p:cNvPr id="10" name="TextBox 9"/>
-          <p:cNvSpPr txBox="1"/>
-          <p:nvPr/>
-        </p:nvSpPr>
-        <p:spPr>
-          <a:xfrm>
-            <a:off x="658368" y="2310785"/>
-            <a:ext cx="2444496" cy="3431670"/>
-          </a:xfrm>
-          <a:prstGeom prst="rect">
-            <a:avLst/>
-          </a:prstGeom>
-          <a:noFill/>
-        </p:spPr>
-        <p:txBody>
-          <a:bodyPr wrap="square" anchor="t" lIns="0" rIns="0" tIns="0" bIns="0">
-            <a:normAutofit/>
-          </a:bodyPr>
-          <a:lstStyle/>
-          <a:p>
-            <a:pPr algn="l">
-              <a:lnSpc>
-                <a:spcPct val="88496"/>
-              </a:lnSpc>
-            </a:pPr>
-            <a:r>
-              <a:rPr sz="7200" b="0">
-                <a:solidFill>
-                  <a:srgbClr val="6B2A55"/>
-                </a:solidFill>
-                <a:latin typeface="Space Grotesk Bold"/>
-                <a:cs typeface="Space Grotesk Bold"/>
-                <a:sym typeface="Space Grotesk Bold"/>
-              </a:rPr>
-              <a:t>13/13</a:t>
-            </a:r>
-          </a:p>
-        </p:txBody>
-      </p:sp>
-      <p:sp>
-        <p:nvSpPr>
-          <p:cNvPr id="11" name="TextBox 10"/>
-          <p:cNvSpPr txBox="1"/>
-          <p:nvPr/>
-        </p:nvSpPr>
-        <p:spPr>
-          <a:xfrm>
-            <a:off x="658368" y="5375886"/>
-            <a:ext cx="2444496" cy="341295"/>
-          </a:xfrm>
-          <a:prstGeom prst="rect">
-            <a:avLst/>
-          </a:prstGeom>
-          <a:noFill/>
-        </p:spPr>
-        <p:txBody>
-          <a:bodyPr wrap="square" anchor="t" lIns="0" rIns="0" tIns="0" bIns="0">
-            <a:normAutofit/>
-          </a:bodyPr>
-          <a:lstStyle/>
-          <a:p>
-            <a:pPr algn="l">
-              <a:lnSpc>
-                <a:spcPct val="106471"/>
-              </a:lnSpc>
-            </a:pPr>
-            <a:r>
-              <a:rPr sz="1700" b="0">
-                <a:solidFill>
-                  <a:srgbClr val="4A6079"/>
-                </a:solidFill>
-                <a:latin typeface="Space Grotesk"/>
-                <a:cs typeface="Space Grotesk"/>
-                <a:sym typeface="Space Grotesk"/>
-              </a:rPr>
-              <a:t>H-MEM conformance</a:t>
-            </a:r>
-          </a:p>
-        </p:txBody>
-      </p:sp>
-      <p:sp>
-        <p:nvSpPr>
-          <p:cNvPr id="12" name="TextBox 11"/>
-          <p:cNvSpPr txBox="1"/>
-          <p:nvPr/>
-        </p:nvSpPr>
-        <p:spPr>
-          <a:xfrm>
-            <a:off x="3468624" y="2310785"/>
-            <a:ext cx="2444496" cy="3431670"/>
-          </a:xfrm>
-          <a:prstGeom prst="rect">
-            <a:avLst/>
-          </a:prstGeom>
-          <a:noFill/>
-        </p:spPr>
-        <p:txBody>
-          <a:bodyPr wrap="square" anchor="t" lIns="0" rIns="0" tIns="0" bIns="0">
-            <a:normAutofit/>
-          </a:bodyPr>
-          <a:lstStyle/>
-          <a:p>
-            <a:pPr algn="l">
-              <a:lnSpc>
-                <a:spcPct val="88496"/>
-              </a:lnSpc>
-            </a:pPr>
-            <a:r>
-              <a:rPr sz="7200" b="0">
-                <a:solidFill>
-                  <a:srgbClr val="6B2A55"/>
-                </a:solidFill>
-                <a:latin typeface="Space Grotesk Bold"/>
-                <a:cs typeface="Space Grotesk Bold"/>
-                <a:sym typeface="Space Grotesk Bold"/>
-              </a:rPr>
-              <a:t>1.00</a:t>
-            </a:r>
-          </a:p>
-        </p:txBody>
-      </p:sp>
-      <p:sp>
-        <p:nvSpPr>
-          <p:cNvPr id="13" name="TextBox 12"/>
-          <p:cNvSpPr txBox="1"/>
-          <p:nvPr/>
-        </p:nvSpPr>
-        <p:spPr>
-          <a:xfrm>
-            <a:off x="3468624" y="5375886"/>
-            <a:ext cx="2444496" cy="341295"/>
-          </a:xfrm>
-          <a:prstGeom prst="rect">
-            <a:avLst/>
-          </a:prstGeom>
-          <a:noFill/>
-        </p:spPr>
-        <p:txBody>
-          <a:bodyPr wrap="square" anchor="t" lIns="0" rIns="0" tIns="0" bIns="0">
-            <a:normAutofit/>
-          </a:bodyPr>
-          <a:lstStyle/>
-          <a:p>
-            <a:pPr algn="l">
-              <a:lnSpc>
-                <a:spcPct val="106471"/>
-              </a:lnSpc>
-            </a:pPr>
-            <a:r>
-              <a:rPr sz="1700" b="0">
-                <a:solidFill>
-                  <a:srgbClr val="4A6079"/>
-                </a:solidFill>
-                <a:latin typeface="Space Grotesk"/>
-                <a:cs typeface="Space Grotesk"/>
-                <a:sym typeface="Space Grotesk"/>
-              </a:rPr>
-              <a:t>Scout eval top-1</a:t>
-            </a:r>
-          </a:p>
-        </p:txBody>
-      </p:sp>
-      <p:sp>
-        <p:nvSpPr>
-          <p:cNvPr id="14" name="TextBox 13"/>
-          <p:cNvSpPr txBox="1"/>
-          <p:nvPr/>
-        </p:nvSpPr>
-        <p:spPr>
-          <a:xfrm>
-            <a:off x="6278880" y="2310785"/>
-            <a:ext cx="2444496" cy="3431670"/>
-          </a:xfrm>
-          <a:prstGeom prst="rect">
-            <a:avLst/>
-          </a:prstGeom>
-          <a:noFill/>
-        </p:spPr>
-        <p:txBody>
-          <a:bodyPr wrap="square" anchor="t" lIns="0" rIns="0" tIns="0" bIns="0">
-            <a:normAutofit/>
-          </a:bodyPr>
-          <a:lstStyle/>
-          <a:p>
-            <a:pPr algn="l">
-              <a:lnSpc>
-                <a:spcPct val="88496"/>
-              </a:lnSpc>
-            </a:pPr>
-            <a:r>
-              <a:rPr sz="7200" b="0">
-                <a:solidFill>
-                  <a:srgbClr val="6B2A55"/>
-                </a:solidFill>
-                <a:latin typeface="Space Grotesk Bold"/>
-                <a:cs typeface="Space Grotesk Bold"/>
-                <a:sym typeface="Space Grotesk Bold"/>
-              </a:rPr>
-              <a:t>58</a:t>
-            </a:r>
-          </a:p>
-        </p:txBody>
-      </p:sp>
-      <p:sp>
-        <p:nvSpPr>
-          <p:cNvPr id="15" name="TextBox 14"/>
-          <p:cNvSpPr txBox="1"/>
-          <p:nvPr/>
-        </p:nvSpPr>
-        <p:spPr>
-          <a:xfrm>
-            <a:off x="6278880" y="5375886"/>
-            <a:ext cx="2444496" cy="341295"/>
-          </a:xfrm>
-          <a:prstGeom prst="rect">
-            <a:avLst/>
-          </a:prstGeom>
-          <a:noFill/>
-        </p:spPr>
-        <p:txBody>
-          <a:bodyPr wrap="square" anchor="t" lIns="0" rIns="0" tIns="0" bIns="0">
-            <a:normAutofit/>
-          </a:bodyPr>
-          <a:lstStyle/>
-          <a:p>
-            <a:pPr algn="l">
-              <a:lnSpc>
-                <a:spcPct val="106471"/>
-              </a:lnSpc>
-            </a:pPr>
-            <a:r>
-              <a:rPr sz="1700" b="0">
-                <a:solidFill>
-                  <a:srgbClr val="4A6079"/>
-                </a:solidFill>
-                <a:latin typeface="Space Grotesk"/>
-                <a:cs typeface="Space Grotesk"/>
-                <a:sym typeface="Space Grotesk"/>
-              </a:rPr>
-              <a:t>Offline tests</a:t>
-            </a:r>
-          </a:p>
-        </p:txBody>
-      </p:sp>
-      <p:sp>
-        <p:nvSpPr>
-          <p:cNvPr id="16" name="TextBox 15"/>
-          <p:cNvSpPr txBox="1"/>
-          <p:nvPr/>
-        </p:nvSpPr>
-        <p:spPr>
-          <a:xfrm>
-            <a:off x="9089136" y="2310785"/>
-            <a:ext cx="2444496" cy="3431670"/>
-          </a:xfrm>
-          <a:prstGeom prst="rect">
-            <a:avLst/>
-          </a:prstGeom>
-          <a:noFill/>
-        </p:spPr>
-        <p:txBody>
-          <a:bodyPr wrap="square" anchor="t" lIns="0" rIns="0" tIns="0" bIns="0">
-            <a:normAutofit/>
-          </a:bodyPr>
-          <a:lstStyle/>
-          <a:p>
-            <a:pPr algn="l">
-              <a:lnSpc>
-                <a:spcPct val="88496"/>
-              </a:lnSpc>
-            </a:pPr>
-            <a:r>
-              <a:rPr sz="7200" b="0">
-                <a:solidFill>
-                  <a:srgbClr val="6B2A55"/>
-                </a:solidFill>
-                <a:latin typeface="Space Grotesk Bold"/>
-                <a:cs typeface="Space Grotesk Bold"/>
-                <a:sym typeface="Space Grotesk Bold"/>
-              </a:rPr>
-              <a:t>0.70-0.94</a:t>
-            </a:r>
-          </a:p>
-        </p:txBody>
-      </p:sp>
-      <p:sp>
-        <p:nvSpPr>
-          <p:cNvPr id="17" name="TextBox 16"/>
-          <p:cNvSpPr txBox="1"/>
-          <p:nvPr/>
-        </p:nvSpPr>
-        <p:spPr>
-          <a:xfrm>
-            <a:off x="9089136" y="5375886"/>
-            <a:ext cx="2444496" cy="682589"/>
-          </a:xfrm>
-          <a:prstGeom prst="rect">
-            <a:avLst/>
-          </a:prstGeom>
-          <a:noFill/>
-        </p:spPr>
-        <p:txBody>
-          <a:bodyPr wrap="square" anchor="t" lIns="0" rIns="0" tIns="0" bIns="0">
-            <a:normAutofit/>
-          </a:bodyPr>
-          <a:lstStyle/>
-          <a:p>
-            <a:pPr algn="l">
-              <a:lnSpc>
-                <a:spcPct val="106471"/>
-              </a:lnSpc>
-            </a:pPr>
-            <a:r>
-              <a:rPr sz="1700" b="0">
-                <a:solidFill>
-                  <a:srgbClr val="4A6079"/>
-                </a:solidFill>
-                <a:latin typeface="Space Grotesk"/>
-                <a:cs typeface="Space Grotesk"/>
-                <a:sym typeface="Space Grotesk"/>
-              </a:rPr>
-              <a:t>Confidence on 4 saved runs</a:t>
-            </a:r>
-          </a:p>
-        </p:txBody>
-      </p:sp>
-    </p:spTree>
-  </p:cSld>
-  <p:clrMapOvr>
-    <a:masterClrMapping/>
-  </p:clrMapOvr>
-</p:sld>
-</file>
-
-<file path=ppt/slides/slide13.xml><?xml version="1.0" encoding="utf-8"?>
-<p:sld xmlns:a="http://schemas.openxmlformats.org/drawingml/2006/main" xmlns:p="http://schemas.openxmlformats.org/presentationml/2006/main" xmlns:r="http://schemas.openxmlformats.org/officeDocument/2006/relationships">
-  <p:cSld>
-    <p:bg>
-      <p:bgPr>
-        <a:solidFill>
-          <a:srgbClr val="E6EDF3"/>
-        </a:solidFill>
-        <a:effectLst/>
-      </p:bgPr>
-    </p:bg>
-    <p:spTree>
-      <p:nvGrpSpPr>
-        <p:cNvPr id="1" name=""/>
-        <p:cNvGrpSpPr/>
-        <p:nvPr/>
-      </p:nvGrpSpPr>
-      <p:grpSpPr/>
-      <p:sp>
-        <p:nvSpPr>
-          <p:cNvPr id="2" name="Rectangle 1"/>
-          <p:cNvSpPr/>
-          <p:nvPr/>
-        </p:nvSpPr>
-        <p:spPr>
-          <a:xfrm>
-            <a:off x="4632960" y="201168"/>
-            <a:ext cx="7071360" cy="16459"/>
-          </a:xfrm>
-          <a:prstGeom prst="rect">
-            <a:avLst/>
-          </a:prstGeom>
-          <a:solidFill>
-            <a:srgbClr val="10304F"/>
-          </a:solidFill>
-          <a:ln>
-            <a:noFill/>
-          </a:ln>
-          <a:effectLst/>
-        </p:spPr>
-        <p:style>
-          <a:lnRef idx="1">
-            <a:schemeClr val="accent1"/>
-          </a:lnRef>
-          <a:fillRef idx="3">
-            <a:schemeClr val="accent1"/>
-          </a:fillRef>
-          <a:effectRef idx="2">
-            <a:schemeClr val="accent1"/>
-          </a:effectRef>
-          <a:fontRef idx="minor">
-            <a:schemeClr val="lt1"/>
-          </a:fontRef>
-        </p:style>
-        <p:txBody>
-          <a:bodyPr rtlCol="0" anchor="ctr"/>
-          <a:lstStyle/>
-          <a:p/>
-        </p:txBody>
-      </p:sp>
-      <p:sp>
-        <p:nvSpPr>
-          <p:cNvPr id="3" name="Rectangle 2"/>
-          <p:cNvSpPr/>
-          <p:nvPr/>
-        </p:nvSpPr>
-        <p:spPr>
-          <a:xfrm>
-            <a:off x="11972544" y="201168"/>
-            <a:ext cx="16459" cy="3840480"/>
-          </a:xfrm>
-          <a:prstGeom prst="rect">
-            <a:avLst/>
-          </a:prstGeom>
-          <a:solidFill>
-            <a:srgbClr val="10304F"/>
-          </a:solidFill>
-          <a:ln>
-            <a:noFill/>
-          </a:ln>
-          <a:effectLst/>
-        </p:spPr>
-        <p:style>
-          <a:lnRef idx="1">
-            <a:schemeClr val="accent1"/>
-          </a:lnRef>
-          <a:fillRef idx="3">
-            <a:schemeClr val="accent1"/>
-          </a:fillRef>
-          <a:effectRef idx="2">
-            <a:schemeClr val="accent1"/>
-          </a:effectRef>
-          <a:fontRef idx="minor">
-            <a:schemeClr val="lt1"/>
-          </a:fontRef>
-        </p:style>
-        <p:txBody>
-          <a:bodyPr rtlCol="0" anchor="ctr"/>
-          <a:lstStyle/>
-          <a:p/>
-        </p:txBody>
-      </p:sp>
-      <p:sp>
-        <p:nvSpPr>
-          <p:cNvPr id="4" name="Rectangle 3"/>
-          <p:cNvSpPr/>
-          <p:nvPr/>
-        </p:nvSpPr>
-        <p:spPr>
-          <a:xfrm>
-            <a:off x="658368" y="2297076"/>
-            <a:ext cx="10875264" cy="13716"/>
-          </a:xfrm>
-          <a:prstGeom prst="rect">
-            <a:avLst/>
-          </a:prstGeom>
-          <a:solidFill>
-            <a:srgbClr val="6B2A55"/>
-          </a:solidFill>
-          <a:ln>
-            <a:noFill/>
-          </a:ln>
-          <a:effectLst/>
-        </p:spPr>
-        <p:style>
-          <a:lnRef idx="1">
-            <a:schemeClr val="accent1"/>
-          </a:lnRef>
-          <a:fillRef idx="3">
-            <a:schemeClr val="accent1"/>
-          </a:fillRef>
-          <a:effectRef idx="2">
-            <a:schemeClr val="accent1"/>
-          </a:effectRef>
-          <a:fontRef idx="minor">
-            <a:schemeClr val="lt1"/>
-          </a:fontRef>
-        </p:style>
-        <p:txBody>
-          <a:bodyPr rtlCol="0" anchor="ctr"/>
-          <a:lstStyle/>
-          <a:p/>
-        </p:txBody>
-      </p:sp>
-      <p:sp>
-        <p:nvSpPr>
-          <p:cNvPr id="5" name="TextBox 4"/>
-          <p:cNvSpPr txBox="1"/>
-          <p:nvPr/>
-        </p:nvSpPr>
-        <p:spPr>
-          <a:xfrm>
-            <a:off x="10390632" y="184343"/>
-            <a:ext cx="1143000" cy="162154"/>
-          </a:xfrm>
-          <a:prstGeom prst="rect">
-            <a:avLst/>
-          </a:prstGeom>
-          <a:noFill/>
-        </p:spPr>
-        <p:txBody>
-          <a:bodyPr wrap="square" anchor="t" lIns="0" rIns="0" tIns="0" bIns="0">
-            <a:normAutofit/>
-          </a:bodyPr>
-          <a:lstStyle/>
-          <a:p>
-            <a:pPr algn="r">
-              <a:lnSpc>
-                <a:spcPct val="91750"/>
-              </a:lnSpc>
-            </a:pPr>
-            <a:r>
-              <a:rPr sz="1000" b="0" spc="80">
-                <a:solidFill>
-                  <a:srgbClr val="000000"/>
-                </a:solidFill>
-                <a:latin typeface="Montserrat Bold"/>
-                <a:cs typeface="Montserrat Bold"/>
-                <a:sym typeface="Montserrat Bold"/>
-              </a:rPr>
-              <a:t>13/15</a:t>
-            </a:r>
-          </a:p>
-        </p:txBody>
-      </p:sp>
-      <p:sp>
-        <p:nvSpPr>
-          <p:cNvPr id="6" name="TextBox 5"/>
-          <p:cNvSpPr txBox="1"/>
-          <p:nvPr/>
-        </p:nvSpPr>
-        <p:spPr>
-          <a:xfrm>
-            <a:off x="658368" y="946858"/>
-            <a:ext cx="7830190" cy="960128"/>
-          </a:xfrm>
-          <a:prstGeom prst="rect">
-            <a:avLst/>
-          </a:prstGeom>
-          <a:noFill/>
-        </p:spPr>
-        <p:txBody>
-          <a:bodyPr wrap="square" anchor="t" lIns="0" rIns="0" tIns="0" bIns="0">
-            <a:normAutofit/>
-          </a:bodyPr>
-          <a:lstStyle/>
-          <a:p>
-            <a:pPr algn="l">
-              <a:lnSpc>
-                <a:spcPct val="88496"/>
-              </a:lnSpc>
-            </a:pPr>
-            <a:r>
-              <a:rPr sz="5800" b="0">
-                <a:solidFill>
-                  <a:srgbClr val="10304F"/>
-                </a:solidFill>
-                <a:latin typeface="Space Grotesk Bold"/>
-                <a:cs typeface="Space Grotesk Bold"/>
-                <a:sym typeface="Space Grotesk Bold"/>
-              </a:rPr>
-              <a:t>Stack</a:t>
-            </a:r>
-          </a:p>
-        </p:txBody>
-      </p:sp>
-      <p:sp>
-        <p:nvSpPr>
-          <p:cNvPr id="7" name="TextBox 6"/>
-          <p:cNvSpPr txBox="1"/>
-          <p:nvPr/>
-        </p:nvSpPr>
-        <p:spPr>
-          <a:xfrm>
-            <a:off x="658368" y="2063396"/>
-            <a:ext cx="5291328" cy="162154"/>
-          </a:xfrm>
-          <a:prstGeom prst="rect">
-            <a:avLst/>
-          </a:prstGeom>
-          <a:noFill/>
-        </p:spPr>
-        <p:txBody>
-          <a:bodyPr wrap="square" anchor="t" lIns="0" rIns="0" tIns="0" bIns="0">
-            <a:normAutofit/>
-          </a:bodyPr>
-          <a:lstStyle/>
-          <a:p>
-            <a:pPr algn="l">
-              <a:lnSpc>
-                <a:spcPct val="91750"/>
-              </a:lnSpc>
-            </a:pPr>
-            <a:r>
-              <a:rPr sz="1000" b="0" spc="80">
-                <a:solidFill>
-                  <a:srgbClr val="4A6079"/>
-                </a:solidFill>
-                <a:latin typeface="Montserrat Bold"/>
-                <a:cs typeface="Montserrat Bold"/>
-                <a:sym typeface="Montserrat Bold"/>
-              </a:rPr>
-              <a:t>LAYER</a:t>
-            </a:r>
-          </a:p>
-        </p:txBody>
-      </p:sp>
-      <p:sp>
-        <p:nvSpPr>
-          <p:cNvPr id="8" name="TextBox 7"/>
-          <p:cNvSpPr txBox="1"/>
-          <p:nvPr/>
-        </p:nvSpPr>
-        <p:spPr>
-          <a:xfrm>
-            <a:off x="6096000" y="2063396"/>
-            <a:ext cx="5291328" cy="162154"/>
-          </a:xfrm>
-          <a:prstGeom prst="rect">
-            <a:avLst/>
-          </a:prstGeom>
-          <a:noFill/>
-        </p:spPr>
-        <p:txBody>
-          <a:bodyPr wrap="square" anchor="t" lIns="0" rIns="0" tIns="0" bIns="0">
-            <a:normAutofit/>
-          </a:bodyPr>
-          <a:lstStyle/>
-          <a:p>
-            <a:pPr algn="l">
-              <a:lnSpc>
-                <a:spcPct val="91750"/>
-              </a:lnSpc>
-            </a:pPr>
-            <a:r>
-              <a:rPr sz="1000" b="0" spc="80">
-                <a:solidFill>
-                  <a:srgbClr val="4A6079"/>
-                </a:solidFill>
-                <a:latin typeface="Montserrat Bold"/>
-                <a:cs typeface="Montserrat Bold"/>
-                <a:sym typeface="Montserrat Bold"/>
-              </a:rPr>
-              <a:t>TECHNOLOGY</a:t>
-            </a:r>
-          </a:p>
-        </p:txBody>
-      </p:sp>
-      <p:sp>
-        <p:nvSpPr>
-          <p:cNvPr id="9" name="TextBox 8"/>
-          <p:cNvSpPr txBox="1"/>
-          <p:nvPr/>
-        </p:nvSpPr>
-        <p:spPr>
-          <a:xfrm>
-            <a:off x="658368" y="2443380"/>
-            <a:ext cx="5291328" cy="341295"/>
-          </a:xfrm>
-          <a:prstGeom prst="rect">
-            <a:avLst/>
-          </a:prstGeom>
-          <a:noFill/>
-        </p:spPr>
-        <p:txBody>
-          <a:bodyPr wrap="square" anchor="t" lIns="0" rIns="0" tIns="0" bIns="0">
-            <a:normAutofit/>
-          </a:bodyPr>
-          <a:lstStyle/>
-          <a:p>
-            <a:pPr algn="l">
-              <a:lnSpc>
-                <a:spcPct val="106471"/>
-              </a:lnSpc>
-            </a:pPr>
-            <a:r>
-              <a:rPr sz="1700" b="0">
-                <a:solidFill>
-                  <a:srgbClr val="10304F"/>
-                </a:solidFill>
-                <a:latin typeface="Space Grotesk"/>
-                <a:cs typeface="Space Grotesk"/>
-                <a:sym typeface="Space Grotesk"/>
-              </a:rPr>
-              <a:t>Routing</a:t>
-            </a:r>
-          </a:p>
-        </p:txBody>
-      </p:sp>
-      <p:sp>
-        <p:nvSpPr>
-          <p:cNvPr id="10" name="TextBox 9"/>
-          <p:cNvSpPr txBox="1"/>
-          <p:nvPr/>
-        </p:nvSpPr>
-        <p:spPr>
-          <a:xfrm>
-            <a:off x="6096000" y="2443380"/>
-            <a:ext cx="5291328" cy="341295"/>
-          </a:xfrm>
-          <a:prstGeom prst="rect">
-            <a:avLst/>
-          </a:prstGeom>
-          <a:noFill/>
-        </p:spPr>
-        <p:txBody>
-          <a:bodyPr wrap="square" anchor="t" lIns="0" rIns="0" tIns="0" bIns="0">
-            <a:normAutofit/>
-          </a:bodyPr>
-          <a:lstStyle/>
-          <a:p>
-            <a:pPr algn="l">
-              <a:lnSpc>
-                <a:spcPct val="106471"/>
-              </a:lnSpc>
-            </a:pPr>
-            <a:r>
-              <a:rPr sz="1700" b="0">
-                <a:solidFill>
-                  <a:srgbClr val="10304F"/>
-                </a:solidFill>
-                <a:latin typeface="Space Grotesk"/>
-                <a:cs typeface="Space Grotesk"/>
-                <a:sym typeface="Space Grotesk"/>
-              </a:rPr>
-              <a:t>Meterless Scout Intent</a:t>
-            </a:r>
-          </a:p>
-        </p:txBody>
-      </p:sp>
-      <p:sp>
-        <p:nvSpPr>
-          <p:cNvPr id="11" name="TextBox 10"/>
-          <p:cNvSpPr txBox="1"/>
-          <p:nvPr/>
-        </p:nvSpPr>
-        <p:spPr>
-          <a:xfrm>
-            <a:off x="658368" y="3077056"/>
-            <a:ext cx="5291328" cy="341295"/>
-          </a:xfrm>
-          <a:prstGeom prst="rect">
-            <a:avLst/>
-          </a:prstGeom>
-          <a:noFill/>
-        </p:spPr>
-        <p:txBody>
-          <a:bodyPr wrap="square" anchor="t" lIns="0" rIns="0" tIns="0" bIns="0">
-            <a:normAutofit/>
-          </a:bodyPr>
-          <a:lstStyle/>
-          <a:p>
-            <a:pPr algn="l">
-              <a:lnSpc>
-                <a:spcPct val="106471"/>
-              </a:lnSpc>
-            </a:pPr>
-            <a:r>
-              <a:rPr sz="1700" b="0">
-                <a:solidFill>
-                  <a:srgbClr val="10304F"/>
-                </a:solidFill>
-                <a:latin typeface="Space Grotesk"/>
-                <a:cs typeface="Space Grotesk"/>
-                <a:sym typeface="Space Grotesk"/>
-              </a:rPr>
-              <a:t>Memory</a:t>
-            </a:r>
-          </a:p>
-        </p:txBody>
-      </p:sp>
-      <p:sp>
-        <p:nvSpPr>
-          <p:cNvPr id="12" name="TextBox 11"/>
-          <p:cNvSpPr txBox="1"/>
-          <p:nvPr/>
-        </p:nvSpPr>
-        <p:spPr>
-          <a:xfrm>
-            <a:off x="6096000" y="3077056"/>
-            <a:ext cx="5291328" cy="341295"/>
-          </a:xfrm>
-          <a:prstGeom prst="rect">
-            <a:avLst/>
-          </a:prstGeom>
-          <a:noFill/>
-        </p:spPr>
-        <p:txBody>
-          <a:bodyPr wrap="square" anchor="t" lIns="0" rIns="0" tIns="0" bIns="0">
-            <a:normAutofit/>
-          </a:bodyPr>
-          <a:lstStyle/>
-          <a:p>
-            <a:pPr algn="l">
-              <a:lnSpc>
-                <a:spcPct val="106471"/>
-              </a:lnSpc>
-            </a:pPr>
-            <a:r>
-              <a:rPr sz="1700" b="0">
-                <a:solidFill>
-                  <a:srgbClr val="10304F"/>
-                </a:solidFill>
-                <a:latin typeface="Space Grotesk"/>
-                <a:cs typeface="Space Grotesk"/>
-                <a:sym typeface="Space Grotesk"/>
-              </a:rPr>
-              <a:t>Meterless H-MEM</a:t>
-            </a:r>
-          </a:p>
-        </p:txBody>
-      </p:sp>
-      <p:sp>
-        <p:nvSpPr>
-          <p:cNvPr id="13" name="TextBox 12"/>
-          <p:cNvSpPr txBox="1"/>
-          <p:nvPr/>
-        </p:nvSpPr>
-        <p:spPr>
-          <a:xfrm>
-            <a:off x="658368" y="3710732"/>
-            <a:ext cx="5291328" cy="341295"/>
-          </a:xfrm>
-          <a:prstGeom prst="rect">
-            <a:avLst/>
-          </a:prstGeom>
-          <a:noFill/>
-        </p:spPr>
-        <p:txBody>
-          <a:bodyPr wrap="square" anchor="t" lIns="0" rIns="0" tIns="0" bIns="0">
-            <a:normAutofit/>
-          </a:bodyPr>
-          <a:lstStyle/>
-          <a:p>
-            <a:pPr algn="l">
-              <a:lnSpc>
-                <a:spcPct val="106471"/>
-              </a:lnSpc>
-            </a:pPr>
-            <a:r>
-              <a:rPr sz="1700" b="0">
-                <a:solidFill>
-                  <a:srgbClr val="10304F"/>
-                </a:solidFill>
-                <a:latin typeface="Space Grotesk"/>
-                <a:cs typeface="Space Grotesk"/>
-                <a:sym typeface="Space Grotesk"/>
-              </a:rPr>
-              <a:t>Data harness</a:t>
-            </a:r>
-          </a:p>
-        </p:txBody>
-      </p:sp>
-      <p:sp>
-        <p:nvSpPr>
-          <p:cNvPr id="14" name="TextBox 13"/>
-          <p:cNvSpPr txBox="1"/>
-          <p:nvPr/>
-        </p:nvSpPr>
-        <p:spPr>
-          <a:xfrm>
-            <a:off x="6096000" y="3710732"/>
-            <a:ext cx="5291328" cy="341295"/>
-          </a:xfrm>
-          <a:prstGeom prst="rect">
-            <a:avLst/>
-          </a:prstGeom>
-          <a:noFill/>
-        </p:spPr>
-        <p:txBody>
-          <a:bodyPr wrap="square" anchor="t" lIns="0" rIns="0" tIns="0" bIns="0">
-            <a:normAutofit/>
-          </a:bodyPr>
-          <a:lstStyle/>
-          <a:p>
-            <a:pPr algn="l">
-              <a:lnSpc>
-                <a:spcPct val="106471"/>
-              </a:lnSpc>
-            </a:pPr>
-            <a:r>
-              <a:rPr sz="1700" b="0">
-                <a:solidFill>
-                  <a:srgbClr val="10304F"/>
-                </a:solidFill>
-                <a:latin typeface="Space Grotesk"/>
-                <a:cs typeface="Space Grotesk"/>
-                <a:sym typeface="Space Grotesk"/>
-              </a:rPr>
-              <a:t>Zetaris Lightning, DuckDB fallback</a:t>
-            </a:r>
-          </a:p>
-        </p:txBody>
-      </p:sp>
-      <p:sp>
-        <p:nvSpPr>
-          <p:cNvPr id="15" name="TextBox 14"/>
-          <p:cNvSpPr txBox="1"/>
-          <p:nvPr/>
-        </p:nvSpPr>
-        <p:spPr>
-          <a:xfrm>
-            <a:off x="658368" y="4344408"/>
-            <a:ext cx="5291328" cy="341295"/>
-          </a:xfrm>
-          <a:prstGeom prst="rect">
-            <a:avLst/>
-          </a:prstGeom>
-          <a:noFill/>
-        </p:spPr>
-        <p:txBody>
-          <a:bodyPr wrap="square" anchor="t" lIns="0" rIns="0" tIns="0" bIns="0">
-            <a:normAutofit/>
-          </a:bodyPr>
-          <a:lstStyle/>
-          <a:p>
-            <a:pPr algn="l">
-              <a:lnSpc>
-                <a:spcPct val="106471"/>
-              </a:lnSpc>
-            </a:pPr>
-            <a:r>
-              <a:rPr sz="1700" b="0">
-                <a:solidFill>
-                  <a:srgbClr val="10304F"/>
-                </a:solidFill>
-                <a:latin typeface="Space Grotesk"/>
-                <a:cs typeface="Space Grotesk"/>
-                <a:sym typeface="Space Grotesk"/>
-              </a:rPr>
-              <a:t>Data</a:t>
-            </a:r>
-          </a:p>
-        </p:txBody>
-      </p:sp>
-      <p:sp>
-        <p:nvSpPr>
-          <p:cNvPr id="16" name="TextBox 15"/>
-          <p:cNvSpPr txBox="1"/>
-          <p:nvPr/>
-        </p:nvSpPr>
-        <p:spPr>
-          <a:xfrm>
-            <a:off x="6096000" y="4344408"/>
-            <a:ext cx="5291328" cy="341295"/>
-          </a:xfrm>
-          <a:prstGeom prst="rect">
-            <a:avLst/>
-          </a:prstGeom>
-          <a:noFill/>
-        </p:spPr>
-        <p:txBody>
-          <a:bodyPr wrap="square" anchor="t" lIns="0" rIns="0" tIns="0" bIns="0">
-            <a:normAutofit/>
-          </a:bodyPr>
-          <a:lstStyle/>
-          <a:p>
-            <a:pPr algn="l">
-              <a:lnSpc>
-                <a:spcPct val="106471"/>
-              </a:lnSpc>
-            </a:pPr>
-            <a:r>
-              <a:rPr sz="1700" b="0">
-                <a:solidFill>
-                  <a:srgbClr val="10304F"/>
-                </a:solidFill>
-                <a:latin typeface="Space Grotesk"/>
-                <a:cs typeface="Space Grotesk"/>
-                <a:sym typeface="Space Grotesk"/>
-              </a:rPr>
-              <a:t>SEC EDGAR, ONS, FRED, Wikipedia</a:t>
-            </a:r>
-          </a:p>
-        </p:txBody>
-      </p:sp>
-      <p:sp>
-        <p:nvSpPr>
-          <p:cNvPr id="17" name="TextBox 16"/>
-          <p:cNvSpPr txBox="1"/>
-          <p:nvPr/>
-        </p:nvSpPr>
-        <p:spPr>
-          <a:xfrm>
-            <a:off x="658368" y="4978085"/>
-            <a:ext cx="5291328" cy="341295"/>
-          </a:xfrm>
-          <a:prstGeom prst="rect">
-            <a:avLst/>
-          </a:prstGeom>
-          <a:noFill/>
-        </p:spPr>
-        <p:txBody>
-          <a:bodyPr wrap="square" anchor="t" lIns="0" rIns="0" tIns="0" bIns="0">
-            <a:normAutofit/>
-          </a:bodyPr>
-          <a:lstStyle/>
-          <a:p>
-            <a:pPr algn="l">
-              <a:lnSpc>
-                <a:spcPct val="106471"/>
-              </a:lnSpc>
-            </a:pPr>
-            <a:r>
-              <a:rPr sz="1700" b="0">
-                <a:solidFill>
-                  <a:srgbClr val="10304F"/>
-                </a:solidFill>
-                <a:latin typeface="Space Grotesk"/>
-                <a:cs typeface="Space Grotesk"/>
-                <a:sym typeface="Space Grotesk"/>
-              </a:rPr>
-              <a:t>Narrative</a:t>
-            </a:r>
-          </a:p>
-        </p:txBody>
-      </p:sp>
-      <p:sp>
-        <p:nvSpPr>
-          <p:cNvPr id="18" name="TextBox 17"/>
-          <p:cNvSpPr txBox="1"/>
-          <p:nvPr/>
-        </p:nvSpPr>
-        <p:spPr>
-          <a:xfrm>
-            <a:off x="6096000" y="4978085"/>
-            <a:ext cx="5291328" cy="341295"/>
-          </a:xfrm>
-          <a:prstGeom prst="rect">
-            <a:avLst/>
-          </a:prstGeom>
-          <a:noFill/>
-        </p:spPr>
-        <p:txBody>
-          <a:bodyPr wrap="square" anchor="t" lIns="0" rIns="0" tIns="0" bIns="0">
-            <a:normAutofit/>
-          </a:bodyPr>
-          <a:lstStyle/>
-          <a:p>
-            <a:pPr algn="l">
-              <a:lnSpc>
-                <a:spcPct val="106471"/>
-              </a:lnSpc>
-            </a:pPr>
-            <a:r>
-              <a:rPr sz="1700" b="0">
-                <a:solidFill>
-                  <a:srgbClr val="10304F"/>
-                </a:solidFill>
-                <a:latin typeface="Space Grotesk"/>
-                <a:cs typeface="Space Grotesk"/>
-                <a:sym typeface="Space Grotesk"/>
-              </a:rPr>
-              <a:t>NVIDIA NIM, Groq or Gemini</a:t>
-            </a:r>
-          </a:p>
-        </p:txBody>
-      </p:sp>
-      <p:sp>
-        <p:nvSpPr>
-          <p:cNvPr id="19" name="TextBox 18"/>
-          <p:cNvSpPr txBox="1"/>
-          <p:nvPr/>
-        </p:nvSpPr>
-        <p:spPr>
-          <a:xfrm>
-            <a:off x="658368" y="5611761"/>
-            <a:ext cx="5291328" cy="341295"/>
-          </a:xfrm>
-          <a:prstGeom prst="rect">
-            <a:avLst/>
-          </a:prstGeom>
-          <a:noFill/>
-        </p:spPr>
-        <p:txBody>
-          <a:bodyPr wrap="square" anchor="t" lIns="0" rIns="0" tIns="0" bIns="0">
-            <a:normAutofit/>
-          </a:bodyPr>
-          <a:lstStyle/>
-          <a:p>
-            <a:pPr algn="l">
-              <a:lnSpc>
-                <a:spcPct val="106471"/>
-              </a:lnSpc>
-            </a:pPr>
-            <a:r>
-              <a:rPr sz="1700" b="0">
-                <a:solidFill>
-                  <a:srgbClr val="10304F"/>
-                </a:solidFill>
-                <a:latin typeface="Space Grotesk"/>
-                <a:cs typeface="Space Grotesk"/>
-                <a:sym typeface="Space Grotesk"/>
-              </a:rPr>
-              <a:t>App</a:t>
-            </a:r>
-          </a:p>
-        </p:txBody>
-      </p:sp>
-      <p:sp>
-        <p:nvSpPr>
-          <p:cNvPr id="20" name="TextBox 19"/>
-          <p:cNvSpPr txBox="1"/>
-          <p:nvPr/>
-        </p:nvSpPr>
-        <p:spPr>
-          <a:xfrm>
-            <a:off x="6096000" y="5611761"/>
-            <a:ext cx="5291328" cy="341295"/>
-          </a:xfrm>
-          <a:prstGeom prst="rect">
-            <a:avLst/>
-          </a:prstGeom>
-          <a:noFill/>
-        </p:spPr>
-        <p:txBody>
-          <a:bodyPr wrap="square" anchor="t" lIns="0" rIns="0" tIns="0" bIns="0">
-            <a:normAutofit/>
-          </a:bodyPr>
-          <a:lstStyle/>
-          <a:p>
-            <a:pPr algn="l">
-              <a:lnSpc>
-                <a:spcPct val="106471"/>
-              </a:lnSpc>
-            </a:pPr>
-            <a:r>
-              <a:rPr sz="1700" b="0">
-                <a:solidFill>
-                  <a:srgbClr val="10304F"/>
-                </a:solidFill>
-                <a:latin typeface="Space Grotesk"/>
-                <a:cs typeface="Space Grotesk"/>
-                <a:sym typeface="Space Grotesk"/>
-              </a:rPr>
-              <a:t>Python, FastAPI, Vercel</a:t>
-            </a:r>
-          </a:p>
-        </p:txBody>
-      </p:sp>
-    </p:spTree>
-  </p:cSld>
-  <p:clrMapOvr>
-    <a:masterClrMapping/>
-  </p:clrMapOvr>
-</p:sld>
-</file>
-
-<file path=ppt/slides/slide14.xml><?xml version="1.0" encoding="utf-8"?>
-<p:sld xmlns:a="http://schemas.openxmlformats.org/drawingml/2006/main" xmlns:p="http://schemas.openxmlformats.org/presentationml/2006/main" xmlns:r="http://schemas.openxmlformats.org/officeDocument/2006/relationships">
-  <p:cSld>
-    <p:bg>
-      <p:bgPr>
-        <a:solidFill>
-          <a:srgbClr val="E6EDF3"/>
-        </a:solidFill>
-        <a:effectLst/>
-      </p:bgPr>
-    </p:bg>
-    <p:spTree>
-      <p:nvGrpSpPr>
-        <p:cNvPr id="1" name=""/>
-        <p:cNvGrpSpPr/>
-        <p:nvPr/>
-      </p:nvGrpSpPr>
-      <p:grpSpPr/>
-      <p:sp>
-        <p:nvSpPr>
-          <p:cNvPr id="2" name="Rectangle 1"/>
-          <p:cNvSpPr/>
-          <p:nvPr/>
-        </p:nvSpPr>
-        <p:spPr>
-          <a:xfrm>
-            <a:off x="4632960" y="201168"/>
-            <a:ext cx="7071360" cy="16459"/>
-          </a:xfrm>
-          <a:prstGeom prst="rect">
-            <a:avLst/>
-          </a:prstGeom>
-          <a:solidFill>
-            <a:srgbClr val="10304F"/>
-          </a:solidFill>
-          <a:ln>
-            <a:noFill/>
-          </a:ln>
-          <a:effectLst/>
-        </p:spPr>
-        <p:style>
-          <a:lnRef idx="1">
-            <a:schemeClr val="accent1"/>
-          </a:lnRef>
-          <a:fillRef idx="3">
-            <a:schemeClr val="accent1"/>
-          </a:fillRef>
-          <a:effectRef idx="2">
-            <a:schemeClr val="accent1"/>
-          </a:effectRef>
-          <a:fontRef idx="minor">
-            <a:schemeClr val="lt1"/>
-          </a:fontRef>
-        </p:style>
-        <p:txBody>
-          <a:bodyPr rtlCol="0" anchor="ctr"/>
-          <a:lstStyle/>
-          <a:p/>
-        </p:txBody>
-      </p:sp>
-      <p:sp>
-        <p:nvSpPr>
-          <p:cNvPr id="3" name="Rectangle 2"/>
-          <p:cNvSpPr/>
-          <p:nvPr/>
-        </p:nvSpPr>
-        <p:spPr>
-          <a:xfrm>
-            <a:off x="11972544" y="201168"/>
-            <a:ext cx="16459" cy="3840480"/>
-          </a:xfrm>
-          <a:prstGeom prst="rect">
-            <a:avLst/>
-          </a:prstGeom>
-          <a:solidFill>
-            <a:srgbClr val="10304F"/>
-          </a:solidFill>
-          <a:ln>
-            <a:noFill/>
-          </a:ln>
-          <a:effectLst/>
-        </p:spPr>
-        <p:style>
-          <a:lnRef idx="1">
-            <a:schemeClr val="accent1"/>
-          </a:lnRef>
-          <a:fillRef idx="3">
-            <a:schemeClr val="accent1"/>
-          </a:fillRef>
-          <a:effectRef idx="2">
-            <a:schemeClr val="accent1"/>
-          </a:effectRef>
-          <a:fontRef idx="minor">
-            <a:schemeClr val="lt1"/>
-          </a:fontRef>
-        </p:style>
-        <p:txBody>
-          <a:bodyPr rtlCol="0" anchor="ctr"/>
-          <a:lstStyle/>
-          <a:p/>
-        </p:txBody>
-      </p:sp>
-      <p:sp>
-        <p:nvSpPr>
-          <p:cNvPr id="4" name="Rectangle 3"/>
-          <p:cNvSpPr/>
-          <p:nvPr/>
-        </p:nvSpPr>
-        <p:spPr>
-          <a:xfrm>
-            <a:off x="658368" y="3318175"/>
-            <a:ext cx="10875264" cy="12802"/>
-          </a:xfrm>
-          <a:prstGeom prst="rect">
-            <a:avLst/>
-          </a:prstGeom>
-          <a:solidFill>
-            <a:srgbClr val="10304F"/>
-          </a:solidFill>
-          <a:ln>
-            <a:noFill/>
-          </a:ln>
-          <a:effectLst/>
-        </p:spPr>
-        <p:style>
-          <a:lnRef idx="1">
-            <a:schemeClr val="accent1"/>
-          </a:lnRef>
-          <a:fillRef idx="3">
-            <a:schemeClr val="accent1"/>
-          </a:fillRef>
-          <a:effectRef idx="2">
-            <a:schemeClr val="accent1"/>
-          </a:effectRef>
-          <a:fontRef idx="minor">
-            <a:schemeClr val="lt1"/>
-          </a:fontRef>
-        </p:style>
-        <p:txBody>
-          <a:bodyPr rtlCol="0" anchor="ctr"/>
-          <a:lstStyle/>
-          <a:p/>
-        </p:txBody>
-      </p:sp>
-      <p:sp>
-        <p:nvSpPr>
-          <p:cNvPr id="5" name="Rectangle 4"/>
-          <p:cNvSpPr/>
-          <p:nvPr/>
-        </p:nvSpPr>
-        <p:spPr>
-          <a:xfrm>
-            <a:off x="658368" y="3226735"/>
-            <a:ext cx="182880" cy="182880"/>
-          </a:xfrm>
-          <a:prstGeom prst="rect">
-            <a:avLst/>
-          </a:prstGeom>
-          <a:solidFill>
-            <a:srgbClr val="6B2A55"/>
-          </a:solidFill>
-          <a:ln>
-            <a:noFill/>
-          </a:ln>
-          <a:effectLst/>
-        </p:spPr>
-        <p:style>
-          <a:lnRef idx="1">
-            <a:schemeClr val="accent1"/>
-          </a:lnRef>
-          <a:fillRef idx="3">
-            <a:schemeClr val="accent1"/>
-          </a:fillRef>
-          <a:effectRef idx="2">
-            <a:schemeClr val="accent1"/>
-          </a:effectRef>
-          <a:fontRef idx="minor">
-            <a:schemeClr val="lt1"/>
-          </a:fontRef>
-        </p:style>
-        <p:txBody>
-          <a:bodyPr rtlCol="0" anchor="ctr"/>
-          <a:lstStyle/>
-          <a:p/>
-        </p:txBody>
-      </p:sp>
-      <p:sp>
-        <p:nvSpPr>
-          <p:cNvPr id="6" name="Rectangle 5"/>
-          <p:cNvSpPr/>
-          <p:nvPr/>
-        </p:nvSpPr>
-        <p:spPr>
-          <a:xfrm>
-            <a:off x="3377184" y="3226735"/>
-            <a:ext cx="182880" cy="182880"/>
-          </a:xfrm>
-          <a:prstGeom prst="rect">
-            <a:avLst/>
-          </a:prstGeom>
-          <a:solidFill>
-            <a:srgbClr val="6B2A55"/>
-          </a:solidFill>
-          <a:ln>
-            <a:noFill/>
-          </a:ln>
-          <a:effectLst/>
-        </p:spPr>
-        <p:style>
-          <a:lnRef idx="1">
-            <a:schemeClr val="accent1"/>
-          </a:lnRef>
-          <a:fillRef idx="3">
-            <a:schemeClr val="accent1"/>
-          </a:fillRef>
-          <a:effectRef idx="2">
-            <a:schemeClr val="accent1"/>
-          </a:effectRef>
-          <a:fontRef idx="minor">
-            <a:schemeClr val="lt1"/>
-          </a:fontRef>
-        </p:style>
-        <p:txBody>
-          <a:bodyPr rtlCol="0" anchor="ctr"/>
-          <a:lstStyle/>
-          <a:p/>
-        </p:txBody>
-      </p:sp>
-      <p:sp>
-        <p:nvSpPr>
-          <p:cNvPr id="7" name="Rectangle 6"/>
-          <p:cNvSpPr/>
-          <p:nvPr/>
-        </p:nvSpPr>
-        <p:spPr>
-          <a:xfrm>
-            <a:off x="6096000" y="3226735"/>
-            <a:ext cx="182880" cy="182880"/>
-          </a:xfrm>
-          <a:prstGeom prst="rect">
-            <a:avLst/>
-          </a:prstGeom>
-          <a:solidFill>
-            <a:srgbClr val="6B2A55"/>
-          </a:solidFill>
-          <a:ln>
-            <a:noFill/>
-          </a:ln>
-          <a:effectLst/>
-        </p:spPr>
-        <p:style>
-          <a:lnRef idx="1">
-            <a:schemeClr val="accent1"/>
-          </a:lnRef>
-          <a:fillRef idx="3">
-            <a:schemeClr val="accent1"/>
-          </a:fillRef>
-          <a:effectRef idx="2">
-            <a:schemeClr val="accent1"/>
-          </a:effectRef>
-          <a:fontRef idx="minor">
-            <a:schemeClr val="lt1"/>
-          </a:fontRef>
-        </p:style>
-        <p:txBody>
-          <a:bodyPr rtlCol="0" anchor="ctr"/>
-          <a:lstStyle/>
-          <a:p/>
-        </p:txBody>
-      </p:sp>
-      <p:sp>
-        <p:nvSpPr>
-          <p:cNvPr id="8" name="Rectangle 7"/>
-          <p:cNvSpPr/>
-          <p:nvPr/>
-        </p:nvSpPr>
-        <p:spPr>
-          <a:xfrm>
-            <a:off x="8814816" y="3226735"/>
-            <a:ext cx="182880" cy="182880"/>
-          </a:xfrm>
-          <a:prstGeom prst="rect">
-            <a:avLst/>
-          </a:prstGeom>
-          <a:solidFill>
-            <a:srgbClr val="6B2A55"/>
-          </a:solidFill>
-          <a:ln>
-            <a:noFill/>
-          </a:ln>
-          <a:effectLst/>
-        </p:spPr>
-        <p:style>
-          <a:lnRef idx="1">
-            <a:schemeClr val="accent1"/>
-          </a:lnRef>
-          <a:fillRef idx="3">
-            <a:schemeClr val="accent1"/>
-          </a:fillRef>
-          <a:effectRef idx="2">
-            <a:schemeClr val="accent1"/>
-          </a:effectRef>
-          <a:fontRef idx="minor">
-            <a:schemeClr val="lt1"/>
-          </a:fontRef>
-        </p:style>
-        <p:txBody>
-          <a:bodyPr rtlCol="0" anchor="ctr"/>
-          <a:lstStyle/>
-          <a:p/>
-        </p:txBody>
-      </p:sp>
-      <p:sp>
-        <p:nvSpPr>
-          <p:cNvPr id="9" name="TextBox 8"/>
-          <p:cNvSpPr txBox="1"/>
-          <p:nvPr/>
-        </p:nvSpPr>
-        <p:spPr>
-          <a:xfrm>
-            <a:off x="10390632" y="184343"/>
-            <a:ext cx="1143000" cy="162154"/>
-          </a:xfrm>
-          <a:prstGeom prst="rect">
-            <a:avLst/>
-          </a:prstGeom>
-          <a:noFill/>
-        </p:spPr>
-        <p:txBody>
-          <a:bodyPr wrap="square" anchor="t" lIns="0" rIns="0" tIns="0" bIns="0">
-            <a:normAutofit/>
-          </a:bodyPr>
-          <a:lstStyle/>
-          <a:p>
-            <a:pPr algn="r">
-              <a:lnSpc>
-                <a:spcPct val="91750"/>
-              </a:lnSpc>
-            </a:pPr>
-            <a:r>
-              <a:rPr sz="1000" b="0" spc="80">
-                <a:solidFill>
-                  <a:srgbClr val="000000"/>
-                </a:solidFill>
-                <a:latin typeface="Montserrat Bold"/>
-                <a:cs typeface="Montserrat Bold"/>
-                <a:sym typeface="Montserrat Bold"/>
-              </a:rPr>
-              <a:t>14/15</a:t>
-            </a:r>
-          </a:p>
-        </p:txBody>
-      </p:sp>
-      <p:sp>
-        <p:nvSpPr>
-          <p:cNvPr id="10" name="TextBox 9"/>
-          <p:cNvSpPr txBox="1"/>
-          <p:nvPr/>
-        </p:nvSpPr>
-        <p:spPr>
-          <a:xfrm>
-            <a:off x="658368" y="658368"/>
-            <a:ext cx="7830190" cy="960128"/>
-          </a:xfrm>
-          <a:prstGeom prst="rect">
-            <a:avLst/>
-          </a:prstGeom>
-          <a:noFill/>
-        </p:spPr>
-        <p:txBody>
-          <a:bodyPr wrap="square" anchor="t" lIns="0" rIns="0" tIns="0" bIns="0">
-            <a:normAutofit/>
-          </a:bodyPr>
-          <a:lstStyle/>
-          <a:p>
-            <a:pPr algn="l">
-              <a:lnSpc>
-                <a:spcPct val="88496"/>
-              </a:lnSpc>
-            </a:pPr>
-            <a:r>
-              <a:rPr sz="5800" b="0">
-                <a:solidFill>
-                  <a:srgbClr val="10304F"/>
-                </a:solidFill>
-                <a:latin typeface="Space Grotesk Bold"/>
-                <a:cs typeface="Space Grotesk Bold"/>
-                <a:sym typeface="Space Grotesk Bold"/>
-              </a:rPr>
-              <a:t>Next</a:t>
-            </a:r>
-          </a:p>
-        </p:txBody>
-      </p:sp>
-      <p:sp>
-        <p:nvSpPr>
-          <p:cNvPr id="11" name="TextBox 10"/>
-          <p:cNvSpPr txBox="1"/>
-          <p:nvPr/>
-        </p:nvSpPr>
-        <p:spPr>
-          <a:xfrm>
-            <a:off x="658368" y="3720511"/>
-            <a:ext cx="2462784" cy="329434"/>
-          </a:xfrm>
-          <a:prstGeom prst="rect">
-            <a:avLst/>
-          </a:prstGeom>
-          <a:noFill/>
-        </p:spPr>
-        <p:txBody>
-          <a:bodyPr wrap="square" anchor="t" lIns="0" rIns="0" tIns="0" bIns="0">
-            <a:normAutofit/>
-          </a:bodyPr>
-          <a:lstStyle/>
-          <a:p>
-            <a:pPr algn="l">
-              <a:lnSpc>
-                <a:spcPct val="91750"/>
-              </a:lnSpc>
-            </a:pPr>
-            <a:r>
-              <a:rPr sz="2000" b="0">
-                <a:solidFill>
-                  <a:srgbClr val="10304F"/>
-                </a:solidFill>
-                <a:latin typeface="Montserrat Bold"/>
-                <a:cs typeface="Montserrat Bold"/>
-                <a:sym typeface="Montserrat Bold"/>
-              </a:rPr>
-              <a:t>Semantic layer</a:t>
-            </a:r>
-          </a:p>
-        </p:txBody>
-      </p:sp>
-      <p:sp>
-        <p:nvSpPr>
-          <p:cNvPr id="12" name="TextBox 11"/>
-          <p:cNvSpPr txBox="1"/>
-          <p:nvPr/>
-        </p:nvSpPr>
-        <p:spPr>
-          <a:xfrm>
-            <a:off x="658368" y="4078143"/>
-            <a:ext cx="2462784" cy="1023884"/>
-          </a:xfrm>
-          <a:prstGeom prst="rect">
-            <a:avLst/>
-          </a:prstGeom>
-          <a:noFill/>
-        </p:spPr>
-        <p:txBody>
-          <a:bodyPr wrap="square" anchor="t" lIns="0" rIns="0" tIns="0" bIns="0">
-            <a:normAutofit/>
-          </a:bodyPr>
-          <a:lstStyle/>
-          <a:p>
-            <a:pPr algn="l">
-              <a:lnSpc>
-                <a:spcPct val="106471"/>
-              </a:lnSpc>
-            </a:pPr>
-            <a:r>
-              <a:rPr sz="1700" b="0">
-                <a:solidFill>
-                  <a:srgbClr val="4A6079"/>
-                </a:solidFill>
-                <a:latin typeface="Space Grotesk"/>
-                <a:cs typeface="Space Grotesk"/>
-                <a:sym typeface="Space Grotesk"/>
-              </a:rPr>
-              <a:t>Zetaris USL model joining EDGAR facts and macro series</a:t>
-            </a:r>
-          </a:p>
-        </p:txBody>
-      </p:sp>
-      <p:sp>
-        <p:nvSpPr>
-          <p:cNvPr id="13" name="TextBox 12"/>
-          <p:cNvSpPr txBox="1"/>
-          <p:nvPr/>
-        </p:nvSpPr>
-        <p:spPr>
-          <a:xfrm>
-            <a:off x="3377184" y="3720511"/>
-            <a:ext cx="2462784" cy="329434"/>
-          </a:xfrm>
-          <a:prstGeom prst="rect">
-            <a:avLst/>
-          </a:prstGeom>
-          <a:noFill/>
-        </p:spPr>
-        <p:txBody>
-          <a:bodyPr wrap="square" anchor="t" lIns="0" rIns="0" tIns="0" bIns="0">
-            <a:normAutofit/>
-          </a:bodyPr>
-          <a:lstStyle/>
-          <a:p>
-            <a:pPr algn="l">
-              <a:lnSpc>
-                <a:spcPct val="91750"/>
-              </a:lnSpc>
-            </a:pPr>
-            <a:r>
-              <a:rPr sz="2000" b="0">
-                <a:solidFill>
-                  <a:srgbClr val="10304F"/>
-                </a:solidFill>
-                <a:latin typeface="Montserrat Bold"/>
-                <a:cs typeface="Montserrat Bold"/>
-                <a:sym typeface="Montserrat Bold"/>
-              </a:rPr>
-              <a:t>Markovian</a:t>
-            </a:r>
-          </a:p>
-        </p:txBody>
-      </p:sp>
-      <p:sp>
-        <p:nvSpPr>
-          <p:cNvPr id="14" name="TextBox 13"/>
-          <p:cNvSpPr txBox="1"/>
-          <p:nvPr/>
-        </p:nvSpPr>
-        <p:spPr>
-          <a:xfrm>
-            <a:off x="3377184" y="4078143"/>
-            <a:ext cx="2462784" cy="1325267"/>
-          </a:xfrm>
-          <a:prstGeom prst="rect">
-            <a:avLst/>
-          </a:prstGeom>
-          <a:noFill/>
-        </p:spPr>
-        <p:txBody>
-          <a:bodyPr wrap="square" anchor="t" lIns="0" rIns="0" tIns="0" bIns="0">
-            <a:normAutofit/>
-          </a:bodyPr>
-          <a:lstStyle/>
-          <a:p>
-            <a:pPr algn="l">
-              <a:lnSpc>
-                <a:spcPct val="106471"/>
-              </a:lnSpc>
-            </a:pPr>
-            <a:r>
-              <a:rPr sz="1700" b="0">
-                <a:solidFill>
-                  <a:srgbClr val="4A6079"/>
-                </a:solidFill>
-                <a:latin typeface="Space Grotesk"/>
-                <a:cs typeface="Space Grotesk"/>
-                <a:sym typeface="Space Grotesk"/>
-              </a:rPr>
-              <a:t>Bounded state for long, multi-company investigations</a:t>
-            </a:r>
-          </a:p>
-        </p:txBody>
-      </p:sp>
-      <p:sp>
-        <p:nvSpPr>
-          <p:cNvPr id="15" name="TextBox 14"/>
-          <p:cNvSpPr txBox="1"/>
-          <p:nvPr/>
-        </p:nvSpPr>
-        <p:spPr>
-          <a:xfrm>
-            <a:off x="6096000" y="3720511"/>
-            <a:ext cx="2462784" cy="329434"/>
-          </a:xfrm>
-          <a:prstGeom prst="rect">
-            <a:avLst/>
-          </a:prstGeom>
-          <a:noFill/>
-        </p:spPr>
-        <p:txBody>
-          <a:bodyPr wrap="square" anchor="t" lIns="0" rIns="0" tIns="0" bIns="0">
-            <a:normAutofit/>
-          </a:bodyPr>
-          <a:lstStyle/>
-          <a:p>
-            <a:pPr algn="l">
-              <a:lnSpc>
-                <a:spcPct val="91750"/>
-              </a:lnSpc>
-            </a:pPr>
-            <a:r>
-              <a:rPr sz="2000" b="0">
-                <a:solidFill>
-                  <a:srgbClr val="10304F"/>
-                </a:solidFill>
-                <a:latin typeface="Montserrat Bold"/>
-                <a:cs typeface="Montserrat Bold"/>
-                <a:sym typeface="Montserrat Bold"/>
-              </a:rPr>
-              <a:t>Richer data</a:t>
-            </a:r>
-          </a:p>
-        </p:txBody>
-      </p:sp>
-      <p:sp>
-        <p:nvSpPr>
-          <p:cNvPr id="16" name="TextBox 15"/>
-          <p:cNvSpPr txBox="1"/>
-          <p:nvPr/>
-        </p:nvSpPr>
-        <p:spPr>
-          <a:xfrm>
-            <a:off x="6096000" y="4078143"/>
-            <a:ext cx="2462784" cy="682589"/>
-          </a:xfrm>
-          <a:prstGeom prst="rect">
-            <a:avLst/>
-          </a:prstGeom>
-          <a:noFill/>
-        </p:spPr>
-        <p:txBody>
-          <a:bodyPr wrap="square" anchor="t" lIns="0" rIns="0" tIns="0" bIns="0">
-            <a:normAutofit/>
-          </a:bodyPr>
-          <a:lstStyle/>
-          <a:p>
-            <a:pPr algn="l">
-              <a:lnSpc>
-                <a:spcPct val="106471"/>
-              </a:lnSpc>
-            </a:pPr>
-            <a:r>
-              <a:rPr sz="1700" b="0">
-                <a:solidFill>
-                  <a:srgbClr val="4A6079"/>
-                </a:solidFill>
-                <a:latin typeface="Space Grotesk"/>
-                <a:cs typeface="Space Grotesk"/>
-                <a:sym typeface="Space Grotesk"/>
-              </a:rPr>
-              <a:t>CPI weights, XBRL segments, Eurostat</a:t>
-            </a:r>
-          </a:p>
-        </p:txBody>
-      </p:sp>
-      <p:sp>
-        <p:nvSpPr>
-          <p:cNvPr id="17" name="TextBox 16"/>
-          <p:cNvSpPr txBox="1"/>
-          <p:nvPr/>
-        </p:nvSpPr>
-        <p:spPr>
-          <a:xfrm>
-            <a:off x="8814816" y="3720511"/>
-            <a:ext cx="2462784" cy="329434"/>
-          </a:xfrm>
-          <a:prstGeom prst="rect">
-            <a:avLst/>
-          </a:prstGeom>
-          <a:noFill/>
-        </p:spPr>
-        <p:txBody>
-          <a:bodyPr wrap="square" anchor="t" lIns="0" rIns="0" tIns="0" bIns="0">
-            <a:normAutofit/>
-          </a:bodyPr>
-          <a:lstStyle/>
-          <a:p>
-            <a:pPr algn="l">
-              <a:lnSpc>
-                <a:spcPct val="91750"/>
-              </a:lnSpc>
-            </a:pPr>
-            <a:r>
-              <a:rPr sz="2000" b="0">
-                <a:solidFill>
-                  <a:srgbClr val="10304F"/>
-                </a:solidFill>
-                <a:latin typeface="Montserrat Bold"/>
-                <a:cs typeface="Montserrat Bold"/>
-                <a:sym typeface="Montserrat Bold"/>
-              </a:rPr>
-              <a:t>Dreaming</a:t>
-            </a:r>
-          </a:p>
-        </p:txBody>
-      </p:sp>
-      <p:sp>
-        <p:nvSpPr>
-          <p:cNvPr id="18" name="TextBox 17"/>
-          <p:cNvSpPr txBox="1"/>
-          <p:nvPr/>
-        </p:nvSpPr>
-        <p:spPr>
-          <a:xfrm>
-            <a:off x="8814816" y="4078143"/>
-            <a:ext cx="2462784" cy="1023884"/>
-          </a:xfrm>
-          <a:prstGeom prst="rect">
-            <a:avLst/>
-          </a:prstGeom>
-          <a:noFill/>
-        </p:spPr>
-        <p:txBody>
-          <a:bodyPr wrap="square" anchor="t" lIns="0" rIns="0" tIns="0" bIns="0">
-            <a:normAutofit/>
-          </a:bodyPr>
-          <a:lstStyle/>
-          <a:p>
-            <a:pPr algn="l">
-              <a:lnSpc>
-                <a:spcPct val="106471"/>
-              </a:lnSpc>
-            </a:pPr>
-            <a:r>
-              <a:rPr sz="1700" b="0">
-                <a:solidFill>
-                  <a:srgbClr val="4A6079"/>
-                </a:solidFill>
-                <a:latin typeface="Space Grotesk"/>
-                <a:cs typeface="Space Grotesk"/>
-                <a:sym typeface="Space Grotesk"/>
-              </a:rPr>
-              <a:t>Cross-question insights proposed for approval</a:t>
-            </a:r>
-          </a:p>
-        </p:txBody>
-      </p:sp>
-    </p:spTree>
-  </p:cSld>
-  <p:clrMapOvr>
-    <a:masterClrMapping/>
-  </p:clrMapOvr>
-</p:sld>
-</file>
-
-<file path=ppt/slides/slide15.xml><?xml version="1.0" encoding="utf-8"?>
-<p:sld xmlns:a="http://schemas.openxmlformats.org/drawingml/2006/main" xmlns:p="http://schemas.openxmlformats.org/presentationml/2006/main" xmlns:r="http://schemas.openxmlformats.org/officeDocument/2006/relationships">
-  <p:cSld>
-    <p:bg>
-      <p:bgPr>
-        <a:solidFill>
-          <a:srgbClr val="E6EDF3"/>
-        </a:solidFill>
-        <a:effectLst/>
-      </p:bgPr>
-    </p:bg>
-    <p:spTree>
-      <p:nvGrpSpPr>
-        <p:cNvPr id="1" name=""/>
-        <p:cNvGrpSpPr/>
-        <p:nvPr/>
-      </p:nvGrpSpPr>
-      <p:grpSpPr/>
-      <p:sp>
-        <p:nvSpPr>
-          <p:cNvPr id="2" name="Rectangle 1"/>
-          <p:cNvSpPr/>
-          <p:nvPr/>
-        </p:nvSpPr>
-        <p:spPr>
-          <a:xfrm>
-            <a:off x="4632960" y="201168"/>
-            <a:ext cx="7071360" cy="16459"/>
-          </a:xfrm>
-          <a:prstGeom prst="rect">
-            <a:avLst/>
-          </a:prstGeom>
-          <a:solidFill>
-            <a:srgbClr val="10304F"/>
-          </a:solidFill>
-          <a:ln>
-            <a:noFill/>
-          </a:ln>
-          <a:effectLst/>
-        </p:spPr>
-        <p:style>
-          <a:lnRef idx="1">
-            <a:schemeClr val="accent1"/>
-          </a:lnRef>
-          <a:fillRef idx="3">
-            <a:schemeClr val="accent1"/>
-          </a:fillRef>
-          <a:effectRef idx="2">
-            <a:schemeClr val="accent1"/>
-          </a:effectRef>
-          <a:fontRef idx="minor">
-            <a:schemeClr val="lt1"/>
-          </a:fontRef>
-        </p:style>
-        <p:txBody>
-          <a:bodyPr rtlCol="0" anchor="ctr"/>
-          <a:lstStyle/>
-          <a:p/>
-        </p:txBody>
-      </p:sp>
-      <p:sp>
-        <p:nvSpPr>
-          <p:cNvPr id="3" name="Rectangle 2"/>
-          <p:cNvSpPr/>
-          <p:nvPr/>
-        </p:nvSpPr>
-        <p:spPr>
-          <a:xfrm>
-            <a:off x="11972544" y="201168"/>
-            <a:ext cx="16459" cy="3840480"/>
-          </a:xfrm>
-          <a:prstGeom prst="rect">
-            <a:avLst/>
-          </a:prstGeom>
-          <a:solidFill>
-            <a:srgbClr val="10304F"/>
-          </a:solidFill>
-          <a:ln>
-            <a:noFill/>
-          </a:ln>
-          <a:effectLst/>
-        </p:spPr>
-        <p:style>
-          <a:lnRef idx="1">
-            <a:schemeClr val="accent1"/>
-          </a:lnRef>
-          <a:fillRef idx="3">
-            <a:schemeClr val="accent1"/>
-          </a:fillRef>
-          <a:effectRef idx="2">
-            <a:schemeClr val="accent1"/>
-          </a:effectRef>
-          <a:fontRef idx="minor">
-            <a:schemeClr val="lt1"/>
-          </a:fontRef>
-        </p:style>
-        <p:txBody>
-          <a:bodyPr rtlCol="0" anchor="ctr"/>
-          <a:lstStyle/>
-          <a:p/>
-        </p:txBody>
-      </p:sp>
-      <p:sp>
-        <p:nvSpPr>
-          <p:cNvPr id="4" name="Rectangle 3"/>
-          <p:cNvSpPr/>
-          <p:nvPr/>
-        </p:nvSpPr>
-        <p:spPr>
-          <a:xfrm>
-            <a:off x="658368" y="1455725"/>
-            <a:ext cx="1005840" cy="25603"/>
-          </a:xfrm>
-          <a:prstGeom prst="rect">
-            <a:avLst/>
-          </a:prstGeom>
-          <a:solidFill>
-            <a:srgbClr val="6B2A55"/>
-          </a:solidFill>
-          <a:ln>
-            <a:noFill/>
-          </a:ln>
-          <a:effectLst/>
-        </p:spPr>
-        <p:style>
-          <a:lnRef idx="1">
-            <a:schemeClr val="accent1"/>
-          </a:lnRef>
-          <a:fillRef idx="3">
-            <a:schemeClr val="accent1"/>
-          </a:fillRef>
-          <a:effectRef idx="2">
-            <a:schemeClr val="accent1"/>
-          </a:effectRef>
-          <a:fontRef idx="minor">
-            <a:schemeClr val="lt1"/>
-          </a:fontRef>
-        </p:style>
-        <p:txBody>
-          <a:bodyPr rtlCol="0" anchor="ctr"/>
-          <a:lstStyle/>
-          <a:p/>
-        </p:txBody>
-      </p:sp>
-      <p:sp>
-        <p:nvSpPr>
-          <p:cNvPr id="5" name="TextBox 4"/>
-          <p:cNvSpPr txBox="1"/>
-          <p:nvPr/>
-        </p:nvSpPr>
-        <p:spPr>
-          <a:xfrm>
-            <a:off x="10390632" y="184343"/>
-            <a:ext cx="1143000" cy="162154"/>
-          </a:xfrm>
-          <a:prstGeom prst="rect">
-            <a:avLst/>
-          </a:prstGeom>
-          <a:noFill/>
-        </p:spPr>
-        <p:txBody>
-          <a:bodyPr wrap="square" anchor="t" lIns="0" rIns="0" tIns="0" bIns="0">
-            <a:normAutofit/>
-          </a:bodyPr>
-          <a:lstStyle/>
-          <a:p>
-            <a:pPr algn="r">
-              <a:lnSpc>
-                <a:spcPct val="91750"/>
-              </a:lnSpc>
-            </a:pPr>
-            <a:r>
-              <a:rPr sz="1000" b="0" spc="80">
-                <a:solidFill>
-                  <a:srgbClr val="000000"/>
-                </a:solidFill>
-                <a:latin typeface="Montserrat Bold"/>
-                <a:cs typeface="Montserrat Bold"/>
-                <a:sym typeface="Montserrat Bold"/>
-              </a:rPr>
-              <a:t>15/15</a:t>
-            </a:r>
-          </a:p>
-        </p:txBody>
-      </p:sp>
-      <p:sp>
-        <p:nvSpPr>
-          <p:cNvPr id="6" name="TextBox 5"/>
-          <p:cNvSpPr txBox="1"/>
-          <p:nvPr/>
-        </p:nvSpPr>
-        <p:spPr>
-          <a:xfrm>
-            <a:off x="658368" y="1766621"/>
-            <a:ext cx="8047695" cy="1112876"/>
-          </a:xfrm>
-          <a:prstGeom prst="rect">
-            <a:avLst/>
-          </a:prstGeom>
-          <a:noFill/>
-        </p:spPr>
-        <p:txBody>
-          <a:bodyPr wrap="square" anchor="t" lIns="0" rIns="0" tIns="0" bIns="0">
-            <a:normAutofit/>
-          </a:bodyPr>
-          <a:lstStyle/>
-          <a:p>
-            <a:pPr algn="l">
-              <a:lnSpc>
-                <a:spcPct val="88496"/>
-              </a:lnSpc>
-            </a:pPr>
-            <a:r>
               <a:rPr sz="6800" b="0">
                 <a:solidFill>
                   <a:srgbClr val="10304F"/>
@@ -8047,7 +4702,7 @@
         <p:spPr>
           <a:xfrm>
             <a:off x="658368" y="2998860"/>
-            <a:ext cx="5981395" cy="803046"/>
+            <a:ext cx="5981395" cy="779569"/>
           </a:xfrm>
           <a:prstGeom prst="rect">
             <a:avLst/>
@@ -8074,7 +4729,7 @@
                 <a:cs typeface="Space Grotesk"/>
                 <a:sym typeface="Space Grotesk"/>
               </a:rPr>
-              <a:t>because-agent.vercel.app  ·  github.com/OlsOls4/because</a:t>
+              <a:t>Every claim links to a query and a source row.</a:t>
             </a:r>
           </a:p>
         </p:txBody>
@@ -8361,7 +5016,7 @@
         </p:nvSpPr>
         <p:spPr>
           <a:xfrm>
-            <a:off x="658368" y="938539"/>
+            <a:off x="658368" y="420065"/>
             <a:ext cx="1005840" cy="25603"/>
           </a:xfrm>
           <a:prstGeom prst="rect">
@@ -8431,7 +5086,7 @@
                 <a:cs typeface="Montserrat Bold"/>
                 <a:sym typeface="Montserrat Bold"/>
               </a:rPr>
-              <a:t>02/15</a:t>
+              <a:t>02/10</a:t>
             </a:r>
           </a:p>
         </p:txBody>
@@ -8444,8 +5099,8 @@
         </p:nvSpPr>
         <p:spPr>
           <a:xfrm>
-            <a:off x="658368" y="1249435"/>
-            <a:ext cx="8917716" cy="2749459"/>
+            <a:off x="658368" y="730961"/>
+            <a:ext cx="8917716" cy="4321363"/>
           </a:xfrm>
           <a:prstGeom prst="rect">
             <a:avLst/>
@@ -8464,7 +5119,7 @@
               </a:lnSpc>
             </a:pPr>
             <a:r>
-              <a:rPr sz="5576" b="0">
+              <a:rPr sz="6800" b="0">
                 <a:solidFill>
                   <a:srgbClr val="10304F"/>
                 </a:solidFill>
@@ -8485,8 +5140,8 @@
         </p:nvSpPr>
         <p:spPr>
           <a:xfrm>
-            <a:off x="658368" y="3898984"/>
-            <a:ext cx="5981395" cy="1948922"/>
+            <a:off x="658368" y="4759374"/>
+            <a:ext cx="5981395" cy="1559138"/>
           </a:xfrm>
           <a:prstGeom prst="rect">
             <a:avLst/>
@@ -8513,7 +5168,7 @@
                 <a:cs typeface="Space Grotesk"/>
                 <a:sym typeface="Space Grotesk"/>
               </a:rPr>
-              <a:t>LLMs explain fluently but unverifiably. Dashboards show what changed, never why. Doing it properly takes hours of pulling and lining up sources.</a:t>
+              <a:t>LLMs explain fluently but unverifiably. Dashboards show what changed but not why. Doing it properly takes hours.</a:t>
             </a:r>
           </a:p>
         </p:txBody>
@@ -8628,9 +5283,34 @@
           <a:p/>
         </p:txBody>
       </p:sp>
-      <p:sp>
-        <p:nvSpPr>
-          <p:cNvPr id="4" name="TextBox 3"/>
+      <p:pic>
+        <p:nvPicPr>
+          <p:cNvPr id="4" name="Picture 3" descr="deckimg-qn7d7uk9.jpg"/>
+          <p:cNvPicPr>
+            <a:picLocks noChangeAspect="1"/>
+          </p:cNvPicPr>
+          <p:nvPr/>
+        </p:nvPicPr>
+        <p:blipFill>
+          <a:blip r:embed="rId2"/>
+          <a:srcRect t="51" b="51"/>
+          <a:stretch>
+            <a:fillRect/>
+          </a:stretch>
+        </p:blipFill>
+        <p:spPr>
+          <a:xfrm>
+            <a:off x="3657600" y="0"/>
+            <a:ext cx="4876800" cy="6858000"/>
+          </a:xfrm>
+          <a:prstGeom prst="rect">
+            <a:avLst/>
+          </a:prstGeom>
+        </p:spPr>
+      </p:pic>
+      <p:sp>
+        <p:nvSpPr>
+          <p:cNvPr id="5" name="TextBox 4"/>
           <p:cNvSpPr txBox="1"/>
           <p:nvPr/>
         </p:nvSpPr>
@@ -8664,21 +5344,267 @@
                 <a:cs typeface="Montserrat Bold"/>
                 <a:sym typeface="Montserrat Bold"/>
               </a:rPr>
-              <a:t>03/15</a:t>
-            </a:r>
-          </a:p>
-        </p:txBody>
-      </p:sp>
-      <p:sp>
-        <p:nvSpPr>
-          <p:cNvPr id="5" name="TextBox 4"/>
+              <a:t>03/10</a:t>
+            </a:r>
+          </a:p>
+        </p:txBody>
+      </p:sp>
+      <p:sp>
+        <p:nvSpPr>
+          <p:cNvPr id="6" name="TextBox 5"/>
           <p:cNvSpPr txBox="1"/>
           <p:nvPr/>
         </p:nvSpPr>
         <p:spPr>
           <a:xfrm>
-            <a:off x="658368" y="1069716"/>
-            <a:ext cx="7395180" cy="960128"/>
+            <a:off x="658368" y="822960"/>
+            <a:ext cx="411480" cy="175698"/>
+          </a:xfrm>
+          <a:prstGeom prst="rect">
+            <a:avLst/>
+          </a:prstGeom>
+          <a:noFill/>
+        </p:spPr>
+        <p:txBody>
+          <a:bodyPr wrap="square" anchor="t" lIns="0" rIns="0" tIns="0" bIns="0">
+            <a:normAutofit/>
+          </a:bodyPr>
+          <a:lstStyle/>
+          <a:p>
+            <a:pPr algn="l">
+              <a:lnSpc>
+                <a:spcPct val="91750"/>
+              </a:lnSpc>
+            </a:pPr>
+            <a:r>
+              <a:rPr sz="1000" b="0" spc="80">
+                <a:solidFill>
+                  <a:srgbClr val="6B2A55"/>
+                </a:solidFill>
+                <a:latin typeface="Montserrat Bold"/>
+                <a:cs typeface="Montserrat Bold"/>
+                <a:sym typeface="Montserrat Bold"/>
+              </a:rPr>
+              <a:t>ASK</a:t>
+            </a:r>
+          </a:p>
+        </p:txBody>
+      </p:sp>
+      <p:sp>
+        <p:nvSpPr>
+          <p:cNvPr id="7" name="TextBox 6"/>
+          <p:cNvSpPr txBox="1"/>
+          <p:nvPr/>
+        </p:nvSpPr>
+        <p:spPr>
+          <a:xfrm>
+            <a:off x="1170432" y="822960"/>
+            <a:ext cx="2103120" cy="1023884"/>
+          </a:xfrm>
+          <a:prstGeom prst="rect">
+            <a:avLst/>
+          </a:prstGeom>
+          <a:noFill/>
+        </p:spPr>
+        <p:txBody>
+          <a:bodyPr wrap="square" anchor="t" lIns="0" rIns="0" tIns="0" bIns="0">
+            <a:normAutofit/>
+          </a:bodyPr>
+          <a:lstStyle/>
+          <a:p>
+            <a:pPr algn="l">
+              <a:lnSpc>
+                <a:spcPct val="106471"/>
+              </a:lnSpc>
+            </a:pPr>
+            <a:r>
+              <a:rPr sz="1700" b="0">
+                <a:solidFill>
+                  <a:srgbClr val="10304F"/>
+                </a:solidFill>
+                <a:latin typeface="Space Grotesk"/>
+                <a:cs typeface="Space Grotesk"/>
+                <a:sym typeface="Space Grotesk"/>
+              </a:rPr>
+              <a:t>Why did Intel's gross margin fall in 2024?</a:t>
+            </a:r>
+          </a:p>
+        </p:txBody>
+      </p:sp>
+      <p:sp>
+        <p:nvSpPr>
+          <p:cNvPr id="8" name="TextBox 7"/>
+          <p:cNvSpPr txBox="1"/>
+          <p:nvPr/>
+        </p:nvSpPr>
+        <p:spPr>
+          <a:xfrm>
+            <a:off x="658368" y="2560320"/>
+            <a:ext cx="411480" cy="175698"/>
+          </a:xfrm>
+          <a:prstGeom prst="rect">
+            <a:avLst/>
+          </a:prstGeom>
+          <a:noFill/>
+        </p:spPr>
+        <p:txBody>
+          <a:bodyPr wrap="square" anchor="t" lIns="0" rIns="0" tIns="0" bIns="0">
+            <a:normAutofit/>
+          </a:bodyPr>
+          <a:lstStyle/>
+          <a:p>
+            <a:pPr algn="l">
+              <a:lnSpc>
+                <a:spcPct val="91750"/>
+              </a:lnSpc>
+            </a:pPr>
+            <a:r>
+              <a:rPr sz="1000" b="0" spc="80">
+                <a:solidFill>
+                  <a:srgbClr val="6B2A55"/>
+                </a:solidFill>
+                <a:latin typeface="Montserrat Bold"/>
+                <a:cs typeface="Montserrat Bold"/>
+                <a:sym typeface="Montserrat Bold"/>
+              </a:rPr>
+              <a:t>GET</a:t>
+            </a:r>
+          </a:p>
+        </p:txBody>
+      </p:sp>
+      <p:sp>
+        <p:nvSpPr>
+          <p:cNvPr id="9" name="TextBox 8"/>
+          <p:cNvSpPr txBox="1"/>
+          <p:nvPr/>
+        </p:nvSpPr>
+        <p:spPr>
+          <a:xfrm>
+            <a:off x="1170432" y="2560320"/>
+            <a:ext cx="2103120" cy="1706474"/>
+          </a:xfrm>
+          <a:prstGeom prst="rect">
+            <a:avLst/>
+          </a:prstGeom>
+          <a:noFill/>
+        </p:spPr>
+        <p:txBody>
+          <a:bodyPr wrap="square" anchor="t" lIns="0" rIns="0" tIns="0" bIns="0">
+            <a:normAutofit/>
+          </a:bodyPr>
+          <a:lstStyle/>
+          <a:p>
+            <a:pPr algn="l">
+              <a:lnSpc>
+                <a:spcPct val="106471"/>
+              </a:lnSpc>
+            </a:pPr>
+            <a:r>
+              <a:rPr sz="1700" b="0">
+                <a:solidFill>
+                  <a:srgbClr val="10304F"/>
+                </a:solidFill>
+                <a:latin typeface="Space Grotesk"/>
+                <a:cs typeface="Space Grotesk"/>
+                <a:sym typeface="Space Grotesk"/>
+              </a:rPr>
+              <a:t>40.0% to 32.7%: one-off charges and depreciation lead, lower revenue third</a:t>
+            </a:r>
+          </a:p>
+        </p:txBody>
+      </p:sp>
+      <p:sp>
+        <p:nvSpPr>
+          <p:cNvPr id="10" name="TextBox 9"/>
+          <p:cNvSpPr txBox="1"/>
+          <p:nvPr/>
+        </p:nvSpPr>
+        <p:spPr>
+          <a:xfrm>
+            <a:off x="658368" y="4297680"/>
+            <a:ext cx="411480" cy="175698"/>
+          </a:xfrm>
+          <a:prstGeom prst="rect">
+            <a:avLst/>
+          </a:prstGeom>
+          <a:noFill/>
+        </p:spPr>
+        <p:txBody>
+          <a:bodyPr wrap="square" anchor="t" lIns="0" rIns="0" tIns="0" bIns="0">
+            <a:normAutofit/>
+          </a:bodyPr>
+          <a:lstStyle/>
+          <a:p>
+            <a:pPr algn="l">
+              <a:lnSpc>
+                <a:spcPct val="91750"/>
+              </a:lnSpc>
+            </a:pPr>
+            <a:r>
+              <a:rPr sz="1000" b="0" spc="80">
+                <a:solidFill>
+                  <a:srgbClr val="6B2A55"/>
+                </a:solidFill>
+                <a:latin typeface="Montserrat Bold"/>
+                <a:cs typeface="Montserrat Bold"/>
+                <a:sym typeface="Montserrat Bold"/>
+              </a:rPr>
+              <a:t>TAP</a:t>
+            </a:r>
+          </a:p>
+        </p:txBody>
+      </p:sp>
+      <p:sp>
+        <p:nvSpPr>
+          <p:cNvPr id="11" name="TextBox 10"/>
+          <p:cNvSpPr txBox="1"/>
+          <p:nvPr/>
+        </p:nvSpPr>
+        <p:spPr>
+          <a:xfrm>
+            <a:off x="1170432" y="4297680"/>
+            <a:ext cx="2103120" cy="1656584"/>
+          </a:xfrm>
+          <a:prstGeom prst="rect">
+            <a:avLst/>
+          </a:prstGeom>
+          <a:noFill/>
+        </p:spPr>
+        <p:txBody>
+          <a:bodyPr wrap="square" anchor="t" lIns="0" rIns="0" tIns="0" bIns="0">
+            <a:normAutofit/>
+          </a:bodyPr>
+          <a:lstStyle/>
+          <a:p>
+            <a:pPr algn="l">
+              <a:lnSpc>
+                <a:spcPct val="106471"/>
+              </a:lnSpc>
+            </a:pPr>
+            <a:r>
+              <a:rPr sz="1700" b="0">
+                <a:solidFill>
+                  <a:srgbClr val="10304F"/>
+                </a:solidFill>
+                <a:latin typeface="Space Grotesk"/>
+                <a:cs typeface="Space Grotesk"/>
+                <a:sym typeface="Space Grotesk"/>
+              </a:rPr>
+              <a:t>Taps F15 to see the SEC row and SQL, then rewrites her sentence</a:t>
+            </a:r>
+          </a:p>
+        </p:txBody>
+      </p:sp>
+      <p:sp>
+        <p:nvSpPr>
+          <p:cNvPr id="12" name="TextBox 11"/>
+          <p:cNvSpPr txBox="1"/>
+          <p:nvPr/>
+        </p:nvSpPr>
+        <p:spPr>
+          <a:xfrm>
+            <a:off x="8918448" y="2209922"/>
+            <a:ext cx="2615184" cy="1309266"/>
           </a:xfrm>
           <a:prstGeom prst="rect">
             <a:avLst/>
@@ -8697,7 +5623,7 @@
               </a:lnSpc>
             </a:pPr>
             <a:r>
-              <a:rPr sz="5800" b="0">
+              <a:rPr sz="3944" b="0">
                 <a:solidFill>
                   <a:srgbClr val="10304F"/>
                 </a:solidFill>
@@ -8705,21 +5631,21 @@
                 <a:cs typeface="Space Grotesk Bold"/>
                 <a:sym typeface="Space Grotesk Bold"/>
               </a:rPr>
-              <a:t>Who it is for</a:t>
-            </a:r>
-          </a:p>
-        </p:txBody>
-      </p:sp>
-      <p:sp>
-        <p:nvSpPr>
-          <p:cNvPr id="6" name="TextBox 5"/>
+              <a:t>A 5 pm deadline</a:t>
+            </a:r>
+          </a:p>
+        </p:txBody>
+      </p:sp>
+      <p:sp>
+        <p:nvSpPr>
+          <p:cNvPr id="13" name="TextBox 12"/>
           <p:cNvSpPr txBox="1"/>
           <p:nvPr/>
         </p:nvSpPr>
         <p:spPr>
           <a:xfrm>
-            <a:off x="658368" y="3959220"/>
-            <a:ext cx="3396488" cy="324307"/>
+            <a:off x="8918448" y="3559569"/>
+            <a:ext cx="2615184" cy="1656584"/>
           </a:xfrm>
           <a:prstGeom prst="rect">
             <a:avLst/>
@@ -8732,48 +5658,7 @@
           </a:bodyPr>
           <a:lstStyle/>
           <a:p>
-            <a:pPr algn="ctr">
-              <a:lnSpc>
-                <a:spcPct val="91750"/>
-              </a:lnSpc>
-            </a:pPr>
-            <a:r>
-              <a:rPr sz="2000" b="0">
-                <a:solidFill>
-                  <a:srgbClr val="10304F"/>
-                </a:solidFill>
-                <a:latin typeface="Montserrat Bold"/>
-                <a:cs typeface="Montserrat Bold"/>
-                <a:sym typeface="Montserrat Bold"/>
-              </a:rPr>
-              <a:t>Analysts</a:t>
-            </a:r>
-          </a:p>
-        </p:txBody>
-      </p:sp>
-      <p:sp>
-        <p:nvSpPr>
-          <p:cNvPr id="7" name="TextBox 6"/>
-          <p:cNvSpPr txBox="1"/>
-          <p:nvPr/>
-        </p:nvSpPr>
-        <p:spPr>
-          <a:xfrm>
-            <a:off x="658368" y="4335140"/>
-            <a:ext cx="3396488" cy="1656584"/>
-          </a:xfrm>
-          <a:prstGeom prst="rect">
-            <a:avLst/>
-          </a:prstGeom>
-          <a:noFill/>
-        </p:spPr>
-        <p:txBody>
-          <a:bodyPr wrap="square" anchor="t" lIns="0" rIns="0" tIns="0" bIns="0">
-            <a:normAutofit/>
-          </a:bodyPr>
-          <a:lstStyle/>
-          <a:p>
-            <a:pPr algn="ctr">
+            <a:pPr algn="l">
               <a:lnSpc>
                 <a:spcPct val="106471"/>
               </a:lnSpc>
@@ -8781,177 +5666,13 @@
             <a:r>
               <a:rPr sz="1700" b="0">
                 <a:solidFill>
-                  <a:srgbClr val="10304F"/>
+                  <a:srgbClr val="4A6079"/>
                 </a:solidFill>
                 <a:latin typeface="Space Grotesk"/>
                 <a:cs typeface="Space Grotesk"/>
                 <a:sym typeface="Space Grotesk"/>
               </a:rPr>
-              <a:t>Explain a margin or revenue move from filings in seconds, with the bridge in points of revenue.</a:t>
-            </a:r>
-          </a:p>
-        </p:txBody>
-      </p:sp>
-      <p:sp>
-        <p:nvSpPr>
-          <p:cNvPr id="8" name="TextBox 7"/>
-          <p:cNvSpPr txBox="1"/>
-          <p:nvPr/>
-        </p:nvSpPr>
-        <p:spPr>
-          <a:xfrm>
-            <a:off x="4283456" y="3959220"/>
-            <a:ext cx="3396488" cy="324307"/>
-          </a:xfrm>
-          <a:prstGeom prst="rect">
-            <a:avLst/>
-          </a:prstGeom>
-          <a:noFill/>
-        </p:spPr>
-        <p:txBody>
-          <a:bodyPr wrap="square" anchor="t" lIns="0" rIns="0" tIns="0" bIns="0">
-            <a:normAutofit/>
-          </a:bodyPr>
-          <a:lstStyle/>
-          <a:p>
-            <a:pPr algn="ctr">
-              <a:lnSpc>
-                <a:spcPct val="91750"/>
-              </a:lnSpc>
-            </a:pPr>
-            <a:r>
-              <a:rPr sz="2000" b="0">
-                <a:solidFill>
-                  <a:srgbClr val="10304F"/>
-                </a:solidFill>
-                <a:latin typeface="Montserrat Bold"/>
-                <a:cs typeface="Montserrat Bold"/>
-                <a:sym typeface="Montserrat Bold"/>
-              </a:rPr>
-              <a:t>Journalists</a:t>
-            </a:r>
-          </a:p>
-        </p:txBody>
-      </p:sp>
-      <p:sp>
-        <p:nvSpPr>
-          <p:cNvPr id="9" name="TextBox 8"/>
-          <p:cNvSpPr txBox="1"/>
-          <p:nvPr/>
-        </p:nvSpPr>
-        <p:spPr>
-          <a:xfrm>
-            <a:off x="4283456" y="4335140"/>
-            <a:ext cx="3396488" cy="1365179"/>
-          </a:xfrm>
-          <a:prstGeom prst="rect">
-            <a:avLst/>
-          </a:prstGeom>
-          <a:noFill/>
-        </p:spPr>
-        <p:txBody>
-          <a:bodyPr wrap="square" anchor="t" lIns="0" rIns="0" tIns="0" bIns="0">
-            <a:normAutofit/>
-          </a:bodyPr>
-          <a:lstStyle/>
-          <a:p>
-            <a:pPr algn="ctr">
-              <a:lnSpc>
-                <a:spcPct val="106471"/>
-              </a:lnSpc>
-            </a:pPr>
-            <a:r>
-              <a:rPr sz="1700" b="0">
-                <a:solidFill>
-                  <a:srgbClr val="10304F"/>
-                </a:solidFill>
-                <a:latin typeface="Space Grotesk"/>
-                <a:cs typeface="Space Grotesk"/>
-                <a:sym typeface="Space Grotesk"/>
-              </a:rPr>
-              <a:t>Check a claimed cause of inflation or unemployment against official series before publishing.</a:t>
-            </a:r>
-          </a:p>
-        </p:txBody>
-      </p:sp>
-      <p:sp>
-        <p:nvSpPr>
-          <p:cNvPr id="10" name="TextBox 9"/>
-          <p:cNvSpPr txBox="1"/>
-          <p:nvPr/>
-        </p:nvSpPr>
-        <p:spPr>
-          <a:xfrm>
-            <a:off x="7908544" y="3959220"/>
-            <a:ext cx="3396488" cy="324307"/>
-          </a:xfrm>
-          <a:prstGeom prst="rect">
-            <a:avLst/>
-          </a:prstGeom>
-          <a:noFill/>
-        </p:spPr>
-        <p:txBody>
-          <a:bodyPr wrap="square" anchor="t" lIns="0" rIns="0" tIns="0" bIns="0">
-            <a:normAutofit/>
-          </a:bodyPr>
-          <a:lstStyle/>
-          <a:p>
-            <a:pPr algn="ctr">
-              <a:lnSpc>
-                <a:spcPct val="91750"/>
-              </a:lnSpc>
-            </a:pPr>
-            <a:r>
-              <a:rPr sz="2000" b="0">
-                <a:solidFill>
-                  <a:srgbClr val="10304F"/>
-                </a:solidFill>
-                <a:latin typeface="Montserrat Bold"/>
-                <a:cs typeface="Montserrat Bold"/>
-                <a:sym typeface="Montserrat Bold"/>
-              </a:rPr>
-              <a:t>Students and investors</a:t>
-            </a:r>
-          </a:p>
-        </p:txBody>
-      </p:sp>
-      <p:sp>
-        <p:nvSpPr>
-          <p:cNvPr id="11" name="TextBox 10"/>
-          <p:cNvSpPr txBox="1"/>
-          <p:nvPr/>
-        </p:nvSpPr>
-        <p:spPr>
-          <a:xfrm>
-            <a:off x="7908544" y="4335140"/>
-            <a:ext cx="3396488" cy="1325267"/>
-          </a:xfrm>
-          <a:prstGeom prst="rect">
-            <a:avLst/>
-          </a:prstGeom>
-          <a:noFill/>
-        </p:spPr>
-        <p:txBody>
-          <a:bodyPr wrap="square" anchor="t" lIns="0" rIns="0" tIns="0" bIns="0">
-            <a:normAutofit/>
-          </a:bodyPr>
-          <a:lstStyle/>
-          <a:p>
-            <a:pPr algn="ctr">
-              <a:lnSpc>
-                <a:spcPct val="106471"/>
-              </a:lnSpc>
-            </a:pPr>
-            <a:r>
-              <a:rPr sz="1700" b="0">
-                <a:solidFill>
-                  <a:srgbClr val="10304F"/>
-                </a:solidFill>
-                <a:latin typeface="Space Grotesk"/>
-                <a:cs typeface="Space Grotesk"/>
-                <a:sym typeface="Space Grotesk"/>
-              </a:rPr>
-              <a:t>Learn to reason from evidence: see the hypotheses that failed, not just the answer.</a:t>
+              <a:t>Her draft blames weak demand for Intel's margin fall. She asks Because instead.</a:t>
             </a:r>
           </a:p>
         </p:txBody>
@@ -9068,7 +5789,7 @@
       </p:sp>
       <p:pic>
         <p:nvPicPr>
-          <p:cNvPr id="4" name="Picture 3" descr="deckimg-ejhrxaq_.jpg"/>
+          <p:cNvPr id="4" name="Picture 3" descr="deckimg-3efkvp7_.jpg"/>
           <p:cNvPicPr>
             <a:picLocks noChangeAspect="1"/>
           </p:cNvPicPr>
@@ -9126,7 +5847,7 @@
                 <a:cs typeface="Montserrat Bold"/>
                 <a:sym typeface="Montserrat Bold"/>
               </a:rPr>
-              <a:t>04/15</a:t>
+              <a:t>04/10</a:t>
             </a:r>
           </a:p>
         </p:txBody>
@@ -9140,7 +5861,7 @@
         <p:spPr>
           <a:xfrm>
             <a:off x="658368" y="822960"/>
-            <a:ext cx="4785116" cy="1571119"/>
+            <a:ext cx="4785116" cy="1270989"/>
           </a:xfrm>
           <a:prstGeom prst="rect">
             <a:avLst/>
@@ -9159,7 +5880,7 @@
               </a:lnSpc>
             </a:pPr>
             <a:r>
-              <a:rPr sz="4755" b="0">
+              <a:rPr sz="3944" b="0">
                 <a:solidFill>
                   <a:srgbClr val="10304F"/>
                 </a:solidFill>
@@ -9167,7 +5888,7 @@
                 <a:cs typeface="Space Grotesk Bold"/>
                 <a:sym typeface="Space Grotesk Bold"/>
               </a:rPr>
-              <a:t>Ask why then audit</a:t>
+              <a:t>One investigation</a:t>
             </a:r>
           </a:p>
         </p:txBody>
@@ -9180,8 +5901,8 @@
         </p:nvSpPr>
         <p:spPr>
           <a:xfrm>
-            <a:off x="658368" y="2292575"/>
-            <a:ext cx="4785116" cy="1325267"/>
+            <a:off x="658368" y="2029303"/>
+            <a:ext cx="4785116" cy="1365179"/>
           </a:xfrm>
           <a:prstGeom prst="rect">
             <a:avLst/>
@@ -9208,7 +5929,7 @@
                 <a:cs typeface="Space Grotesk"/>
                 <a:sym typeface="Space Grotesk"/>
               </a:rPr>
-              <a:t>Intel's 2024 gross margin from SEC filings. Every claim cites findings; every finding cites a query and a source row.</a:t>
+              <a:t>Scout guards and signs a contract. Zetaris SQL pulls evidence. Each hypothesis gets a numeric test. H-MEM remembers with provenance.</a:t>
             </a:r>
           </a:p>
         </p:txBody>
@@ -9331,14 +6052,14 @@
         </p:nvSpPr>
         <p:spPr>
           <a:xfrm>
-            <a:off x="658368" y="3142151"/>
-            <a:ext cx="1043970" cy="18288"/>
+            <a:off x="4145280" y="3803904"/>
+            <a:ext cx="7168896" cy="9144"/>
           </a:xfrm>
           <a:prstGeom prst="rect">
             <a:avLst/>
           </a:prstGeom>
           <a:solidFill>
-            <a:srgbClr val="6B2A55"/>
+            <a:srgbClr val="4A6079"/>
           </a:solidFill>
           <a:ln>
             <a:noFill/>
@@ -9373,14 +6094,14 @@
         </p:nvSpPr>
         <p:spPr>
           <a:xfrm>
-            <a:off x="3454908" y="3142151"/>
-            <a:ext cx="1043970" cy="18288"/>
+            <a:off x="4145280" y="4602480"/>
+            <a:ext cx="7168896" cy="9144"/>
           </a:xfrm>
           <a:prstGeom prst="rect">
             <a:avLst/>
           </a:prstGeom>
           <a:solidFill>
-            <a:srgbClr val="6B2A55"/>
+            <a:srgbClr val="4A6079"/>
           </a:solidFill>
           <a:ln>
             <a:noFill/>
@@ -9415,14 +6136,14 @@
         </p:nvSpPr>
         <p:spPr>
           <a:xfrm>
-            <a:off x="6251448" y="3142151"/>
-            <a:ext cx="1043970" cy="18288"/>
+            <a:off x="4145280" y="5401056"/>
+            <a:ext cx="7168896" cy="9144"/>
           </a:xfrm>
           <a:prstGeom prst="rect">
             <a:avLst/>
           </a:prstGeom>
           <a:solidFill>
-            <a:srgbClr val="6B2A55"/>
+            <a:srgbClr val="4A6079"/>
           </a:solidFill>
           <a:ln>
             <a:noFill/>
@@ -9449,48 +6170,31 @@
           <a:p/>
         </p:txBody>
       </p:sp>
-      <p:sp>
-        <p:nvSpPr>
-          <p:cNvPr id="7" name="Rectangle 6"/>
-          <p:cNvSpPr/>
-          <p:nvPr/>
-        </p:nvSpPr>
-        <p:spPr>
-          <a:xfrm>
-            <a:off x="9047988" y="3142151"/>
-            <a:ext cx="1043970" cy="18288"/>
-          </a:xfrm>
-          <a:prstGeom prst="rect">
-            <a:avLst/>
-          </a:prstGeom>
-          <a:solidFill>
-            <a:srgbClr val="6B2A55"/>
-          </a:solidFill>
-          <a:ln>
-            <a:noFill/>
-          </a:ln>
-          <a:effectLst/>
-        </p:spPr>
-        <p:style>
-          <a:lnRef idx="1">
-            <a:schemeClr val="accent1"/>
-          </a:lnRef>
-          <a:fillRef idx="3">
-            <a:schemeClr val="accent1"/>
-          </a:fillRef>
-          <a:effectRef idx="2">
-            <a:schemeClr val="accent1"/>
-          </a:effectRef>
-          <a:fontRef idx="minor">
-            <a:schemeClr val="lt1"/>
-          </a:fontRef>
-        </p:style>
-        <p:txBody>
-          <a:bodyPr rtlCol="0" anchor="ctr"/>
-          <a:lstStyle/>
-          <a:p/>
-        </p:txBody>
-      </p:sp>
+      <p:pic>
+        <p:nvPicPr>
+          <p:cNvPr id="7" name="Picture 6" descr="deckimg-8mk7jm7k.jpg"/>
+          <p:cNvPicPr>
+            <a:picLocks noChangeAspect="1"/>
+          </p:cNvPicPr>
+          <p:nvPr/>
+        </p:nvPicPr>
+        <p:blipFill>
+          <a:blip r:embed="rId2"/>
+          <a:srcRect t="80" b="80"/>
+          <a:stretch>
+            <a:fillRect/>
+          </a:stretch>
+        </p:blipFill>
+        <p:spPr>
+          <a:xfrm>
+            <a:off x="0" y="0"/>
+            <a:ext cx="12192000" cy="3566160"/>
+          </a:xfrm>
+          <a:prstGeom prst="rect">
+            <a:avLst/>
+          </a:prstGeom>
+        </p:spPr>
+      </p:pic>
       <p:sp>
         <p:nvSpPr>
           <p:cNvPr id="8" name="TextBox 7"/>
@@ -9521,13 +6225,13 @@
             <a:r>
               <a:rPr sz="1000" b="0" spc="80">
                 <a:solidFill>
-                  <a:srgbClr val="000000"/>
+                  <a:srgbClr val="FFFFFF"/>
                 </a:solidFill>
                 <a:latin typeface="Montserrat Bold"/>
                 <a:cs typeface="Montserrat Bold"/>
                 <a:sym typeface="Montserrat Bold"/>
               </a:rPr>
-              <a:t>05/15</a:t>
+              <a:t>05/10</a:t>
             </a:r>
           </a:p>
         </p:txBody>
@@ -9540,8 +6244,49 @@
         </p:nvSpPr>
         <p:spPr>
           <a:xfrm>
-            <a:off x="658368" y="1825772"/>
-            <a:ext cx="7830190" cy="960128"/>
+            <a:off x="658368" y="3803904"/>
+            <a:ext cx="3413760" cy="1121380"/>
+          </a:xfrm>
+          <a:prstGeom prst="rect">
+            <a:avLst/>
+          </a:prstGeom>
+          <a:noFill/>
+        </p:spPr>
+        <p:txBody>
+          <a:bodyPr wrap="square" anchor="t" lIns="0" rIns="0" tIns="0" bIns="0">
+            <a:normAutofit/>
+          </a:bodyPr>
+          <a:lstStyle/>
+          <a:p>
+            <a:pPr algn="l">
+              <a:lnSpc>
+                <a:spcPct val="106471"/>
+              </a:lnSpc>
+            </a:pPr>
+            <a:r>
+              <a:rPr sz="1394" b="0">
+                <a:solidFill>
+                  <a:srgbClr val="4A6079"/>
+                </a:solidFill>
+                <a:latin typeface="Space Grotesk"/>
+                <a:cs typeface="Space Grotesk"/>
+                <a:sym typeface="Space Grotesk"/>
+              </a:rPr>
+              <a:t>A real Lightning 2.4.3.1 instance on a GitHub runner answers every example question over JDBC.</a:t>
+            </a:r>
+          </a:p>
+        </p:txBody>
+      </p:sp>
+      <p:sp>
+        <p:nvSpPr>
+          <p:cNvPr id="10" name="TextBox 9"/>
+          <p:cNvSpPr txBox="1"/>
+          <p:nvPr/>
+        </p:nvSpPr>
+        <p:spPr>
+          <a:xfrm>
+            <a:off x="658368" y="4988739"/>
+            <a:ext cx="3413760" cy="1309266"/>
           </a:xfrm>
           <a:prstGeom prst="rect">
             <a:avLst/>
@@ -9560,7 +6305,7 @@
               </a:lnSpc>
             </a:pPr>
             <a:r>
-              <a:rPr sz="5800" b="0">
+              <a:rPr sz="3944" b="0">
                 <a:solidFill>
                   <a:srgbClr val="10304F"/>
                 </a:solidFill>
@@ -9568,21 +6313,21 @@
                 <a:cs typeface="Space Grotesk Bold"/>
                 <a:sym typeface="Space Grotesk Bold"/>
               </a:rPr>
-              <a:t>One investigation</a:t>
-            </a:r>
-          </a:p>
-        </p:txBody>
-      </p:sp>
-      <p:sp>
-        <p:nvSpPr>
-          <p:cNvPr id="10" name="TextBox 9"/>
+              <a:t>Live on Zetaris</a:t>
+            </a:r>
+          </a:p>
+        </p:txBody>
+      </p:sp>
+      <p:sp>
+        <p:nvSpPr>
+          <p:cNvPr id="11" name="TextBox 10"/>
           <p:cNvSpPr txBox="1"/>
           <p:nvPr/>
         </p:nvSpPr>
         <p:spPr>
           <a:xfrm>
-            <a:off x="658368" y="2905734"/>
-            <a:ext cx="2485644" cy="175698"/>
+            <a:off x="4145280" y="3931920"/>
+            <a:ext cx="7168896" cy="329434"/>
           </a:xfrm>
           <a:prstGeom prst="rect">
             <a:avLst/>
@@ -9601,29 +6346,29 @@
               </a:lnSpc>
             </a:pPr>
             <a:r>
-              <a:rPr sz="1000" b="0" spc="80">
-                <a:solidFill>
-                  <a:srgbClr val="6B2A55"/>
+              <a:rPr sz="2000" b="0">
+                <a:solidFill>
+                  <a:srgbClr val="10304F"/>
                 </a:solidFill>
                 <a:latin typeface="Montserrat Bold"/>
                 <a:cs typeface="Montserrat Bold"/>
                 <a:sym typeface="Montserrat Bold"/>
               </a:rPr>
-              <a:t>SCOUT</a:t>
-            </a:r>
-          </a:p>
-        </p:txBody>
-      </p:sp>
-      <p:sp>
-        <p:nvSpPr>
-          <p:cNvPr id="11" name="TextBox 10"/>
+              <a:t>Run 39949595787</a:t>
+            </a:r>
+          </a:p>
+        </p:txBody>
+      </p:sp>
+      <p:sp>
+        <p:nvSpPr>
+          <p:cNvPr id="12" name="TextBox 11"/>
           <p:cNvSpPr txBox="1"/>
           <p:nvPr/>
         </p:nvSpPr>
         <p:spPr>
           <a:xfrm>
-            <a:off x="658368" y="3288455"/>
-            <a:ext cx="2485644" cy="1987901"/>
+            <a:off x="4145280" y="4275761"/>
+            <a:ext cx="7168896" cy="288788"/>
           </a:xfrm>
           <a:prstGeom prst="rect">
             <a:avLst/>
@@ -9642,29 +6387,29 @@
               </a:lnSpc>
             </a:pPr>
             <a:r>
-              <a:rPr sz="1700" b="0">
-                <a:solidFill>
-                  <a:srgbClr val="10304F"/>
+              <a:rPr sz="1394" b="0">
+                <a:solidFill>
+                  <a:srgbClr val="4A6079"/>
                 </a:solidFill>
                 <a:latin typeface="Space Grotesk"/>
                 <a:cs typeface="Space Grotesk"/>
                 <a:sym typeface="Space Grotesk"/>
               </a:rPr>
-              <a:t>Classifies the question, runs the guard and issues an HMAC-signed contract for the allowed tools.</a:t>
-            </a:r>
-          </a:p>
-        </p:txBody>
-      </p:sp>
-      <p:sp>
-        <p:nvSpPr>
-          <p:cNvPr id="12" name="TextBox 11"/>
+              <a:t>5/5 questions, 0 query errors</a:t>
+            </a:r>
+          </a:p>
+        </p:txBody>
+      </p:sp>
+      <p:sp>
+        <p:nvSpPr>
+          <p:cNvPr id="13" name="TextBox 12"/>
           <p:cNvSpPr txBox="1"/>
           <p:nvPr/>
         </p:nvSpPr>
         <p:spPr>
           <a:xfrm>
-            <a:off x="3454908" y="2905734"/>
-            <a:ext cx="2485644" cy="175698"/>
+            <a:off x="4145280" y="4730496"/>
+            <a:ext cx="7168896" cy="329434"/>
           </a:xfrm>
           <a:prstGeom prst="rect">
             <a:avLst/>
@@ -9683,29 +6428,29 @@
               </a:lnSpc>
             </a:pPr>
             <a:r>
-              <a:rPr sz="1000" b="0" spc="80">
-                <a:solidFill>
-                  <a:srgbClr val="6B2A55"/>
+              <a:rPr sz="2000" b="0">
+                <a:solidFill>
+                  <a:srgbClr val="10304F"/>
                 </a:solidFill>
                 <a:latin typeface="Montserrat Bold"/>
                 <a:cs typeface="Montserrat Bold"/>
                 <a:sym typeface="Montserrat Bold"/>
               </a:rPr>
-              <a:t>RECALL</a:t>
-            </a:r>
-          </a:p>
-        </p:txBody>
-      </p:sp>
-      <p:sp>
-        <p:nvSpPr>
-          <p:cNvPr id="13" name="TextBox 12"/>
+              <a:t>Federated</a:t>
+            </a:r>
+          </a:p>
+        </p:txBody>
+      </p:sp>
+      <p:sp>
+        <p:nvSpPr>
+          <p:cNvPr id="14" name="TextBox 13"/>
           <p:cNvSpPr txBox="1"/>
           <p:nvPr/>
         </p:nvSpPr>
         <p:spPr>
           <a:xfrm>
-            <a:off x="3454908" y="3288455"/>
-            <a:ext cx="2485644" cy="1365179"/>
+            <a:off x="4145280" y="5074337"/>
+            <a:ext cx="7168896" cy="288788"/>
           </a:xfrm>
           <a:prstGeom prst="rect">
             <a:avLst/>
@@ -9724,29 +6469,29 @@
               </a:lnSpc>
             </a:pPr>
             <a:r>
-              <a:rPr sz="1700" b="0">
-                <a:solidFill>
-                  <a:srgbClr val="10304F"/>
+              <a:rPr sz="1394" b="0">
+                <a:solidFill>
+                  <a:srgbClr val="4A6079"/>
                 </a:solidFill>
                 <a:latin typeface="Space Grotesk"/>
                 <a:cs typeface="Space Grotesk"/>
                 <a:sym typeface="Space Grotesk"/>
               </a:rPr>
-              <a:t>H-MEM returns what the agent already believes and which query it came from.</a:t>
-            </a:r>
-          </a:p>
-        </p:txBody>
-      </p:sp>
-      <p:sp>
-        <p:nvSpPr>
-          <p:cNvPr id="14" name="TextBox 13"/>
+              <a:t>EDGAR x FRED and ONS x FRED in one SQL JOIN</a:t>
+            </a:r>
+          </a:p>
+        </p:txBody>
+      </p:sp>
+      <p:sp>
+        <p:nvSpPr>
+          <p:cNvPr id="15" name="TextBox 14"/>
           <p:cNvSpPr txBox="1"/>
           <p:nvPr/>
         </p:nvSpPr>
         <p:spPr>
           <a:xfrm>
-            <a:off x="6251448" y="2905734"/>
-            <a:ext cx="2485644" cy="175698"/>
+            <a:off x="4145280" y="5529072"/>
+            <a:ext cx="7168896" cy="329434"/>
           </a:xfrm>
           <a:prstGeom prst="rect">
             <a:avLst/>
@@ -9765,29 +6510,29 @@
               </a:lnSpc>
             </a:pPr>
             <a:r>
-              <a:rPr sz="1000" b="0" spc="80">
-                <a:solidFill>
-                  <a:srgbClr val="6B2A55"/>
+              <a:rPr sz="2000" b="0">
+                <a:solidFill>
+                  <a:srgbClr val="10304F"/>
                 </a:solidFill>
                 <a:latin typeface="Montserrat Bold"/>
                 <a:cs typeface="Montserrat Bold"/>
                 <a:sym typeface="Montserrat Bold"/>
               </a:rPr>
-              <a:t>QUERY AND TEST</a:t>
-            </a:r>
-          </a:p>
-        </p:txBody>
-      </p:sp>
-      <p:sp>
-        <p:nvSpPr>
-          <p:cNvPr id="15" name="TextBox 14"/>
+              <a:t>USL</a:t>
+            </a:r>
+          </a:p>
+        </p:txBody>
+      </p:sp>
+      <p:sp>
+        <p:nvSpPr>
+          <p:cNvPr id="16" name="TextBox 15"/>
           <p:cNvSpPr txBox="1"/>
           <p:nvPr/>
         </p:nvSpPr>
         <p:spPr>
           <a:xfrm>
-            <a:off x="6251448" y="3288455"/>
-            <a:ext cx="2485644" cy="1706474"/>
+            <a:off x="4145280" y="5872913"/>
+            <a:ext cx="7168896" cy="288788"/>
           </a:xfrm>
           <a:prstGeom prst="rect">
             <a:avLst/>
@@ -9806,97 +6551,15 @@
               </a:lnSpc>
             </a:pPr>
             <a:r>
-              <a:rPr sz="1700" b="0">
-                <a:solidFill>
-                  <a:srgbClr val="10304F"/>
+              <a:rPr sz="1394" b="0">
+                <a:solidFill>
+                  <a:srgbClr val="4A6079"/>
                 </a:solidFill>
                 <a:latin typeface="Space Grotesk"/>
                 <a:cs typeface="Space Grotesk"/>
                 <a:sym typeface="Space Grotesk"/>
               </a:rPr>
-              <a:t>Zetaris SQL pulls target and drivers. Each hypothesis gets a numeric rule and a verdict.</a:t>
-            </a:r>
-          </a:p>
-        </p:txBody>
-      </p:sp>
-      <p:sp>
-        <p:nvSpPr>
-          <p:cNvPr id="16" name="TextBox 15"/>
-          <p:cNvSpPr txBox="1"/>
-          <p:nvPr/>
-        </p:nvSpPr>
-        <p:spPr>
-          <a:xfrm>
-            <a:off x="9047988" y="2905734"/>
-            <a:ext cx="2485644" cy="175698"/>
-          </a:xfrm>
-          <a:prstGeom prst="rect">
-            <a:avLst/>
-          </a:prstGeom>
-          <a:noFill/>
-        </p:spPr>
-        <p:txBody>
-          <a:bodyPr wrap="square" anchor="t" lIns="0" rIns="0" tIns="0" bIns="0">
-            <a:normAutofit/>
-          </a:bodyPr>
-          <a:lstStyle/>
-          <a:p>
-            <a:pPr algn="l">
-              <a:lnSpc>
-                <a:spcPct val="91750"/>
-              </a:lnSpc>
-            </a:pPr>
-            <a:r>
-              <a:rPr sz="1000" b="0" spc="80">
-                <a:solidFill>
-                  <a:srgbClr val="6B2A55"/>
-                </a:solidFill>
-                <a:latin typeface="Montserrat Bold"/>
-                <a:cs typeface="Montserrat Bold"/>
-                <a:sym typeface="Montserrat Bold"/>
-              </a:rPr>
-              <a:t>ANSWER AND REMEMBER</a:t>
-            </a:r>
-          </a:p>
-        </p:txBody>
-      </p:sp>
-      <p:sp>
-        <p:nvSpPr>
-          <p:cNvPr id="17" name="TextBox 16"/>
-          <p:cNvSpPr txBox="1"/>
-          <p:nvPr/>
-        </p:nvSpPr>
-        <p:spPr>
-          <a:xfrm>
-            <a:off x="9047988" y="3288455"/>
-            <a:ext cx="2485644" cy="1987901"/>
-          </a:xfrm>
-          <a:prstGeom prst="rect">
-            <a:avLst/>
-          </a:prstGeom>
-          <a:noFill/>
-        </p:spPr>
-        <p:txBody>
-          <a:bodyPr wrap="square" anchor="t" lIns="0" rIns="0" tIns="0" bIns="0">
-            <a:normAutofit/>
-          </a:bodyPr>
-          <a:lstStyle/>
-          <a:p>
-            <a:pPr algn="l">
-              <a:lnSpc>
-                <a:spcPct val="106471"/>
-              </a:lnSpc>
-            </a:pPr>
-            <a:r>
-              <a:rPr sz="1700" b="0">
-                <a:solidFill>
-                  <a:srgbClr val="10304F"/>
-                </a:solidFill>
-                <a:latin typeface="Space Grotesk"/>
-                <a:cs typeface="Space Grotesk"/>
-                <a:sym typeface="Space Grotesk"/>
-              </a:rPr>
-              <a:t>Cited claims, counter-evidence and confidence; every finding is written back with provenance.</a:t>
+              <a:t>Semantic layer model compiled, 9/9 statements</a:t>
             </a:r>
           </a:p>
         </p:txBody>
@@ -10011,33 +6674,261 @@
           <a:p/>
         </p:txBody>
       </p:sp>
-      <p:pic>
-        <p:nvPicPr>
-          <p:cNvPr id="4" name="Picture 3" descr="deckimg-w0hmc952.jpg"/>
-          <p:cNvPicPr>
-            <a:picLocks noChangeAspect="1"/>
-          </p:cNvPicPr>
-          <p:nvPr/>
-        </p:nvPicPr>
-        <p:blipFill>
-          <a:blip r:embed="rId2"/>
-          <a:stretch>
-            <a:fillRect/>
-          </a:stretch>
-        </p:blipFill>
-        <p:spPr>
-          <a:xfrm>
-            <a:off x="6313505" y="823015"/>
-            <a:ext cx="5220127" cy="5211970"/>
-          </a:xfrm>
-          <a:prstGeom prst="rect">
-            <a:avLst/>
-          </a:prstGeom>
-        </p:spPr>
-      </p:pic>
-      <p:sp>
-        <p:nvSpPr>
-          <p:cNvPr id="5" name="TextBox 4"/>
+      <p:sp>
+        <p:nvSpPr>
+          <p:cNvPr id="4" name="Rectangle 3"/>
+          <p:cNvSpPr/>
+          <p:nvPr/>
+        </p:nvSpPr>
+        <p:spPr>
+          <a:xfrm>
+            <a:off x="3506175" y="3444161"/>
+            <a:ext cx="3302184" cy="267974"/>
+          </a:xfrm>
+          <a:prstGeom prst="rect">
+            <a:avLst/>
+          </a:prstGeom>
+          <a:solidFill>
+            <a:srgbClr val="6B2A55"/>
+          </a:solidFill>
+          <a:ln>
+            <a:noFill/>
+          </a:ln>
+          <a:effectLst/>
+        </p:spPr>
+        <p:style>
+          <a:lnRef idx="1">
+            <a:schemeClr val="accent1"/>
+          </a:lnRef>
+          <a:fillRef idx="3">
+            <a:schemeClr val="accent1"/>
+          </a:fillRef>
+          <a:effectRef idx="2">
+            <a:schemeClr val="accent1"/>
+          </a:effectRef>
+          <a:fontRef idx="minor">
+            <a:schemeClr val="lt1"/>
+          </a:fontRef>
+        </p:style>
+        <p:txBody>
+          <a:bodyPr rtlCol="0" anchor="ctr"/>
+          <a:lstStyle/>
+          <a:p/>
+        </p:txBody>
+      </p:sp>
+      <p:sp>
+        <p:nvSpPr>
+          <p:cNvPr id="5" name="Rectangle 4"/>
+          <p:cNvSpPr/>
+          <p:nvPr/>
+        </p:nvSpPr>
+        <p:spPr>
+          <a:xfrm>
+            <a:off x="3506175" y="4026713"/>
+            <a:ext cx="5184943" cy="267974"/>
+          </a:xfrm>
+          <a:prstGeom prst="rect">
+            <a:avLst/>
+          </a:prstGeom>
+          <a:solidFill>
+            <a:srgbClr val="6B2A55"/>
+          </a:solidFill>
+          <a:ln>
+            <a:noFill/>
+          </a:ln>
+          <a:effectLst/>
+        </p:spPr>
+        <p:style>
+          <a:lnRef idx="1">
+            <a:schemeClr val="accent1"/>
+          </a:lnRef>
+          <a:fillRef idx="3">
+            <a:schemeClr val="accent1"/>
+          </a:fillRef>
+          <a:effectRef idx="2">
+            <a:schemeClr val="accent1"/>
+          </a:effectRef>
+          <a:fontRef idx="minor">
+            <a:schemeClr val="lt1"/>
+          </a:fontRef>
+        </p:style>
+        <p:txBody>
+          <a:bodyPr rtlCol="0" anchor="ctr"/>
+          <a:lstStyle/>
+          <a:p/>
+        </p:txBody>
+      </p:sp>
+      <p:sp>
+        <p:nvSpPr>
+          <p:cNvPr id="6" name="Rectangle 5"/>
+          <p:cNvSpPr/>
+          <p:nvPr/>
+        </p:nvSpPr>
+        <p:spPr>
+          <a:xfrm>
+            <a:off x="3506175" y="4609265"/>
+            <a:ext cx="6008650" cy="267974"/>
+          </a:xfrm>
+          <a:prstGeom prst="rect">
+            <a:avLst/>
+          </a:prstGeom>
+          <a:solidFill>
+            <a:srgbClr val="6B2A55"/>
+          </a:solidFill>
+          <a:ln>
+            <a:noFill/>
+          </a:ln>
+          <a:effectLst/>
+        </p:spPr>
+        <p:style>
+          <a:lnRef idx="1">
+            <a:schemeClr val="accent1"/>
+          </a:lnRef>
+          <a:fillRef idx="3">
+            <a:schemeClr val="accent1"/>
+          </a:fillRef>
+          <a:effectRef idx="2">
+            <a:schemeClr val="accent1"/>
+          </a:effectRef>
+          <a:fontRef idx="minor">
+            <a:schemeClr val="lt1"/>
+          </a:fontRef>
+        </p:style>
+        <p:txBody>
+          <a:bodyPr rtlCol="0" anchor="ctr"/>
+          <a:lstStyle/>
+          <a:p/>
+        </p:txBody>
+      </p:sp>
+      <p:sp>
+        <p:nvSpPr>
+          <p:cNvPr id="7" name="Rectangle 6"/>
+          <p:cNvSpPr/>
+          <p:nvPr/>
+        </p:nvSpPr>
+        <p:spPr>
+          <a:xfrm>
+            <a:off x="3506175" y="5191817"/>
+            <a:ext cx="6611722" cy="267974"/>
+          </a:xfrm>
+          <a:prstGeom prst="rect">
+            <a:avLst/>
+          </a:prstGeom>
+          <a:solidFill>
+            <a:srgbClr val="6B2A55"/>
+          </a:solidFill>
+          <a:ln>
+            <a:noFill/>
+          </a:ln>
+          <a:effectLst/>
+        </p:spPr>
+        <p:style>
+          <a:lnRef idx="1">
+            <a:schemeClr val="accent1"/>
+          </a:lnRef>
+          <a:fillRef idx="3">
+            <a:schemeClr val="accent1"/>
+          </a:fillRef>
+          <a:effectRef idx="2">
+            <a:schemeClr val="accent1"/>
+          </a:effectRef>
+          <a:fontRef idx="minor">
+            <a:schemeClr val="lt1"/>
+          </a:fontRef>
+        </p:style>
+        <p:txBody>
+          <a:bodyPr rtlCol="0" anchor="ctr"/>
+          <a:lstStyle/>
+          <a:p/>
+        </p:txBody>
+      </p:sp>
+      <p:sp>
+        <p:nvSpPr>
+          <p:cNvPr id="8" name="Rectangle 7"/>
+          <p:cNvSpPr/>
+          <p:nvPr/>
+        </p:nvSpPr>
+        <p:spPr>
+          <a:xfrm>
+            <a:off x="3506175" y="5774369"/>
+            <a:ext cx="6545531" cy="267974"/>
+          </a:xfrm>
+          <a:prstGeom prst="rect">
+            <a:avLst/>
+          </a:prstGeom>
+          <a:solidFill>
+            <a:srgbClr val="6B2A55"/>
+          </a:solidFill>
+          <a:ln>
+            <a:noFill/>
+          </a:ln>
+          <a:effectLst/>
+        </p:spPr>
+        <p:style>
+          <a:lnRef idx="1">
+            <a:schemeClr val="accent1"/>
+          </a:lnRef>
+          <a:fillRef idx="3">
+            <a:schemeClr val="accent1"/>
+          </a:fillRef>
+          <a:effectRef idx="2">
+            <a:schemeClr val="accent1"/>
+          </a:effectRef>
+          <a:fontRef idx="minor">
+            <a:schemeClr val="lt1"/>
+          </a:fontRef>
+        </p:style>
+        <p:txBody>
+          <a:bodyPr rtlCol="0" anchor="ctr"/>
+          <a:lstStyle/>
+          <a:p/>
+        </p:txBody>
+      </p:sp>
+      <p:sp>
+        <p:nvSpPr>
+          <p:cNvPr id="9" name="Rectangle 8"/>
+          <p:cNvSpPr/>
+          <p:nvPr/>
+        </p:nvSpPr>
+        <p:spPr>
+          <a:xfrm>
+            <a:off x="3495203" y="3286872"/>
+            <a:ext cx="10973" cy="2912760"/>
+          </a:xfrm>
+          <a:prstGeom prst="rect">
+            <a:avLst/>
+          </a:prstGeom>
+          <a:solidFill>
+            <a:srgbClr val="4A6079"/>
+          </a:solidFill>
+          <a:ln>
+            <a:noFill/>
+          </a:ln>
+          <a:effectLst/>
+        </p:spPr>
+        <p:style>
+          <a:lnRef idx="1">
+            <a:schemeClr val="accent1"/>
+          </a:lnRef>
+          <a:fillRef idx="3">
+            <a:schemeClr val="accent1"/>
+          </a:fillRef>
+          <a:effectRef idx="2">
+            <a:schemeClr val="accent1"/>
+          </a:effectRef>
+          <a:fontRef idx="minor">
+            <a:schemeClr val="lt1"/>
+          </a:fontRef>
+        </p:style>
+        <p:txBody>
+          <a:bodyPr rtlCol="0" anchor="ctr"/>
+          <a:lstStyle/>
+          <a:p/>
+        </p:txBody>
+      </p:sp>
+      <p:sp>
+        <p:nvSpPr>
+          <p:cNvPr id="10" name="TextBox 9"/>
           <p:cNvSpPr txBox="1"/>
           <p:nvPr/>
         </p:nvSpPr>
@@ -10071,21 +6962,21 @@
                 <a:cs typeface="Montserrat Bold"/>
                 <a:sym typeface="Montserrat Bold"/>
               </a:rPr>
-              <a:t>06/15</a:t>
-            </a:r>
-          </a:p>
-        </p:txBody>
-      </p:sp>
-      <p:sp>
-        <p:nvSpPr>
-          <p:cNvPr id="6" name="TextBox 5"/>
+              <a:t>06/10</a:t>
+            </a:r>
+          </a:p>
+        </p:txBody>
+      </p:sp>
+      <p:sp>
+        <p:nvSpPr>
+          <p:cNvPr id="11" name="TextBox 10"/>
           <p:cNvSpPr txBox="1"/>
           <p:nvPr/>
         </p:nvSpPr>
         <p:spPr>
           <a:xfrm>
-            <a:off x="658368" y="822960"/>
-            <a:ext cx="4785116" cy="1864117"/>
+            <a:off x="658368" y="658368"/>
+            <a:ext cx="7177674" cy="1525187"/>
           </a:xfrm>
           <a:prstGeom prst="rect">
             <a:avLst/>
@@ -10104,7 +6995,7 @@
               </a:lnSpc>
             </a:pPr>
             <a:r>
-              <a:rPr sz="5800" b="0">
+              <a:rPr sz="4755" b="0">
                 <a:solidFill>
                   <a:srgbClr val="10304F"/>
                 </a:solidFill>
@@ -10112,21 +7003,21 @@
                 <a:cs typeface="Space Grotesk Bold"/>
                 <a:sym typeface="Space Grotesk Bold"/>
               </a:rPr>
-              <a:t>Architecture</a:t>
-            </a:r>
-          </a:p>
-        </p:txBody>
-      </p:sp>
-      <p:sp>
-        <p:nvSpPr>
-          <p:cNvPr id="7" name="TextBox 6"/>
+              <a:t>Gas leads UK inflation</a:t>
+            </a:r>
+          </a:p>
+        </p:txBody>
+      </p:sp>
+      <p:sp>
+        <p:nvSpPr>
+          <p:cNvPr id="12" name="TextBox 11"/>
           <p:cNvSpPr txBox="1"/>
           <p:nvPr/>
         </p:nvSpPr>
         <p:spPr>
           <a:xfrm>
-            <a:off x="658368" y="2549591"/>
-            <a:ext cx="4785116" cy="1325267"/>
+            <a:off x="658368" y="2087691"/>
+            <a:ext cx="6090148" cy="950100"/>
           </a:xfrm>
           <a:prstGeom prst="rect">
             <a:avLst/>
@@ -10141,11 +7032,11 @@
           <a:p>
             <a:pPr algn="l">
               <a:lnSpc>
-                <a:spcPct val="106471"/>
+                <a:spcPct val="101774"/>
               </a:lnSpc>
             </a:pPr>
             <a:r>
-              <a:rPr sz="1700" b="0">
+              <a:rPr sz="1722" b="0">
                 <a:solidFill>
                   <a:srgbClr val="4A6079"/>
                 </a:solidFill>
@@ -10153,7 +7044,417 @@
                 <a:cs typeface="Space Grotesk"/>
                 <a:sym typeface="Space Grotesk"/>
               </a:rPr>
-              <a:t>Meterless decides and remembers. Zetaris federates the data. The same portable SQL runs on a DuckDB fallback.</a:t>
+              <a:t>One Lightning JOIN of ONS CPI and FRED European gas prices. Correlation by lead time, 2015-2022, 96 months.</a:t>
+            </a:r>
+          </a:p>
+        </p:txBody>
+      </p:sp>
+      <p:sp>
+        <p:nvSpPr>
+          <p:cNvPr id="13" name="TextBox 12"/>
+          <p:cNvSpPr txBox="1"/>
+          <p:nvPr/>
+        </p:nvSpPr>
+        <p:spPr>
+          <a:xfrm>
+            <a:off x="658368" y="3433659"/>
+            <a:ext cx="2610063" cy="329434"/>
+          </a:xfrm>
+          <a:prstGeom prst="rect">
+            <a:avLst/>
+          </a:prstGeom>
+          <a:noFill/>
+        </p:spPr>
+        <p:txBody>
+          <a:bodyPr wrap="square" anchor="t" lIns="0" rIns="0" tIns="0" bIns="0">
+            <a:normAutofit/>
+          </a:bodyPr>
+          <a:lstStyle/>
+          <a:p>
+            <a:pPr algn="l">
+              <a:lnSpc>
+                <a:spcPct val="91750"/>
+              </a:lnSpc>
+            </a:pPr>
+            <a:r>
+              <a:rPr sz="2000" b="0">
+                <a:solidFill>
+                  <a:srgbClr val="10304F"/>
+                </a:solidFill>
+                <a:latin typeface="Montserrat Bold"/>
+                <a:cs typeface="Montserrat Bold"/>
+                <a:sym typeface="Montserrat Bold"/>
+              </a:rPr>
+              <a:t>Same month</a:t>
+            </a:r>
+          </a:p>
+        </p:txBody>
+      </p:sp>
+      <p:sp>
+        <p:nvSpPr>
+          <p:cNvPr id="14" name="TextBox 13"/>
+          <p:cNvSpPr txBox="1"/>
+          <p:nvPr/>
+        </p:nvSpPr>
+        <p:spPr>
+          <a:xfrm>
+            <a:off x="10337353" y="3433659"/>
+            <a:ext cx="1196279" cy="329434"/>
+          </a:xfrm>
+          <a:prstGeom prst="rect">
+            <a:avLst/>
+          </a:prstGeom>
+          <a:noFill/>
+        </p:spPr>
+        <p:txBody>
+          <a:bodyPr wrap="square" anchor="t" lIns="0" rIns="0" tIns="0" bIns="0">
+            <a:normAutofit/>
+          </a:bodyPr>
+          <a:lstStyle/>
+          <a:p>
+            <a:pPr algn="r">
+              <a:lnSpc>
+                <a:spcPct val="91750"/>
+              </a:lnSpc>
+            </a:pPr>
+            <a:r>
+              <a:rPr sz="2000" b="0">
+                <a:solidFill>
+                  <a:srgbClr val="10304F"/>
+                </a:solidFill>
+                <a:latin typeface="Montserrat Bold"/>
+                <a:cs typeface="Montserrat Bold"/>
+                <a:sym typeface="Montserrat Bold"/>
+              </a:rPr>
+              <a:t>r 0.45</a:t>
+            </a:r>
+          </a:p>
+        </p:txBody>
+      </p:sp>
+      <p:sp>
+        <p:nvSpPr>
+          <p:cNvPr id="15" name="TextBox 14"/>
+          <p:cNvSpPr txBox="1"/>
+          <p:nvPr/>
+        </p:nvSpPr>
+        <p:spPr>
+          <a:xfrm>
+            <a:off x="658368" y="4016211"/>
+            <a:ext cx="2610063" cy="329434"/>
+          </a:xfrm>
+          <a:prstGeom prst="rect">
+            <a:avLst/>
+          </a:prstGeom>
+          <a:noFill/>
+        </p:spPr>
+        <p:txBody>
+          <a:bodyPr wrap="square" anchor="t" lIns="0" rIns="0" tIns="0" bIns="0">
+            <a:normAutofit/>
+          </a:bodyPr>
+          <a:lstStyle/>
+          <a:p>
+            <a:pPr algn="l">
+              <a:lnSpc>
+                <a:spcPct val="91750"/>
+              </a:lnSpc>
+            </a:pPr>
+            <a:r>
+              <a:rPr sz="2000" b="0">
+                <a:solidFill>
+                  <a:srgbClr val="10304F"/>
+                </a:solidFill>
+                <a:latin typeface="Montserrat Bold"/>
+                <a:cs typeface="Montserrat Bold"/>
+                <a:sym typeface="Montserrat Bold"/>
+              </a:rPr>
+              <a:t>3 months earlier</a:t>
+            </a:r>
+          </a:p>
+        </p:txBody>
+      </p:sp>
+      <p:sp>
+        <p:nvSpPr>
+          <p:cNvPr id="16" name="TextBox 15"/>
+          <p:cNvSpPr txBox="1"/>
+          <p:nvPr/>
+        </p:nvSpPr>
+        <p:spPr>
+          <a:xfrm>
+            <a:off x="10337353" y="4016211"/>
+            <a:ext cx="1196279" cy="329434"/>
+          </a:xfrm>
+          <a:prstGeom prst="rect">
+            <a:avLst/>
+          </a:prstGeom>
+          <a:noFill/>
+        </p:spPr>
+        <p:txBody>
+          <a:bodyPr wrap="square" anchor="t" lIns="0" rIns="0" tIns="0" bIns="0">
+            <a:normAutofit/>
+          </a:bodyPr>
+          <a:lstStyle/>
+          <a:p>
+            <a:pPr algn="r">
+              <a:lnSpc>
+                <a:spcPct val="91750"/>
+              </a:lnSpc>
+            </a:pPr>
+            <a:r>
+              <a:rPr sz="2000" b="0">
+                <a:solidFill>
+                  <a:srgbClr val="10304F"/>
+                </a:solidFill>
+                <a:latin typeface="Montserrat Bold"/>
+                <a:cs typeface="Montserrat Bold"/>
+                <a:sym typeface="Montserrat Bold"/>
+              </a:rPr>
+              <a:t>r 0.71</a:t>
+            </a:r>
+          </a:p>
+        </p:txBody>
+      </p:sp>
+      <p:sp>
+        <p:nvSpPr>
+          <p:cNvPr id="17" name="TextBox 16"/>
+          <p:cNvSpPr txBox="1"/>
+          <p:nvPr/>
+        </p:nvSpPr>
+        <p:spPr>
+          <a:xfrm>
+            <a:off x="658368" y="4598763"/>
+            <a:ext cx="2610063" cy="329434"/>
+          </a:xfrm>
+          <a:prstGeom prst="rect">
+            <a:avLst/>
+          </a:prstGeom>
+          <a:noFill/>
+        </p:spPr>
+        <p:txBody>
+          <a:bodyPr wrap="square" anchor="t" lIns="0" rIns="0" tIns="0" bIns="0">
+            <a:normAutofit/>
+          </a:bodyPr>
+          <a:lstStyle/>
+          <a:p>
+            <a:pPr algn="l">
+              <a:lnSpc>
+                <a:spcPct val="91750"/>
+              </a:lnSpc>
+            </a:pPr>
+            <a:r>
+              <a:rPr sz="2000" b="0">
+                <a:solidFill>
+                  <a:srgbClr val="10304F"/>
+                </a:solidFill>
+                <a:latin typeface="Montserrat Bold"/>
+                <a:cs typeface="Montserrat Bold"/>
+                <a:sym typeface="Montserrat Bold"/>
+              </a:rPr>
+              <a:t>6 months earlier</a:t>
+            </a:r>
+          </a:p>
+        </p:txBody>
+      </p:sp>
+      <p:sp>
+        <p:nvSpPr>
+          <p:cNvPr id="18" name="TextBox 17"/>
+          <p:cNvSpPr txBox="1"/>
+          <p:nvPr/>
+        </p:nvSpPr>
+        <p:spPr>
+          <a:xfrm>
+            <a:off x="10337353" y="4598763"/>
+            <a:ext cx="1196279" cy="329434"/>
+          </a:xfrm>
+          <a:prstGeom prst="rect">
+            <a:avLst/>
+          </a:prstGeom>
+          <a:noFill/>
+        </p:spPr>
+        <p:txBody>
+          <a:bodyPr wrap="square" anchor="t" lIns="0" rIns="0" tIns="0" bIns="0">
+            <a:normAutofit/>
+          </a:bodyPr>
+          <a:lstStyle/>
+          <a:p>
+            <a:pPr algn="r">
+              <a:lnSpc>
+                <a:spcPct val="91750"/>
+              </a:lnSpc>
+            </a:pPr>
+            <a:r>
+              <a:rPr sz="2000" b="0">
+                <a:solidFill>
+                  <a:srgbClr val="10304F"/>
+                </a:solidFill>
+                <a:latin typeface="Montserrat Bold"/>
+                <a:cs typeface="Montserrat Bold"/>
+                <a:sym typeface="Montserrat Bold"/>
+              </a:rPr>
+              <a:t>r 0.82</a:t>
+            </a:r>
+          </a:p>
+        </p:txBody>
+      </p:sp>
+      <p:sp>
+        <p:nvSpPr>
+          <p:cNvPr id="19" name="TextBox 18"/>
+          <p:cNvSpPr txBox="1"/>
+          <p:nvPr/>
+        </p:nvSpPr>
+        <p:spPr>
+          <a:xfrm>
+            <a:off x="658368" y="5181315"/>
+            <a:ext cx="2610063" cy="329434"/>
+          </a:xfrm>
+          <a:prstGeom prst="rect">
+            <a:avLst/>
+          </a:prstGeom>
+          <a:noFill/>
+        </p:spPr>
+        <p:txBody>
+          <a:bodyPr wrap="square" anchor="t" lIns="0" rIns="0" tIns="0" bIns="0">
+            <a:normAutofit/>
+          </a:bodyPr>
+          <a:lstStyle/>
+          <a:p>
+            <a:pPr algn="l">
+              <a:lnSpc>
+                <a:spcPct val="91750"/>
+              </a:lnSpc>
+            </a:pPr>
+            <a:r>
+              <a:rPr sz="2000" b="0">
+                <a:solidFill>
+                  <a:srgbClr val="10304F"/>
+                </a:solidFill>
+                <a:latin typeface="Montserrat Bold"/>
+                <a:cs typeface="Montserrat Bold"/>
+                <a:sym typeface="Montserrat Bold"/>
+              </a:rPr>
+              <a:t>9 months earlier</a:t>
+            </a:r>
+          </a:p>
+        </p:txBody>
+      </p:sp>
+      <p:sp>
+        <p:nvSpPr>
+          <p:cNvPr id="20" name="TextBox 19"/>
+          <p:cNvSpPr txBox="1"/>
+          <p:nvPr/>
+        </p:nvSpPr>
+        <p:spPr>
+          <a:xfrm>
+            <a:off x="10337353" y="5181315"/>
+            <a:ext cx="1196279" cy="329434"/>
+          </a:xfrm>
+          <a:prstGeom prst="rect">
+            <a:avLst/>
+          </a:prstGeom>
+          <a:noFill/>
+        </p:spPr>
+        <p:txBody>
+          <a:bodyPr wrap="square" anchor="t" lIns="0" rIns="0" tIns="0" bIns="0">
+            <a:normAutofit/>
+          </a:bodyPr>
+          <a:lstStyle/>
+          <a:p>
+            <a:pPr algn="r">
+              <a:lnSpc>
+                <a:spcPct val="91750"/>
+              </a:lnSpc>
+            </a:pPr>
+            <a:r>
+              <a:rPr sz="2000" b="0">
+                <a:solidFill>
+                  <a:srgbClr val="10304F"/>
+                </a:solidFill>
+                <a:latin typeface="Montserrat Bold"/>
+                <a:cs typeface="Montserrat Bold"/>
+                <a:sym typeface="Montserrat Bold"/>
+              </a:rPr>
+              <a:t>r 0.90</a:t>
+            </a:r>
+          </a:p>
+        </p:txBody>
+      </p:sp>
+      <p:sp>
+        <p:nvSpPr>
+          <p:cNvPr id="21" name="TextBox 20"/>
+          <p:cNvSpPr txBox="1"/>
+          <p:nvPr/>
+        </p:nvSpPr>
+        <p:spPr>
+          <a:xfrm>
+            <a:off x="658368" y="5763867"/>
+            <a:ext cx="2610063" cy="329434"/>
+          </a:xfrm>
+          <a:prstGeom prst="rect">
+            <a:avLst/>
+          </a:prstGeom>
+          <a:noFill/>
+        </p:spPr>
+        <p:txBody>
+          <a:bodyPr wrap="square" anchor="t" lIns="0" rIns="0" tIns="0" bIns="0">
+            <a:normAutofit/>
+          </a:bodyPr>
+          <a:lstStyle/>
+          <a:p>
+            <a:pPr algn="l">
+              <a:lnSpc>
+                <a:spcPct val="91750"/>
+              </a:lnSpc>
+            </a:pPr>
+            <a:r>
+              <a:rPr sz="2000" b="0">
+                <a:solidFill>
+                  <a:srgbClr val="10304F"/>
+                </a:solidFill>
+                <a:latin typeface="Montserrat Bold"/>
+                <a:cs typeface="Montserrat Bold"/>
+                <a:sym typeface="Montserrat Bold"/>
+              </a:rPr>
+              <a:t>12 months earlier</a:t>
+            </a:r>
+          </a:p>
+        </p:txBody>
+      </p:sp>
+      <p:sp>
+        <p:nvSpPr>
+          <p:cNvPr id="22" name="TextBox 21"/>
+          <p:cNvSpPr txBox="1"/>
+          <p:nvPr/>
+        </p:nvSpPr>
+        <p:spPr>
+          <a:xfrm>
+            <a:off x="10337353" y="5763867"/>
+            <a:ext cx="1196279" cy="329434"/>
+          </a:xfrm>
+          <a:prstGeom prst="rect">
+            <a:avLst/>
+          </a:prstGeom>
+          <a:noFill/>
+        </p:spPr>
+        <p:txBody>
+          <a:bodyPr wrap="square" anchor="t" lIns="0" rIns="0" tIns="0" bIns="0">
+            <a:normAutofit/>
+          </a:bodyPr>
+          <a:lstStyle/>
+          <a:p>
+            <a:pPr algn="r">
+              <a:lnSpc>
+                <a:spcPct val="91750"/>
+              </a:lnSpc>
+            </a:pPr>
+            <a:r>
+              <a:rPr sz="2000" b="0">
+                <a:solidFill>
+                  <a:srgbClr val="10304F"/>
+                </a:solidFill>
+                <a:latin typeface="Montserrat Bold"/>
+                <a:cs typeface="Montserrat Bold"/>
+                <a:sym typeface="Montserrat Bold"/>
+              </a:rPr>
+              <a:t>r 0.89</a:t>
             </a:r>
           </a:p>
         </p:txBody>
@@ -10270,7 +7571,175 @@
       </p:sp>
       <p:sp>
         <p:nvSpPr>
-          <p:cNvPr id="4" name="TextBox 3"/>
+          <p:cNvPr id="4" name="Rectangle 3"/>
+          <p:cNvSpPr/>
+          <p:nvPr/>
+        </p:nvSpPr>
+        <p:spPr>
+          <a:xfrm>
+            <a:off x="658368" y="2456473"/>
+            <a:ext cx="782239" cy="25603"/>
+          </a:xfrm>
+          <a:prstGeom prst="rect">
+            <a:avLst/>
+          </a:prstGeom>
+          <a:solidFill>
+            <a:srgbClr val="6B2A55"/>
+          </a:solidFill>
+          <a:ln>
+            <a:noFill/>
+          </a:ln>
+          <a:effectLst/>
+        </p:spPr>
+        <p:style>
+          <a:lnRef idx="1">
+            <a:schemeClr val="accent1"/>
+          </a:lnRef>
+          <a:fillRef idx="3">
+            <a:schemeClr val="accent1"/>
+          </a:fillRef>
+          <a:effectRef idx="2">
+            <a:schemeClr val="accent1"/>
+          </a:effectRef>
+          <a:fontRef idx="minor">
+            <a:schemeClr val="lt1"/>
+          </a:fontRef>
+        </p:style>
+        <p:txBody>
+          <a:bodyPr rtlCol="0" anchor="ctr"/>
+          <a:lstStyle/>
+          <a:p/>
+        </p:txBody>
+      </p:sp>
+      <p:sp>
+        <p:nvSpPr>
+          <p:cNvPr id="5" name="Rectangle 4"/>
+          <p:cNvSpPr/>
+          <p:nvPr/>
+        </p:nvSpPr>
+        <p:spPr>
+          <a:xfrm>
+            <a:off x="3468624" y="2456473"/>
+            <a:ext cx="782239" cy="25603"/>
+          </a:xfrm>
+          <a:prstGeom prst="rect">
+            <a:avLst/>
+          </a:prstGeom>
+          <a:solidFill>
+            <a:srgbClr val="6B2A55"/>
+          </a:solidFill>
+          <a:ln>
+            <a:noFill/>
+          </a:ln>
+          <a:effectLst/>
+        </p:spPr>
+        <p:style>
+          <a:lnRef idx="1">
+            <a:schemeClr val="accent1"/>
+          </a:lnRef>
+          <a:fillRef idx="3">
+            <a:schemeClr val="accent1"/>
+          </a:fillRef>
+          <a:effectRef idx="2">
+            <a:schemeClr val="accent1"/>
+          </a:effectRef>
+          <a:fontRef idx="minor">
+            <a:schemeClr val="lt1"/>
+          </a:fontRef>
+        </p:style>
+        <p:txBody>
+          <a:bodyPr rtlCol="0" anchor="ctr"/>
+          <a:lstStyle/>
+          <a:p/>
+        </p:txBody>
+      </p:sp>
+      <p:sp>
+        <p:nvSpPr>
+          <p:cNvPr id="6" name="Rectangle 5"/>
+          <p:cNvSpPr/>
+          <p:nvPr/>
+        </p:nvSpPr>
+        <p:spPr>
+          <a:xfrm>
+            <a:off x="6278880" y="2456473"/>
+            <a:ext cx="782239" cy="25603"/>
+          </a:xfrm>
+          <a:prstGeom prst="rect">
+            <a:avLst/>
+          </a:prstGeom>
+          <a:solidFill>
+            <a:srgbClr val="6B2A55"/>
+          </a:solidFill>
+          <a:ln>
+            <a:noFill/>
+          </a:ln>
+          <a:effectLst/>
+        </p:spPr>
+        <p:style>
+          <a:lnRef idx="1">
+            <a:schemeClr val="accent1"/>
+          </a:lnRef>
+          <a:fillRef idx="3">
+            <a:schemeClr val="accent1"/>
+          </a:fillRef>
+          <a:effectRef idx="2">
+            <a:schemeClr val="accent1"/>
+          </a:effectRef>
+          <a:fontRef idx="minor">
+            <a:schemeClr val="lt1"/>
+          </a:fontRef>
+        </p:style>
+        <p:txBody>
+          <a:bodyPr rtlCol="0" anchor="ctr"/>
+          <a:lstStyle/>
+          <a:p/>
+        </p:txBody>
+      </p:sp>
+      <p:sp>
+        <p:nvSpPr>
+          <p:cNvPr id="7" name="Rectangle 6"/>
+          <p:cNvSpPr/>
+          <p:nvPr/>
+        </p:nvSpPr>
+        <p:spPr>
+          <a:xfrm>
+            <a:off x="9089136" y="2456473"/>
+            <a:ext cx="782239" cy="25603"/>
+          </a:xfrm>
+          <a:prstGeom prst="rect">
+            <a:avLst/>
+          </a:prstGeom>
+          <a:solidFill>
+            <a:srgbClr val="6B2A55"/>
+          </a:solidFill>
+          <a:ln>
+            <a:noFill/>
+          </a:ln>
+          <a:effectLst/>
+        </p:spPr>
+        <p:style>
+          <a:lnRef idx="1">
+            <a:schemeClr val="accent1"/>
+          </a:lnRef>
+          <a:fillRef idx="3">
+            <a:schemeClr val="accent1"/>
+          </a:fillRef>
+          <a:effectRef idx="2">
+            <a:schemeClr val="accent1"/>
+          </a:effectRef>
+          <a:fontRef idx="minor">
+            <a:schemeClr val="lt1"/>
+          </a:fontRef>
+        </p:style>
+        <p:txBody>
+          <a:bodyPr rtlCol="0" anchor="ctr"/>
+          <a:lstStyle/>
+          <a:p/>
+        </p:txBody>
+      </p:sp>
+      <p:sp>
+        <p:nvSpPr>
+          <p:cNvPr id="8" name="TextBox 7"/>
           <p:cNvSpPr txBox="1"/>
           <p:nvPr/>
         </p:nvSpPr>
@@ -10304,21 +7773,21 @@
                 <a:cs typeface="Montserrat Bold"/>
                 <a:sym typeface="Montserrat Bold"/>
               </a:rPr>
-              <a:t>07/15</a:t>
-            </a:r>
-          </a:p>
-        </p:txBody>
-      </p:sp>
-      <p:sp>
-        <p:nvSpPr>
-          <p:cNvPr id="5" name="TextBox 4"/>
+              <a:t>07/10</a:t>
+            </a:r>
+          </a:p>
+        </p:txBody>
+      </p:sp>
+      <p:sp>
+        <p:nvSpPr>
+          <p:cNvPr id="9" name="TextBox 8"/>
           <p:cNvSpPr txBox="1"/>
           <p:nvPr/>
         </p:nvSpPr>
         <p:spPr>
           <a:xfrm>
-            <a:off x="658368" y="2057237"/>
-            <a:ext cx="8700211" cy="1243803"/>
+            <a:off x="658368" y="1248495"/>
+            <a:ext cx="7830190" cy="960128"/>
           </a:xfrm>
           <a:prstGeom prst="rect">
             <a:avLst/>
@@ -10337,29 +7806,29 @@
               </a:lnSpc>
             </a:pPr>
             <a:r>
-              <a:rPr sz="7600" b="0">
-                <a:solidFill>
-                  <a:srgbClr val="6B2A55"/>
+              <a:rPr sz="5800" b="0">
+                <a:solidFill>
+                  <a:srgbClr val="10304F"/>
                 </a:solidFill>
                 <a:latin typeface="Space Grotesk Bold"/>
                 <a:cs typeface="Space Grotesk Bold"/>
                 <a:sym typeface="Space Grotesk Bold"/>
               </a:rPr>
-              <a:t>01</a:t>
-            </a:r>
-          </a:p>
-        </p:txBody>
-      </p:sp>
-      <p:sp>
-        <p:nvSpPr>
-          <p:cNvPr id="6" name="TextBox 5"/>
+              <a:t>Evaluation</a:t>
+            </a:r>
+          </a:p>
+        </p:txBody>
+      </p:sp>
+      <p:sp>
+        <p:nvSpPr>
+          <p:cNvPr id="10" name="TextBox 9"/>
           <p:cNvSpPr txBox="1"/>
           <p:nvPr/>
         </p:nvSpPr>
         <p:spPr>
           <a:xfrm>
-            <a:off x="658368" y="3258020"/>
-            <a:ext cx="8700211" cy="916486"/>
+            <a:off x="658368" y="2675929"/>
+            <a:ext cx="2444496" cy="2287780"/>
           </a:xfrm>
           <a:prstGeom prst="rect">
             <a:avLst/>
@@ -10378,29 +7847,29 @@
               </a:lnSpc>
             </a:pPr>
             <a:r>
-              <a:rPr sz="5576" b="0">
-                <a:solidFill>
-                  <a:srgbClr val="10304F"/>
+              <a:rPr sz="7200" b="0">
+                <a:solidFill>
+                  <a:srgbClr val="6B2A55"/>
                 </a:solidFill>
                 <a:latin typeface="Space Grotesk Bold"/>
                 <a:cs typeface="Space Grotesk Bold"/>
                 <a:sym typeface="Space Grotesk Bold"/>
               </a:rPr>
-              <a:t>Sponsor technology</a:t>
-            </a:r>
-          </a:p>
-        </p:txBody>
-      </p:sp>
-      <p:sp>
-        <p:nvSpPr>
-          <p:cNvPr id="7" name="TextBox 6"/>
+              <a:t>19/19</a:t>
+            </a:r>
+          </a:p>
+        </p:txBody>
+      </p:sp>
+      <p:sp>
+        <p:nvSpPr>
+          <p:cNvPr id="11" name="TextBox 10"/>
           <p:cNvSpPr txBox="1"/>
           <p:nvPr/>
         </p:nvSpPr>
         <p:spPr>
           <a:xfrm>
-            <a:off x="658368" y="4317987"/>
-            <a:ext cx="5981395" cy="803046"/>
+            <a:off x="658368" y="4737618"/>
+            <a:ext cx="2444496" cy="682589"/>
           </a:xfrm>
           <a:prstGeom prst="rect">
             <a:avLst/>
@@ -10415,19 +7884,265 @@
           <a:p>
             <a:pPr algn="l">
               <a:lnSpc>
-                <a:spcPct val="101774"/>
+                <a:spcPct val="106471"/>
               </a:lnSpc>
             </a:pPr>
             <a:r>
-              <a:rPr sz="2100" b="0">
-                <a:solidFill>
-                  <a:srgbClr val="10304F"/>
+              <a:rPr sz="1700" b="0">
+                <a:solidFill>
+                  <a:srgbClr val="4A6079"/>
                 </a:solidFill>
                 <a:latin typeface="Space Grotesk"/>
                 <a:cs typeface="Space Grotesk"/>
                 <a:sym typeface="Space Grotesk"/>
               </a:rPr>
-              <a:t>Zetaris federates. Meterless decides and remembers.</a:t>
+              <a:t>Direction right, traps caught 2/2</a:t>
+            </a:r>
+          </a:p>
+        </p:txBody>
+      </p:sp>
+      <p:sp>
+        <p:nvSpPr>
+          <p:cNvPr id="12" name="TextBox 11"/>
+          <p:cNvSpPr txBox="1"/>
+          <p:nvPr/>
+        </p:nvSpPr>
+        <p:spPr>
+          <a:xfrm>
+            <a:off x="3468624" y="2675929"/>
+            <a:ext cx="2444496" cy="2287780"/>
+          </a:xfrm>
+          <a:prstGeom prst="rect">
+            <a:avLst/>
+          </a:prstGeom>
+          <a:noFill/>
+        </p:spPr>
+        <p:txBody>
+          <a:bodyPr wrap="square" anchor="t" lIns="0" rIns="0" tIns="0" bIns="0">
+            <a:normAutofit/>
+          </a:bodyPr>
+          <a:lstStyle/>
+          <a:p>
+            <a:pPr algn="l">
+              <a:lnSpc>
+                <a:spcPct val="88496"/>
+              </a:lnSpc>
+            </a:pPr>
+            <a:r>
+              <a:rPr sz="7200" b="0">
+                <a:solidFill>
+                  <a:srgbClr val="6B2A55"/>
+                </a:solidFill>
+                <a:latin typeface="Space Grotesk Bold"/>
+                <a:cs typeface="Space Grotesk Bold"/>
+                <a:sym typeface="Space Grotesk Bold"/>
+              </a:rPr>
+              <a:t>16/19</a:t>
+            </a:r>
+          </a:p>
+        </p:txBody>
+      </p:sp>
+      <p:sp>
+        <p:nvSpPr>
+          <p:cNvPr id="13" name="TextBox 12"/>
+          <p:cNvSpPr txBox="1"/>
+          <p:nvPr/>
+        </p:nvSpPr>
+        <p:spPr>
+          <a:xfrm>
+            <a:off x="3468624" y="4737618"/>
+            <a:ext cx="2444496" cy="682589"/>
+          </a:xfrm>
+          <a:prstGeom prst="rect">
+            <a:avLst/>
+          </a:prstGeom>
+          <a:noFill/>
+        </p:spPr>
+        <p:txBody>
+          <a:bodyPr wrap="square" anchor="t" lIns="0" rIns="0" tIns="0" bIns="0">
+            <a:normAutofit/>
+          </a:bodyPr>
+          <a:lstStyle/>
+          <a:p>
+            <a:pPr algn="l">
+              <a:lnSpc>
+                <a:spcPct val="106471"/>
+              </a:lnSpc>
+            </a:pPr>
+            <a:r>
+              <a:rPr sz="1700" b="0">
+                <a:solidFill>
+                  <a:srgbClr val="4A6079"/>
+                </a:solidFill>
+                <a:latin typeface="Space Grotesk"/>
+                <a:cs typeface="Space Grotesk"/>
+                <a:sym typeface="Space Grotesk"/>
+              </a:rPr>
+              <a:t>Reference driver found</a:t>
+            </a:r>
+          </a:p>
+        </p:txBody>
+      </p:sp>
+      <p:sp>
+        <p:nvSpPr>
+          <p:cNvPr id="14" name="TextBox 13"/>
+          <p:cNvSpPr txBox="1"/>
+          <p:nvPr/>
+        </p:nvSpPr>
+        <p:spPr>
+          <a:xfrm>
+            <a:off x="6278880" y="2675929"/>
+            <a:ext cx="2444496" cy="2287780"/>
+          </a:xfrm>
+          <a:prstGeom prst="rect">
+            <a:avLst/>
+          </a:prstGeom>
+          <a:noFill/>
+        </p:spPr>
+        <p:txBody>
+          <a:bodyPr wrap="square" anchor="t" lIns="0" rIns="0" tIns="0" bIns="0">
+            <a:normAutofit/>
+          </a:bodyPr>
+          <a:lstStyle/>
+          <a:p>
+            <a:pPr algn="l">
+              <a:lnSpc>
+                <a:spcPct val="88496"/>
+              </a:lnSpc>
+            </a:pPr>
+            <a:r>
+              <a:rPr sz="7200" b="0">
+                <a:solidFill>
+                  <a:srgbClr val="6B2A55"/>
+                </a:solidFill>
+                <a:latin typeface="Space Grotesk Bold"/>
+                <a:cs typeface="Space Grotesk Bold"/>
+                <a:sym typeface="Space Grotesk Bold"/>
+              </a:rPr>
+              <a:t>0.71</a:t>
+            </a:r>
+          </a:p>
+        </p:txBody>
+      </p:sp>
+      <p:sp>
+        <p:nvSpPr>
+          <p:cNvPr id="15" name="TextBox 14"/>
+          <p:cNvSpPr txBox="1"/>
+          <p:nvPr/>
+        </p:nvSpPr>
+        <p:spPr>
+          <a:xfrm>
+            <a:off x="6278880" y="4737618"/>
+            <a:ext cx="2444496" cy="993950"/>
+          </a:xfrm>
+          <a:prstGeom prst="rect">
+            <a:avLst/>
+          </a:prstGeom>
+          <a:noFill/>
+        </p:spPr>
+        <p:txBody>
+          <a:bodyPr wrap="square" anchor="t" lIns="0" rIns="0" tIns="0" bIns="0">
+            <a:normAutofit/>
+          </a:bodyPr>
+          <a:lstStyle/>
+          <a:p>
+            <a:pPr algn="l">
+              <a:lnSpc>
+                <a:spcPct val="106471"/>
+              </a:lnSpc>
+            </a:pPr>
+            <a:r>
+              <a:rPr sz="1700" b="0">
+                <a:solidFill>
+                  <a:srgbClr val="4A6079"/>
+                </a:solidFill>
+                <a:latin typeface="Space Grotesk"/>
+                <a:cs typeface="Space Grotesk"/>
+                <a:sym typeface="Space Grotesk"/>
+              </a:rPr>
+              <a:t>Confidence when right (0.52 when wrong)</a:t>
+            </a:r>
+          </a:p>
+        </p:txBody>
+      </p:sp>
+      <p:sp>
+        <p:nvSpPr>
+          <p:cNvPr id="16" name="TextBox 15"/>
+          <p:cNvSpPr txBox="1"/>
+          <p:nvPr/>
+        </p:nvSpPr>
+        <p:spPr>
+          <a:xfrm>
+            <a:off x="9089136" y="2675929"/>
+            <a:ext cx="2444496" cy="2287780"/>
+          </a:xfrm>
+          <a:prstGeom prst="rect">
+            <a:avLst/>
+          </a:prstGeom>
+          <a:noFill/>
+        </p:spPr>
+        <p:txBody>
+          <a:bodyPr wrap="square" anchor="t" lIns="0" rIns="0" tIns="0" bIns="0">
+            <a:normAutofit/>
+          </a:bodyPr>
+          <a:lstStyle/>
+          <a:p>
+            <a:pPr algn="l">
+              <a:lnSpc>
+                <a:spcPct val="88496"/>
+              </a:lnSpc>
+            </a:pPr>
+            <a:r>
+              <a:rPr sz="7200" b="0">
+                <a:solidFill>
+                  <a:srgbClr val="6B2A55"/>
+                </a:solidFill>
+                <a:latin typeface="Space Grotesk Bold"/>
+                <a:cs typeface="Space Grotesk Bold"/>
+                <a:sym typeface="Space Grotesk Bold"/>
+              </a:rPr>
+              <a:t>109</a:t>
+            </a:r>
+          </a:p>
+        </p:txBody>
+      </p:sp>
+      <p:sp>
+        <p:nvSpPr>
+          <p:cNvPr id="17" name="TextBox 16"/>
+          <p:cNvSpPr txBox="1"/>
+          <p:nvPr/>
+        </p:nvSpPr>
+        <p:spPr>
+          <a:xfrm>
+            <a:off x="9089136" y="4737618"/>
+            <a:ext cx="2444496" cy="341295"/>
+          </a:xfrm>
+          <a:prstGeom prst="rect">
+            <a:avLst/>
+          </a:prstGeom>
+          <a:noFill/>
+        </p:spPr>
+        <p:txBody>
+          <a:bodyPr wrap="square" anchor="t" lIns="0" rIns="0" tIns="0" bIns="0">
+            <a:normAutofit/>
+          </a:bodyPr>
+          <a:lstStyle/>
+          <a:p>
+            <a:pPr algn="l">
+              <a:lnSpc>
+                <a:spcPct val="106471"/>
+              </a:lnSpc>
+            </a:pPr>
+            <a:r>
+              <a:rPr sz="1700" b="0">
+                <a:solidFill>
+                  <a:srgbClr val="4A6079"/>
+                </a:solidFill>
+                <a:latin typeface="Space Grotesk"/>
+                <a:cs typeface="Space Grotesk"/>
+                <a:sym typeface="Space Grotesk"/>
+              </a:rPr>
+              <a:t>Offline tests pass</a:t>
             </a:r>
           </a:p>
         </p:txBody>
@@ -10544,158 +8259,7 @@
       </p:sp>
       <p:sp>
         <p:nvSpPr>
-          <p:cNvPr id="4" name="Rectangle 3"/>
-          <p:cNvSpPr/>
-          <p:nvPr/>
-        </p:nvSpPr>
-        <p:spPr>
-          <a:xfrm>
-            <a:off x="4145280" y="3803904"/>
-            <a:ext cx="7168896" cy="9144"/>
-          </a:xfrm>
-          <a:prstGeom prst="rect">
-            <a:avLst/>
-          </a:prstGeom>
-          <a:solidFill>
-            <a:srgbClr val="4A6079"/>
-          </a:solidFill>
-          <a:ln>
-            <a:noFill/>
-          </a:ln>
-          <a:effectLst/>
-        </p:spPr>
-        <p:style>
-          <a:lnRef idx="1">
-            <a:schemeClr val="accent1"/>
-          </a:lnRef>
-          <a:fillRef idx="3">
-            <a:schemeClr val="accent1"/>
-          </a:fillRef>
-          <a:effectRef idx="2">
-            <a:schemeClr val="accent1"/>
-          </a:effectRef>
-          <a:fontRef idx="minor">
-            <a:schemeClr val="lt1"/>
-          </a:fontRef>
-        </p:style>
-        <p:txBody>
-          <a:bodyPr rtlCol="0" anchor="ctr"/>
-          <a:lstStyle/>
-          <a:p/>
-        </p:txBody>
-      </p:sp>
-      <p:sp>
-        <p:nvSpPr>
-          <p:cNvPr id="5" name="Rectangle 4"/>
-          <p:cNvSpPr/>
-          <p:nvPr/>
-        </p:nvSpPr>
-        <p:spPr>
-          <a:xfrm>
-            <a:off x="4145280" y="4602480"/>
-            <a:ext cx="7168896" cy="9144"/>
-          </a:xfrm>
-          <a:prstGeom prst="rect">
-            <a:avLst/>
-          </a:prstGeom>
-          <a:solidFill>
-            <a:srgbClr val="4A6079"/>
-          </a:solidFill>
-          <a:ln>
-            <a:noFill/>
-          </a:ln>
-          <a:effectLst/>
-        </p:spPr>
-        <p:style>
-          <a:lnRef idx="1">
-            <a:schemeClr val="accent1"/>
-          </a:lnRef>
-          <a:fillRef idx="3">
-            <a:schemeClr val="accent1"/>
-          </a:fillRef>
-          <a:effectRef idx="2">
-            <a:schemeClr val="accent1"/>
-          </a:effectRef>
-          <a:fontRef idx="minor">
-            <a:schemeClr val="lt1"/>
-          </a:fontRef>
-        </p:style>
-        <p:txBody>
-          <a:bodyPr rtlCol="0" anchor="ctr"/>
-          <a:lstStyle/>
-          <a:p/>
-        </p:txBody>
-      </p:sp>
-      <p:sp>
-        <p:nvSpPr>
-          <p:cNvPr id="6" name="Rectangle 5"/>
-          <p:cNvSpPr/>
-          <p:nvPr/>
-        </p:nvSpPr>
-        <p:spPr>
-          <a:xfrm>
-            <a:off x="4145280" y="5401056"/>
-            <a:ext cx="7168896" cy="9144"/>
-          </a:xfrm>
-          <a:prstGeom prst="rect">
-            <a:avLst/>
-          </a:prstGeom>
-          <a:solidFill>
-            <a:srgbClr val="4A6079"/>
-          </a:solidFill>
-          <a:ln>
-            <a:noFill/>
-          </a:ln>
-          <a:effectLst/>
-        </p:spPr>
-        <p:style>
-          <a:lnRef idx="1">
-            <a:schemeClr val="accent1"/>
-          </a:lnRef>
-          <a:fillRef idx="3">
-            <a:schemeClr val="accent1"/>
-          </a:fillRef>
-          <a:effectRef idx="2">
-            <a:schemeClr val="accent1"/>
-          </a:effectRef>
-          <a:fontRef idx="minor">
-            <a:schemeClr val="lt1"/>
-          </a:fontRef>
-        </p:style>
-        <p:txBody>
-          <a:bodyPr rtlCol="0" anchor="ctr"/>
-          <a:lstStyle/>
-          <a:p/>
-        </p:txBody>
-      </p:sp>
-      <p:pic>
-        <p:nvPicPr>
-          <p:cNvPr id="7" name="Picture 6" descr="deckimg-8nlfkq8s.jpg"/>
-          <p:cNvPicPr>
-            <a:picLocks noChangeAspect="1"/>
-          </p:cNvPicPr>
-          <p:nvPr/>
-        </p:nvPicPr>
-        <p:blipFill>
-          <a:blip r:embed="rId2"/>
-          <a:srcRect t="36" b="36"/>
-          <a:stretch>
-            <a:fillRect/>
-          </a:stretch>
-        </p:blipFill>
-        <p:spPr>
-          <a:xfrm>
-            <a:off x="0" y="0"/>
-            <a:ext cx="12192000" cy="3566160"/>
-          </a:xfrm>
-          <a:prstGeom prst="rect">
-            <a:avLst/>
-          </a:prstGeom>
-        </p:spPr>
-      </p:pic>
-      <p:sp>
-        <p:nvSpPr>
-          <p:cNvPr id="8" name="TextBox 7"/>
+          <p:cNvPr id="4" name="TextBox 3"/>
           <p:cNvSpPr txBox="1"/>
           <p:nvPr/>
         </p:nvSpPr>
@@ -10723,68 +8287,27 @@
             <a:r>
               <a:rPr sz="1000" b="0" spc="80">
                 <a:solidFill>
-                  <a:srgbClr val="FFFFFF"/>
+                  <a:srgbClr val="000000"/>
                 </a:solidFill>
                 <a:latin typeface="Montserrat Bold"/>
                 <a:cs typeface="Montserrat Bold"/>
                 <a:sym typeface="Montserrat Bold"/>
               </a:rPr>
-              <a:t>08/15</a:t>
-            </a:r>
-          </a:p>
-        </p:txBody>
-      </p:sp>
-      <p:sp>
-        <p:nvSpPr>
-          <p:cNvPr id="9" name="TextBox 8"/>
+              <a:t>08/10</a:t>
+            </a:r>
+          </a:p>
+        </p:txBody>
+      </p:sp>
+      <p:sp>
+        <p:nvSpPr>
+          <p:cNvPr id="5" name="TextBox 4"/>
           <p:cNvSpPr txBox="1"/>
           <p:nvPr/>
         </p:nvSpPr>
         <p:spPr>
           <a:xfrm>
-            <a:off x="658368" y="3803904"/>
-            <a:ext cx="3413760" cy="866364"/>
-          </a:xfrm>
-          <a:prstGeom prst="rect">
-            <a:avLst/>
-          </a:prstGeom>
-          <a:noFill/>
-        </p:spPr>
-        <p:txBody>
-          <a:bodyPr wrap="square" anchor="t" lIns="0" rIns="0" tIns="0" bIns="0">
-            <a:normAutofit/>
-          </a:bodyPr>
-          <a:lstStyle/>
-          <a:p>
-            <a:pPr algn="l">
-              <a:lnSpc>
-                <a:spcPct val="106471"/>
-              </a:lnSpc>
-            </a:pPr>
-            <a:r>
-              <a:rPr sz="1394" b="0">
-                <a:solidFill>
-                  <a:srgbClr val="4A6079"/>
-                </a:solidFill>
-                <a:latin typeface="Space Grotesk"/>
-                <a:cs typeface="Space Grotesk"/>
-                <a:sym typeface="Space Grotesk"/>
-              </a:rPr>
-              <a:t>Three public source families federated by Lightning, queried with one portable SQL dialect.</a:t>
-            </a:r>
-          </a:p>
-        </p:txBody>
-      </p:sp>
-      <p:sp>
-        <p:nvSpPr>
-          <p:cNvPr id="10" name="TextBox 9"/>
-          <p:cNvSpPr txBox="1"/>
-          <p:nvPr/>
-        </p:nvSpPr>
-        <p:spPr>
-          <a:xfrm>
-            <a:off x="658368" y="4765040"/>
-            <a:ext cx="3413760" cy="1588736"/>
+            <a:off x="658368" y="1215030"/>
+            <a:ext cx="7395180" cy="960128"/>
           </a:xfrm>
           <a:prstGeom prst="rect">
             <a:avLst/>
@@ -10803,7 +8326,7 @@
               </a:lnSpc>
             </a:pPr>
             <a:r>
-              <a:rPr sz="3248" b="0">
+              <a:rPr sz="5800" b="0">
                 <a:solidFill>
                   <a:srgbClr val="10304F"/>
                 </a:solidFill>
@@ -10811,21 +8334,21 @@
                 <a:cs typeface="Space Grotesk Bold"/>
                 <a:sym typeface="Space Grotesk Bold"/>
               </a:rPr>
-              <a:t>Zetaris is the data harness</a:t>
-            </a:r>
-          </a:p>
-        </p:txBody>
-      </p:sp>
-      <p:sp>
-        <p:nvSpPr>
-          <p:cNvPr id="11" name="TextBox 10"/>
+              <a:t>Where it fails</a:t>
+            </a:r>
+          </a:p>
+        </p:txBody>
+      </p:sp>
+      <p:sp>
+        <p:nvSpPr>
+          <p:cNvPr id="6" name="TextBox 5"/>
           <p:cNvSpPr txBox="1"/>
           <p:nvPr/>
         </p:nvSpPr>
         <p:spPr>
           <a:xfrm>
-            <a:off x="4145280" y="3931920"/>
-            <a:ext cx="7168896" cy="329434"/>
+            <a:off x="658368" y="4104534"/>
+            <a:ext cx="3396488" cy="324307"/>
           </a:xfrm>
           <a:prstGeom prst="rect">
             <a:avLst/>
@@ -10838,7 +8361,7 @@
           </a:bodyPr>
           <a:lstStyle/>
           <a:p>
-            <a:pPr algn="l">
+            <a:pPr algn="ctr">
               <a:lnSpc>
                 <a:spcPct val="91750"/>
               </a:lnSpc>
@@ -10852,21 +8375,21 @@
                 <a:cs typeface="Montserrat Bold"/>
                 <a:sym typeface="Montserrat Bold"/>
               </a:rPr>
-              <a:t>Tables</a:t>
-            </a:r>
-          </a:p>
-        </p:txBody>
-      </p:sp>
-      <p:sp>
-        <p:nvSpPr>
-          <p:cNvPr id="12" name="TextBox 11"/>
+              <a:t>Tesla margin 2023</a:t>
+            </a:r>
+          </a:p>
+        </p:txBody>
+      </p:sp>
+      <p:sp>
+        <p:nvSpPr>
+          <p:cNvPr id="7" name="TextBox 6"/>
           <p:cNvSpPr txBox="1"/>
           <p:nvPr/>
         </p:nvSpPr>
         <p:spPr>
           <a:xfrm>
-            <a:off x="4145280" y="4275761"/>
-            <a:ext cx="7168896" cy="288788"/>
+            <a:off x="658368" y="4480454"/>
+            <a:ext cx="3396488" cy="1023884"/>
           </a:xfrm>
           <a:prstGeom prst="rect">
             <a:avLst/>
@@ -10879,35 +8402,35 @@
           </a:bodyPr>
           <a:lstStyle/>
           <a:p>
-            <a:pPr algn="l">
+            <a:pPr algn="ctr">
               <a:lnSpc>
                 <a:spcPct val="106471"/>
               </a:lnSpc>
             </a:pPr>
             <a:r>
-              <a:rPr sz="1394" b="0">
-                <a:solidFill>
-                  <a:srgbClr val="4A6079"/>
+              <a:rPr sz="1700" b="0">
+                <a:solidFill>
+                  <a:srgbClr val="10304F"/>
                 </a:solidFill>
                 <a:latin typeface="Space Grotesk"/>
                 <a:cs typeface="Space Grotesk"/>
                 <a:sym typeface="Space Grotesk"/>
               </a:rPr>
-              <a:t>SEC, ONS as REST tables; FRED as FILESTORE CSV</a:t>
-            </a:r>
-          </a:p>
-        </p:txBody>
-      </p:sp>
-      <p:sp>
-        <p:nvSpPr>
-          <p:cNvPr id="13" name="TextBox 12"/>
+              <a:t>Real cause was price cuts. No price data in filings. Answered Low 0.34.</a:t>
+            </a:r>
+          </a:p>
+        </p:txBody>
+      </p:sp>
+      <p:sp>
+        <p:nvSpPr>
+          <p:cNvPr id="8" name="TextBox 7"/>
           <p:cNvSpPr txBox="1"/>
           <p:nvPr/>
         </p:nvSpPr>
         <p:spPr>
           <a:xfrm>
-            <a:off x="4145280" y="4730496"/>
-            <a:ext cx="7168896" cy="329434"/>
+            <a:off x="4283456" y="4104534"/>
+            <a:ext cx="3396488" cy="324307"/>
           </a:xfrm>
           <a:prstGeom prst="rect">
             <a:avLst/>
@@ -10920,7 +8443,7 @@
           </a:bodyPr>
           <a:lstStyle/>
           <a:p>
-            <a:pPr algn="l">
+            <a:pPr algn="ctr">
               <a:lnSpc>
                 <a:spcPct val="91750"/>
               </a:lnSpc>
@@ -10934,21 +8457,21 @@
                 <a:cs typeface="Montserrat Bold"/>
                 <a:sym typeface="Montserrat Bold"/>
               </a:rPr>
-              <a:t>Channels</a:t>
-            </a:r>
-          </a:p>
-        </p:txBody>
-      </p:sp>
-      <p:sp>
-        <p:nvSpPr>
-          <p:cNvPr id="14" name="TextBox 13"/>
+              <a:t>Apple revenue FY2023</a:t>
+            </a:r>
+          </a:p>
+        </p:txBody>
+      </p:sp>
+      <p:sp>
+        <p:nvSpPr>
+          <p:cNvPr id="9" name="TextBox 8"/>
           <p:cNvSpPr txBox="1"/>
           <p:nvPr/>
         </p:nvSpPr>
         <p:spPr>
           <a:xfrm>
-            <a:off x="4145280" y="5074337"/>
-            <a:ext cx="7168896" cy="288788"/>
+            <a:off x="4283456" y="4480454"/>
+            <a:ext cx="3396488" cy="1325267"/>
           </a:xfrm>
           <a:prstGeom prst="rect">
             <a:avLst/>
@@ -10961,35 +8484,35 @@
           </a:bodyPr>
           <a:lstStyle/>
           <a:p>
-            <a:pPr algn="l">
+            <a:pPr algn="ctr">
               <a:lnSpc>
                 <a:spcPct val="106471"/>
               </a:lnSpc>
             </a:pPr>
             <a:r>
-              <a:rPr sz="1394" b="0">
-                <a:solidFill>
-                  <a:srgbClr val="4A6079"/>
+              <a:rPr sz="1700" b="0">
+                <a:solidFill>
+                  <a:srgbClr val="10304F"/>
                 </a:solidFill>
                 <a:latin typeface="Space Grotesk"/>
                 <a:cs typeface="Space Grotesk"/>
                 <a:sym typeface="Space Grotesk"/>
               </a:rPr>
-              <a:t>JDBC, UI SQL proxy or REST</a:t>
-            </a:r>
-          </a:p>
-        </p:txBody>
-      </p:sp>
-      <p:sp>
-        <p:nvSpPr>
-          <p:cNvPr id="15" name="TextBox 14"/>
+              <a:t>Real cause was Mac, iPad and a strong dollar. No segment or FX data. Medium 0.66.</a:t>
+            </a:r>
+          </a:p>
+        </p:txBody>
+      </p:sp>
+      <p:sp>
+        <p:nvSpPr>
+          <p:cNvPr id="10" name="TextBox 9"/>
           <p:cNvSpPr txBox="1"/>
           <p:nvPr/>
         </p:nvSpPr>
         <p:spPr>
           <a:xfrm>
-            <a:off x="4145280" y="5529072"/>
-            <a:ext cx="7168896" cy="329434"/>
+            <a:off x="7908544" y="4104534"/>
+            <a:ext cx="3396488" cy="324307"/>
           </a:xfrm>
           <a:prstGeom prst="rect">
             <a:avLst/>
@@ -11002,7 +8525,7 @@
           </a:bodyPr>
           <a:lstStyle/>
           <a:p>
-            <a:pPr algn="l">
+            <a:pPr algn="ctr">
               <a:lnSpc>
                 <a:spcPct val="91750"/>
               </a:lnSpc>
@@ -11016,21 +8539,21 @@
                 <a:cs typeface="Montserrat Bold"/>
                 <a:sym typeface="Montserrat Bold"/>
               </a:rPr>
-              <a:t>CI</a:t>
-            </a:r>
-          </a:p>
-        </p:txBody>
-      </p:sp>
-      <p:sp>
-        <p:nvSpPr>
-          <p:cNvPr id="16" name="TextBox 15"/>
+              <a:t>Intel revenue 2023</a:t>
+            </a:r>
+          </a:p>
+        </p:txBody>
+      </p:sp>
+      <p:sp>
+        <p:nvSpPr>
+          <p:cNvPr id="11" name="TextBox 10"/>
           <p:cNvSpPr txBox="1"/>
           <p:nvPr/>
         </p:nvSpPr>
         <p:spPr>
           <a:xfrm>
-            <a:off x="4145280" y="5872913"/>
-            <a:ext cx="7168896" cy="288788"/>
+            <a:off x="7908544" y="4480454"/>
+            <a:ext cx="3396488" cy="1325267"/>
           </a:xfrm>
           <a:prstGeom prst="rect">
             <a:avLst/>
@@ -11043,21 +8566,21 @@
           </a:bodyPr>
           <a:lstStyle/>
           <a:p>
-            <a:pPr algn="l">
+            <a:pPr algn="ctr">
               <a:lnSpc>
                 <a:spcPct val="106471"/>
               </a:lnSpc>
             </a:pPr>
             <a:r>
-              <a:rPr sz="1394" b="0">
-                <a:solidFill>
-                  <a:srgbClr val="4A6079"/>
+              <a:rPr sz="1700" b="0">
+                <a:solidFill>
+                  <a:srgbClr val="10304F"/>
                 </a:solidFill>
                 <a:latin typeface="Space Grotesk"/>
                 <a:cs typeface="Space Grotesk"/>
                 <a:sym typeface="Space Grotesk"/>
               </a:rPr>
-              <a:t>Real Lightning bundle on GitHub Actions</a:t>
+              <a:t>Real cause was weak PC and server demand. Only pricing pressure was supported.</a:t>
             </a:r>
           </a:p>
         </p:txBody>
@@ -11172,31 +8695,48 @@
           <a:p/>
         </p:txBody>
       </p:sp>
-      <p:pic>
-        <p:nvPicPr>
-          <p:cNvPr id="4" name="Picture 3" descr="deckimg-4tl18561.jpg"/>
-          <p:cNvPicPr>
-            <a:picLocks noChangeAspect="1"/>
-          </p:cNvPicPr>
-          <p:nvPr/>
-        </p:nvPicPr>
-        <p:blipFill>
-          <a:blip r:embed="rId2"/>
-          <a:srcRect t="12" b="12"/>
-          <a:stretch>
-            <a:fillRect/>
-          </a:stretch>
-        </p:blipFill>
-        <p:spPr>
-          <a:xfrm>
-            <a:off x="3657600" y="0"/>
-            <a:ext cx="4876800" cy="6858000"/>
-          </a:xfrm>
-          <a:prstGeom prst="rect">
-            <a:avLst/>
-          </a:prstGeom>
-        </p:spPr>
-      </p:pic>
+      <p:sp>
+        <p:nvSpPr>
+          <p:cNvPr id="4" name="Rectangle 3"/>
+          <p:cNvSpPr/>
+          <p:nvPr/>
+        </p:nvSpPr>
+        <p:spPr>
+          <a:xfrm>
+            <a:off x="658368" y="2305804"/>
+            <a:ext cx="10875264" cy="13716"/>
+          </a:xfrm>
+          <a:prstGeom prst="rect">
+            <a:avLst/>
+          </a:prstGeom>
+          <a:solidFill>
+            <a:srgbClr val="6B2A55"/>
+          </a:solidFill>
+          <a:ln>
+            <a:noFill/>
+          </a:ln>
+          <a:effectLst/>
+        </p:spPr>
+        <p:style>
+          <a:lnRef idx="1">
+            <a:schemeClr val="accent1"/>
+          </a:lnRef>
+          <a:fillRef idx="3">
+            <a:schemeClr val="accent1"/>
+          </a:fillRef>
+          <a:effectRef idx="2">
+            <a:schemeClr val="accent1"/>
+          </a:effectRef>
+          <a:fontRef idx="minor">
+            <a:schemeClr val="lt1"/>
+          </a:fontRef>
+        </p:style>
+        <p:txBody>
+          <a:bodyPr rtlCol="0" anchor="ctr"/>
+          <a:lstStyle/>
+          <a:p/>
+        </p:txBody>
+      </p:sp>
       <p:sp>
         <p:nvSpPr>
           <p:cNvPr id="5" name="TextBox 4"/>
@@ -11233,7 +8773,7 @@
                 <a:cs typeface="Montserrat Bold"/>
                 <a:sym typeface="Montserrat Bold"/>
               </a:rPr>
-              <a:t>09/15</a:t>
+              <a:t>09/10</a:t>
             </a:r>
           </a:p>
         </p:txBody>
@@ -11246,8 +8786,49 @@
         </p:nvSpPr>
         <p:spPr>
           <a:xfrm>
-            <a:off x="658368" y="822960"/>
-            <a:ext cx="411480" cy="351396"/>
+            <a:off x="658368" y="955586"/>
+            <a:ext cx="7830190" cy="960128"/>
+          </a:xfrm>
+          <a:prstGeom prst="rect">
+            <a:avLst/>
+          </a:prstGeom>
+          <a:noFill/>
+        </p:spPr>
+        <p:txBody>
+          <a:bodyPr wrap="square" anchor="t" lIns="0" rIns="0" tIns="0" bIns="0">
+            <a:normAutofit/>
+          </a:bodyPr>
+          <a:lstStyle/>
+          <a:p>
+            <a:pPr algn="l">
+              <a:lnSpc>
+                <a:spcPct val="88496"/>
+              </a:lnSpc>
+            </a:pPr>
+            <a:r>
+              <a:rPr sz="5800" b="0">
+                <a:solidFill>
+                  <a:srgbClr val="10304F"/>
+                </a:solidFill>
+                <a:latin typeface="Space Grotesk Bold"/>
+                <a:cs typeface="Space Grotesk Bold"/>
+                <a:sym typeface="Space Grotesk Bold"/>
+              </a:rPr>
+              <a:t>Sponsor stack</a:t>
+            </a:r>
+          </a:p>
+        </p:txBody>
+      </p:sp>
+      <p:sp>
+        <p:nvSpPr>
+          <p:cNvPr id="7" name="TextBox 6"/>
+          <p:cNvSpPr txBox="1"/>
+          <p:nvPr/>
+        </p:nvSpPr>
+        <p:spPr>
+          <a:xfrm>
+            <a:off x="658368" y="2072124"/>
+            <a:ext cx="3478784" cy="162154"/>
           </a:xfrm>
           <a:prstGeom prst="rect">
             <a:avLst/>
@@ -11268,27 +8849,109 @@
             <a:r>
               <a:rPr sz="1000" b="0" spc="80">
                 <a:solidFill>
-                  <a:srgbClr val="6B2A55"/>
+                  <a:srgbClr val="4A6079"/>
                 </a:solidFill>
                 <a:latin typeface="Montserrat Bold"/>
                 <a:cs typeface="Montserrat Bold"/>
                 <a:sym typeface="Montserrat Bold"/>
               </a:rPr>
-              <a:t>H-MEM</a:t>
-            </a:r>
-          </a:p>
-        </p:txBody>
-      </p:sp>
-      <p:sp>
-        <p:nvSpPr>
-          <p:cNvPr id="7" name="TextBox 6"/>
+              <a:t>SPONSOR</a:t>
+            </a:r>
+          </a:p>
+        </p:txBody>
+      </p:sp>
+      <p:sp>
+        <p:nvSpPr>
+          <p:cNvPr id="8" name="TextBox 7"/>
           <p:cNvSpPr txBox="1"/>
           <p:nvPr/>
         </p:nvSpPr>
         <p:spPr>
           <a:xfrm>
-            <a:off x="1170432" y="822960"/>
-            <a:ext cx="2103120" cy="1682070"/>
+            <a:off x="4283456" y="2072124"/>
+            <a:ext cx="3478784" cy="162154"/>
+          </a:xfrm>
+          <a:prstGeom prst="rect">
+            <a:avLst/>
+          </a:prstGeom>
+          <a:noFill/>
+        </p:spPr>
+        <p:txBody>
+          <a:bodyPr wrap="square" anchor="t" lIns="0" rIns="0" tIns="0" bIns="0">
+            <a:normAutofit/>
+          </a:bodyPr>
+          <a:lstStyle/>
+          <a:p>
+            <a:pPr algn="l">
+              <a:lnSpc>
+                <a:spcPct val="91750"/>
+              </a:lnSpc>
+            </a:pPr>
+            <a:r>
+              <a:rPr sz="1000" b="0" spc="80">
+                <a:solidFill>
+                  <a:srgbClr val="4A6079"/>
+                </a:solidFill>
+                <a:latin typeface="Montserrat Bold"/>
+                <a:cs typeface="Montserrat Bold"/>
+                <a:sym typeface="Montserrat Bold"/>
+              </a:rPr>
+              <a:t>WHAT IT DOES</a:t>
+            </a:r>
+          </a:p>
+        </p:txBody>
+      </p:sp>
+      <p:sp>
+        <p:nvSpPr>
+          <p:cNvPr id="9" name="TextBox 8"/>
+          <p:cNvSpPr txBox="1"/>
+          <p:nvPr/>
+        </p:nvSpPr>
+        <p:spPr>
+          <a:xfrm>
+            <a:off x="7908544" y="2072124"/>
+            <a:ext cx="3478784" cy="162154"/>
+          </a:xfrm>
+          <a:prstGeom prst="rect">
+            <a:avLst/>
+          </a:prstGeom>
+          <a:noFill/>
+        </p:spPr>
+        <p:txBody>
+          <a:bodyPr wrap="square" anchor="t" lIns="0" rIns="0" tIns="0" bIns="0">
+            <a:normAutofit/>
+          </a:bodyPr>
+          <a:lstStyle/>
+          <a:p>
+            <a:pPr algn="l">
+              <a:lnSpc>
+                <a:spcPct val="91750"/>
+              </a:lnSpc>
+            </a:pPr>
+            <a:r>
+              <a:rPr sz="1000" b="0" spc="80">
+                <a:solidFill>
+                  <a:srgbClr val="4A6079"/>
+                </a:solidFill>
+                <a:latin typeface="Montserrat Bold"/>
+                <a:cs typeface="Montserrat Bold"/>
+                <a:sym typeface="Montserrat Bold"/>
+              </a:rPr>
+              <a:t>STATUS</a:t>
+            </a:r>
+          </a:p>
+        </p:txBody>
+      </p:sp>
+      <p:sp>
+        <p:nvSpPr>
+          <p:cNvPr id="10" name="TextBox 9"/>
+          <p:cNvSpPr txBox="1"/>
+          <p:nvPr/>
+        </p:nvSpPr>
+        <p:spPr>
+          <a:xfrm>
+            <a:off x="658368" y="2452108"/>
+            <a:ext cx="3478784" cy="341295"/>
           </a:xfrm>
           <a:prstGeom prst="rect">
             <a:avLst/>
@@ -11307,7 +8970,7 @@
               </a:lnSpc>
             </a:pPr>
             <a:r>
-              <a:rPr sz="1394" b="0">
+              <a:rPr sz="1700" b="0">
                 <a:solidFill>
                   <a:srgbClr val="10304F"/>
                 </a:solidFill>
@@ -11315,62 +8978,21 @@
                 <a:cs typeface="Space Grotesk"/>
                 <a:sym typeface="Space Grotesk"/>
               </a:rPr>
-              <a:t>Every finding is a memory with SQL, rows and source URL. Conflict scan flags restated numbers.</a:t>
-            </a:r>
-          </a:p>
-        </p:txBody>
-      </p:sp>
-      <p:sp>
-        <p:nvSpPr>
-          <p:cNvPr id="8" name="TextBox 7"/>
+              <a:t>Zetaris</a:t>
+            </a:r>
+          </a:p>
+        </p:txBody>
+      </p:sp>
+      <p:sp>
+        <p:nvSpPr>
+          <p:cNvPr id="11" name="TextBox 10"/>
           <p:cNvSpPr txBox="1"/>
           <p:nvPr/>
         </p:nvSpPr>
         <p:spPr>
           <a:xfrm>
-            <a:off x="658368" y="2560320"/>
-            <a:ext cx="411480" cy="702792"/>
-          </a:xfrm>
-          <a:prstGeom prst="rect">
-            <a:avLst/>
-          </a:prstGeom>
-          <a:noFill/>
-        </p:spPr>
-        <p:txBody>
-          <a:bodyPr wrap="square" anchor="t" lIns="0" rIns="0" tIns="0" bIns="0">
-            <a:normAutofit/>
-          </a:bodyPr>
-          <a:lstStyle/>
-          <a:p>
-            <a:pPr algn="l">
-              <a:lnSpc>
-                <a:spcPct val="91750"/>
-              </a:lnSpc>
-            </a:pPr>
-            <a:r>
-              <a:rPr sz="1000" b="0" spc="80">
-                <a:solidFill>
-                  <a:srgbClr val="6B2A55"/>
-                </a:solidFill>
-                <a:latin typeface="Montserrat Bold"/>
-                <a:cs typeface="Montserrat Bold"/>
-                <a:sym typeface="Montserrat Bold"/>
-              </a:rPr>
-              <a:t>SCOUT INTENT</a:t>
-            </a:r>
-          </a:p>
-        </p:txBody>
-      </p:sp>
-      <p:sp>
-        <p:nvSpPr>
-          <p:cNvPr id="9" name="TextBox 8"/>
-          <p:cNvSpPr txBox="1"/>
-          <p:nvPr/>
-        </p:nvSpPr>
-        <p:spPr>
-          <a:xfrm>
-            <a:off x="1170432" y="2560320"/>
-            <a:ext cx="2103120" cy="1443939"/>
+            <a:off x="4283456" y="2452108"/>
+            <a:ext cx="3478784" cy="682589"/>
           </a:xfrm>
           <a:prstGeom prst="rect">
             <a:avLst/>
@@ -11389,7 +9011,7 @@
               </a:lnSpc>
             </a:pPr>
             <a:r>
-              <a:rPr sz="1394" b="0">
+              <a:rPr sz="1700" b="0">
                 <a:solidFill>
                   <a:srgbClr val="10304F"/>
                 </a:solidFill>
@@ -11397,62 +9019,21 @@
                 <a:cs typeface="Space Grotesk"/>
                 <a:sym typeface="Space Grotesk"/>
               </a:rPr>
-              <a:t>Intent registry, five-layer guard, HMAC-SHA256 contracts with TTL and scope checks.</a:t>
-            </a:r>
-          </a:p>
-        </p:txBody>
-      </p:sp>
-      <p:sp>
-        <p:nvSpPr>
-          <p:cNvPr id="10" name="TextBox 9"/>
+              <a:t>Federated SQL harness, USL model</a:t>
+            </a:r>
+          </a:p>
+        </p:txBody>
+      </p:sp>
+      <p:sp>
+        <p:nvSpPr>
+          <p:cNvPr id="12" name="TextBox 11"/>
           <p:cNvSpPr txBox="1"/>
           <p:nvPr/>
         </p:nvSpPr>
         <p:spPr>
           <a:xfrm>
-            <a:off x="658368" y="4297680"/>
-            <a:ext cx="411480" cy="527094"/>
-          </a:xfrm>
-          <a:prstGeom prst="rect">
-            <a:avLst/>
-          </a:prstGeom>
-          <a:noFill/>
-        </p:spPr>
-        <p:txBody>
-          <a:bodyPr wrap="square" anchor="t" lIns="0" rIns="0" tIns="0" bIns="0">
-            <a:normAutofit/>
-          </a:bodyPr>
-          <a:lstStyle/>
-          <a:p>
-            <a:pPr algn="l">
-              <a:lnSpc>
-                <a:spcPct val="91750"/>
-              </a:lnSpc>
-            </a:pPr>
-            <a:r>
-              <a:rPr sz="1000" b="0" spc="80">
-                <a:solidFill>
-                  <a:srgbClr val="6B2A55"/>
-                </a:solidFill>
-                <a:latin typeface="Montserrat Bold"/>
-                <a:cs typeface="Montserrat Bold"/>
-                <a:sym typeface="Montserrat Bold"/>
-              </a:rPr>
-              <a:t>ASK IT WHY</a:t>
-            </a:r>
-          </a:p>
-        </p:txBody>
-      </p:sp>
-      <p:sp>
-        <p:nvSpPr>
-          <p:cNvPr id="11" name="TextBox 10"/>
-          <p:cNvSpPr txBox="1"/>
-          <p:nvPr/>
-        </p:nvSpPr>
-        <p:spPr>
-          <a:xfrm>
-            <a:off x="1170432" y="4297680"/>
-            <a:ext cx="2103120" cy="1401725"/>
+            <a:off x="7908544" y="2452108"/>
+            <a:ext cx="3478784" cy="341295"/>
           </a:xfrm>
           <a:prstGeom prst="rect">
             <a:avLst/>
@@ -11471,7 +9052,7 @@
               </a:lnSpc>
             </a:pPr>
             <a:r>
-              <a:rPr sz="1394" b="0">
+              <a:rPr sz="1700" b="0">
                 <a:solidFill>
                   <a:srgbClr val="10304F"/>
                 </a:solidFill>
@@ -11479,48 +9060,7 @@
                 <a:cs typeface="Space Grotesk"/>
                 <a:sym typeface="Space Grotesk"/>
               </a:rPr>
-              <a:t>Memory recall answers what it believes and audits the trail behind each belief.</a:t>
-            </a:r>
-          </a:p>
-        </p:txBody>
-      </p:sp>
-      <p:sp>
-        <p:nvSpPr>
-          <p:cNvPr id="12" name="TextBox 11"/>
-          <p:cNvSpPr txBox="1"/>
-          <p:nvPr/>
-        </p:nvSpPr>
-        <p:spPr>
-          <a:xfrm>
-            <a:off x="8918448" y="2209922"/>
-            <a:ext cx="2615184" cy="1374729"/>
-          </a:xfrm>
-          <a:prstGeom prst="rect">
-            <a:avLst/>
-          </a:prstGeom>
-          <a:noFill/>
-        </p:spPr>
-        <p:txBody>
-          <a:bodyPr wrap="square" anchor="t" lIns="0" rIns="0" tIns="0" bIns="0">
-            <a:normAutofit/>
-          </a:bodyPr>
-          <a:lstStyle/>
-          <a:p>
-            <a:pPr algn="l">
-              <a:lnSpc>
-                <a:spcPct val="88496"/>
-              </a:lnSpc>
-            </a:pPr>
-            <a:r>
-              <a:rPr sz="2668" b="0">
-                <a:solidFill>
-                  <a:srgbClr val="10304F"/>
-                </a:solidFill>
-                <a:latin typeface="Space Grotesk Bold"/>
-                <a:cs typeface="Space Grotesk Bold"/>
-                <a:sym typeface="Space Grotesk Bold"/>
-              </a:rPr>
-              <a:t>Meterless remembers why</a:t>
+              <a:t>Green CI run, 5/5</a:t>
             </a:r>
           </a:p>
         </p:txBody>
@@ -11533,8 +9073,8 @@
         </p:nvSpPr>
         <p:spPr>
           <a:xfrm>
-            <a:off x="8918448" y="3616993"/>
-            <a:ext cx="2615184" cy="1656584"/>
+            <a:off x="658368" y="3402622"/>
+            <a:ext cx="3478784" cy="341295"/>
           </a:xfrm>
           <a:prstGeom prst="rect">
             <a:avLst/>
@@ -11555,13 +9095,341 @@
             <a:r>
               <a:rPr sz="1700" b="0">
                 <a:solidFill>
-                  <a:srgbClr val="4A6079"/>
+                  <a:srgbClr val="10304F"/>
                 </a:solidFill>
                 <a:latin typeface="Space Grotesk"/>
                 <a:cs typeface="Space Grotesk"/>
                 <a:sym typeface="Space Grotesk"/>
               </a:rPr>
-              <a:t>H-MEM stores beliefs with the query that produced them. Scout gates every tool call.</a:t>
+              <a:t>Meterless</a:t>
+            </a:r>
+          </a:p>
+        </p:txBody>
+      </p:sp>
+      <p:sp>
+        <p:nvSpPr>
+          <p:cNvPr id="14" name="TextBox 13"/>
+          <p:cNvSpPr txBox="1"/>
+          <p:nvPr/>
+        </p:nvSpPr>
+        <p:spPr>
+          <a:xfrm>
+            <a:off x="4283456" y="3402622"/>
+            <a:ext cx="3478784" cy="682589"/>
+          </a:xfrm>
+          <a:prstGeom prst="rect">
+            <a:avLst/>
+          </a:prstGeom>
+          <a:noFill/>
+        </p:spPr>
+        <p:txBody>
+          <a:bodyPr wrap="square" anchor="t" lIns="0" rIns="0" tIns="0" bIns="0">
+            <a:normAutofit/>
+          </a:bodyPr>
+          <a:lstStyle/>
+          <a:p>
+            <a:pPr algn="l">
+              <a:lnSpc>
+                <a:spcPct val="106471"/>
+              </a:lnSpc>
+            </a:pPr>
+            <a:r>
+              <a:rPr sz="1700" b="0">
+                <a:solidFill>
+                  <a:srgbClr val="10304F"/>
+                </a:solidFill>
+                <a:latin typeface="Space Grotesk"/>
+                <a:cs typeface="Space Grotesk"/>
+                <a:sym typeface="Space Grotesk"/>
+              </a:rPr>
+              <a:t>Scout contracts, H-MEM provenance</a:t>
+            </a:r>
+          </a:p>
+        </p:txBody>
+      </p:sp>
+      <p:sp>
+        <p:nvSpPr>
+          <p:cNvPr id="15" name="TextBox 14"/>
+          <p:cNvSpPr txBox="1"/>
+          <p:nvPr/>
+        </p:nvSpPr>
+        <p:spPr>
+          <a:xfrm>
+            <a:off x="7908544" y="3402622"/>
+            <a:ext cx="3478784" cy="341295"/>
+          </a:xfrm>
+          <a:prstGeom prst="rect">
+            <a:avLst/>
+          </a:prstGeom>
+          <a:noFill/>
+        </p:spPr>
+        <p:txBody>
+          <a:bodyPr wrap="square" anchor="t" lIns="0" rIns="0" tIns="0" bIns="0">
+            <a:normAutofit/>
+          </a:bodyPr>
+          <a:lstStyle/>
+          <a:p>
+            <a:pPr algn="l">
+              <a:lnSpc>
+                <a:spcPct val="106471"/>
+              </a:lnSpc>
+            </a:pPr>
+            <a:r>
+              <a:rPr sz="1700" b="0">
+                <a:solidFill>
+                  <a:srgbClr val="10304F"/>
+                </a:solidFill>
+                <a:latin typeface="Space Grotesk"/>
+                <a:cs typeface="Space Grotesk"/>
+                <a:sym typeface="Space Grotesk"/>
+              </a:rPr>
+              <a:t>H-MEM 13/13, Scout PASS</a:t>
+            </a:r>
+          </a:p>
+        </p:txBody>
+      </p:sp>
+      <p:sp>
+        <p:nvSpPr>
+          <p:cNvPr id="16" name="TextBox 15"/>
+          <p:cNvSpPr txBox="1"/>
+          <p:nvPr/>
+        </p:nvSpPr>
+        <p:spPr>
+          <a:xfrm>
+            <a:off x="658368" y="4353137"/>
+            <a:ext cx="3478784" cy="341295"/>
+          </a:xfrm>
+          <a:prstGeom prst="rect">
+            <a:avLst/>
+          </a:prstGeom>
+          <a:noFill/>
+        </p:spPr>
+        <p:txBody>
+          <a:bodyPr wrap="square" anchor="t" lIns="0" rIns="0" tIns="0" bIns="0">
+            <a:normAutofit/>
+          </a:bodyPr>
+          <a:lstStyle/>
+          <a:p>
+            <a:pPr algn="l">
+              <a:lnSpc>
+                <a:spcPct val="106471"/>
+              </a:lnSpc>
+            </a:pPr>
+            <a:r>
+              <a:rPr sz="1700" b="0">
+                <a:solidFill>
+                  <a:srgbClr val="10304F"/>
+                </a:solidFill>
+                <a:latin typeface="Space Grotesk"/>
+                <a:cs typeface="Space Grotesk"/>
+                <a:sym typeface="Space Grotesk"/>
+              </a:rPr>
+              <a:t>NVIDIA NIM</a:t>
+            </a:r>
+          </a:p>
+        </p:txBody>
+      </p:sp>
+      <p:sp>
+        <p:nvSpPr>
+          <p:cNvPr id="17" name="TextBox 16"/>
+          <p:cNvSpPr txBox="1"/>
+          <p:nvPr/>
+        </p:nvSpPr>
+        <p:spPr>
+          <a:xfrm>
+            <a:off x="4283456" y="4353137"/>
+            <a:ext cx="3478784" cy="682589"/>
+          </a:xfrm>
+          <a:prstGeom prst="rect">
+            <a:avLst/>
+          </a:prstGeom>
+          <a:noFill/>
+        </p:spPr>
+        <p:txBody>
+          <a:bodyPr wrap="square" anchor="t" lIns="0" rIns="0" tIns="0" bIns="0">
+            <a:normAutofit/>
+          </a:bodyPr>
+          <a:lstStyle/>
+          <a:p>
+            <a:pPr algn="l">
+              <a:lnSpc>
+                <a:spcPct val="106471"/>
+              </a:lnSpc>
+            </a:pPr>
+            <a:r>
+              <a:rPr sz="1700" b="0">
+                <a:solidFill>
+                  <a:srgbClr val="10304F"/>
+                </a:solidFill>
+                <a:latin typeface="Space Grotesk"/>
+                <a:cs typeface="Space Grotesk"/>
+                <a:sym typeface="Space Grotesk"/>
+              </a:rPr>
+              <a:t>Validated narrative, Nemotron 3.5</a:t>
+            </a:r>
+          </a:p>
+        </p:txBody>
+      </p:sp>
+      <p:sp>
+        <p:nvSpPr>
+          <p:cNvPr id="18" name="TextBox 17"/>
+          <p:cNvSpPr txBox="1"/>
+          <p:nvPr/>
+        </p:nvSpPr>
+        <p:spPr>
+          <a:xfrm>
+            <a:off x="7908544" y="4353137"/>
+            <a:ext cx="3478784" cy="682589"/>
+          </a:xfrm>
+          <a:prstGeom prst="rect">
+            <a:avLst/>
+          </a:prstGeom>
+          <a:noFill/>
+        </p:spPr>
+        <p:txBody>
+          <a:bodyPr wrap="square" anchor="t" lIns="0" rIns="0" tIns="0" bIns="0">
+            <a:normAutofit/>
+          </a:bodyPr>
+          <a:lstStyle/>
+          <a:p>
+            <a:pPr algn="l">
+              <a:lnSpc>
+                <a:spcPct val="106471"/>
+              </a:lnSpc>
+            </a:pPr>
+            <a:r>
+              <a:rPr sz="1700" b="0">
+                <a:solidFill>
+                  <a:srgbClr val="10304F"/>
+                </a:solidFill>
+                <a:latin typeface="Space Grotesk"/>
+                <a:cs typeface="Space Grotesk"/>
+                <a:sym typeface="Space Grotesk"/>
+              </a:rPr>
+              <a:t>Real runs; guard rejected invented numbers</a:t>
+            </a:r>
+          </a:p>
+        </p:txBody>
+      </p:sp>
+      <p:sp>
+        <p:nvSpPr>
+          <p:cNvPr id="19" name="TextBox 18"/>
+          <p:cNvSpPr txBox="1"/>
+          <p:nvPr/>
+        </p:nvSpPr>
+        <p:spPr>
+          <a:xfrm>
+            <a:off x="658368" y="5303651"/>
+            <a:ext cx="3478784" cy="341295"/>
+          </a:xfrm>
+          <a:prstGeom prst="rect">
+            <a:avLst/>
+          </a:prstGeom>
+          <a:noFill/>
+        </p:spPr>
+        <p:txBody>
+          <a:bodyPr wrap="square" anchor="t" lIns="0" rIns="0" tIns="0" bIns="0">
+            <a:normAutofit/>
+          </a:bodyPr>
+          <a:lstStyle/>
+          <a:p>
+            <a:pPr algn="l">
+              <a:lnSpc>
+                <a:spcPct val="106471"/>
+              </a:lnSpc>
+            </a:pPr>
+            <a:r>
+              <a:rPr sz="1700" b="0">
+                <a:solidFill>
+                  <a:srgbClr val="10304F"/>
+                </a:solidFill>
+                <a:latin typeface="Space Grotesk"/>
+                <a:cs typeface="Space Grotesk"/>
+                <a:sym typeface="Space Grotesk"/>
+              </a:rPr>
+              <a:t>Cursor</a:t>
+            </a:r>
+          </a:p>
+        </p:txBody>
+      </p:sp>
+      <p:sp>
+        <p:nvSpPr>
+          <p:cNvPr id="20" name="TextBox 19"/>
+          <p:cNvSpPr txBox="1"/>
+          <p:nvPr/>
+        </p:nvSpPr>
+        <p:spPr>
+          <a:xfrm>
+            <a:off x="4283456" y="5303651"/>
+            <a:ext cx="3478784" cy="341295"/>
+          </a:xfrm>
+          <a:prstGeom prst="rect">
+            <a:avLst/>
+          </a:prstGeom>
+          <a:noFill/>
+        </p:spPr>
+        <p:txBody>
+          <a:bodyPr wrap="square" anchor="t" lIns="0" rIns="0" tIns="0" bIns="0">
+            <a:normAutofit/>
+          </a:bodyPr>
+          <a:lstStyle/>
+          <a:p>
+            <a:pPr algn="l">
+              <a:lnSpc>
+                <a:spcPct val="106471"/>
+              </a:lnSpc>
+            </a:pPr>
+            <a:r>
+              <a:rPr sz="1700" b="0">
+                <a:solidFill>
+                  <a:srgbClr val="10304F"/>
+                </a:solidFill>
+                <a:latin typeface="Space Grotesk"/>
+                <a:cs typeface="Space Grotesk"/>
+                <a:sym typeface="Space Grotesk"/>
+              </a:rPr>
+              <a:t>Rules and agent sessions</a:t>
+            </a:r>
+          </a:p>
+        </p:txBody>
+      </p:sp>
+      <p:sp>
+        <p:nvSpPr>
+          <p:cNvPr id="21" name="TextBox 20"/>
+          <p:cNvSpPr txBox="1"/>
+          <p:nvPr/>
+        </p:nvSpPr>
+        <p:spPr>
+          <a:xfrm>
+            <a:off x="7908544" y="5303651"/>
+            <a:ext cx="3478784" cy="682589"/>
+          </a:xfrm>
+          <a:prstGeom prst="rect">
+            <a:avLst/>
+          </a:prstGeom>
+          <a:noFill/>
+        </p:spPr>
+        <p:txBody>
+          <a:bodyPr wrap="square" anchor="t" lIns="0" rIns="0" tIns="0" bIns="0">
+            <a:normAutofit/>
+          </a:bodyPr>
+          <a:lstStyle/>
+          <a:p>
+            <a:pPr algn="l">
+              <a:lnSpc>
+                <a:spcPct val="106471"/>
+              </a:lnSpc>
+            </a:pPr>
+            <a:r>
+              <a:rPr sz="1700" b="0">
+                <a:solidFill>
+                  <a:srgbClr val="10304F"/>
+                </a:solidFill>
+                <a:latin typeface="Space Grotesk"/>
+                <a:cs typeface="Space Grotesk"/>
+                <a:sym typeface="Space Grotesk"/>
+              </a:rPr>
+              <a:t>3 logged sessions; latest fixes without it</a:t>
             </a:r>
           </a:p>
         </p:txBody>
